--- a/FAS_Defense_Presentation_CN.pptx
+++ b/FAS_Defense_Presentation_CN.pptx
@@ -21,9 +21,10 @@
     <p:sldId id="269" r:id="rId15"/>
     <p:sldId id="270" r:id="rId16"/>
     <p:sldId id="271" r:id="rId17"/>
+    <p:sldId id="272" r:id="rId18"/>
   </p:sldIdLst>
   <p:notesMasterIdLst>
-    <p:notesMasterId r:id="rId18"/>
+    <p:notesMasterId r:id="rId19"/>
   </p:notesMasterIdLst>
   <p:sldSz cx="12191695" cy="6858000"/>
   <p:notesSz cx="6858000" cy="12191695"/>
@@ -1157,6 +1158,94 @@
             <a:fld id="{F7021451-1387-4CA6-816F-3879F97B5CBC}" type="slidenum">
               <a:rPr lang="en-US"/>
               <a:t>16</a:t>
+            </a:fld>
+            <a:endParaRPr lang="en-US"/>
+          </a:p>
+        </p:txBody>
+      </p:sp>
+    </p:spTree>
+    <p:extLst>
+      <p:ext uri="{BB962C8B-B14F-4D97-AF65-F5344CB8AC3E}">
+        <p14:creationId xmlns:p14="http://schemas.microsoft.com/office/powerpoint/2010/main" val="1024086991"/>
+      </p:ext>
+    </p:extLst>
+  </p:cSld>
+  <p:clrMapOvr>
+    <a:masterClrMapping/>
+  </p:clrMapOvr>
+</p:notes>
+</file>
+
+<file path=ppt/notesSlides/notesSlide17.xml><?xml version="1.0" encoding="utf-8"?>
+<p:notes xmlns:a="http://schemas.openxmlformats.org/drawingml/2006/main" xmlns:r="http://schemas.openxmlformats.org/officeDocument/2006/relationships" xmlns:p="http://schemas.openxmlformats.org/presentationml/2006/main">
+  <p:cSld>
+    <p:spTree>
+      <p:nvGrpSpPr>
+        <p:cNvPr id="1" name=""/>
+        <p:cNvGrpSpPr/>
+        <p:nvPr/>
+      </p:nvGrpSpPr>
+      <p:grpSpPr>
+        <a:xfrm>
+          <a:off x="0" y="0"/>
+          <a:ext cx="0" cy="0"/>
+          <a:chOff x="0" y="0"/>
+          <a:chExt cx="0" cy="0"/>
+        </a:xfrm>
+      </p:grpSpPr>
+      <p:sp>
+        <p:nvSpPr>
+          <p:cNvPr id="2" name="Slide Image Placeholder 1"/>
+          <p:cNvSpPr>
+            <a:spLocks noGrp="1" noRot="1" noChangeAspect="1"/>
+          </p:cNvSpPr>
+          <p:nvPr>
+            <p:ph type="sldImg"/>
+          </p:nvPr>
+        </p:nvSpPr>
+        <p:spPr/>
+      </p:sp>
+      <p:sp>
+        <p:nvSpPr>
+          <p:cNvPr id="3" name="Notes Placeholder 2"/>
+          <p:cNvSpPr>
+            <a:spLocks noGrp="1"/>
+          </p:cNvSpPr>
+          <p:nvPr>
+            <p:ph type="body" idx="1"/>
+          </p:nvPr>
+        </p:nvSpPr>
+        <p:spPr/>
+        <p:txBody>
+          <a:bodyPr/>
+          <a:lstStyle/>
+          <a:p>
+            <a:r>
+              <a:rPr lang="en-US" dirty="0"/>
+              <a:t/>
+            </a:r>
+            <a:endParaRPr lang="en-US" dirty="0"/>
+          </a:p>
+        </p:txBody>
+      </p:sp>
+      <p:sp>
+        <p:nvSpPr>
+          <p:cNvPr id="4" name="Slide Number Placeholder 3"/>
+          <p:cNvSpPr>
+            <a:spLocks noGrp="1"/>
+          </p:cNvSpPr>
+          <p:nvPr>
+            <p:ph type="sldNum" sz="quarter" idx="10"/>
+          </p:nvPr>
+        </p:nvSpPr>
+        <p:spPr/>
+        <p:txBody>
+          <a:bodyPr/>
+          <a:lstStyle/>
+          <a:p>
+            <a:fld id="{F7021451-1387-4CA6-816F-3879F97B5CBC}" type="slidenum">
+              <a:rPr lang="en-US"/>
+              <a:t>17</a:t>
             </a:fld>
             <a:endParaRPr lang="en-US"/>
           </a:p>
@@ -2218,8 +2307,8 @@
         </p:nvSpPr>
         <p:spPr>
           <a:xfrm>
-            <a:off x="685800" y="1234440"/>
-            <a:ext cx="10789920" cy="502920"/>
+            <a:off x="685800" y="1143000"/>
+            <a:ext cx="10881360" cy="594360"/>
           </a:xfrm>
           <a:prstGeom prst="rect">
             <a:avLst/>
@@ -2241,9 +2330,9 @@
                 <a:solidFill>
                   <a:srgbClr val="1F4E79"/>
                 </a:solidFill>
-                <a:latin typeface="Noto Sans CJK SC" pitchFamily="34" charset="0"/>
-                <a:ea typeface="Noto Sans CJK SC" pitchFamily="34" charset="-122"/>
-                <a:cs typeface="Noto Sans CJK SC" pitchFamily="34" charset="-120"/>
+                <a:latin typeface="Noto Sans CJK JP" pitchFamily="34" charset="0"/>
+                <a:ea typeface="Noto Sans CJK JP" pitchFamily="34" charset="-122"/>
+                <a:cs typeface="Noto Sans CJK JP" pitchFamily="34" charset="-120"/>
               </a:rPr>
               <a:t>基于 ResNet18 的跨数据集虚假人脸检测实验</a:t>
             </a:r>
@@ -2259,8 +2348,8 @@
         </p:nvSpPr>
         <p:spPr>
           <a:xfrm>
-            <a:off x="1051560" y="1965960"/>
-            <a:ext cx="10058400" cy="274320"/>
+            <a:off x="1051560" y="1874520"/>
+            <a:ext cx="10058400" cy="292608"/>
           </a:xfrm>
           <a:prstGeom prst="rect">
             <a:avLst/>
@@ -2282,9 +2371,9 @@
                 <a:solidFill>
                   <a:srgbClr val="4B5563"/>
                 </a:solidFill>
-                <a:latin typeface="Noto Sans CJK SC" pitchFamily="34" charset="0"/>
-                <a:ea typeface="Noto Sans CJK SC" pitchFamily="34" charset="-122"/>
-                <a:cs typeface="Noto Sans CJK SC" pitchFamily="34" charset="-120"/>
+                <a:latin typeface="Noto Sans CJK JP" pitchFamily="34" charset="0"/>
+                <a:ea typeface="Noto Sans CJK JP" pitchFamily="34" charset="-122"/>
+                <a:cs typeface="Noto Sans CJK JP" pitchFamily="34" charset="-120"/>
               </a:rPr>
               <a:t>Face Anti-Spoofing Baseline · Cross-Dataset Evaluation · Domain Generalization</a:t>
             </a:r>
@@ -2301,7 +2390,7 @@
         <p:spPr>
           <a:xfrm>
             <a:off x="1097280" y="2788920"/>
-            <a:ext cx="9966960" cy="320040"/>
+            <a:ext cx="9966960" cy="347472"/>
           </a:xfrm>
           <a:prstGeom prst="rect">
             <a:avLst/>
@@ -2319,17 +2408,17 @@
               <a:buNone/>
             </a:pPr>
             <a:r>
-              <a:rPr lang="en-US" sz="1600" b="1" dirty="0">
-                <a:solidFill>
-                  <a:srgbClr val="111827"/>
-                </a:solidFill>
-                <a:latin typeface="Noto Sans CJK SC" pitchFamily="34" charset="0"/>
-                <a:ea typeface="Noto Sans CJK SC" pitchFamily="34" charset="-122"/>
-                <a:cs typeface="Noto Sans CJK SC" pitchFamily="34" charset="-120"/>
-              </a:rPr>
-              <a:t>按周汇报：Baseline → 跨域失败 → 泛化增强 → 消融与可视化</a:t>
-            </a:r>
-            <a:endParaRPr lang="en-US" sz="1600" dirty="0"/>
+              <a:rPr lang="en-US" sz="1700" b="1" dirty="0">
+                <a:solidFill>
+                  <a:srgbClr val="111827"/>
+                </a:solidFill>
+                <a:latin typeface="Noto Sans CJK JP" pitchFamily="34" charset="0"/>
+                <a:ea typeface="Noto Sans CJK JP" pitchFamily="34" charset="-122"/>
+                <a:cs typeface="Noto Sans CJK JP" pitchFamily="34" charset="-120"/>
+              </a:rPr>
+              <a:t>最终版：按周汇报完整实验链路</a:t>
+            </a:r>
+            <a:endParaRPr lang="en-US" sz="1700" dirty="0"/>
           </a:p>
         </p:txBody>
       </p:sp>
@@ -2341,8 +2430,8 @@
         </p:nvSpPr>
         <p:spPr>
           <a:xfrm>
-            <a:off x="1417320" y="3977640"/>
-            <a:ext cx="2560320" cy="201168"/>
+            <a:off x="1097280" y="3977640"/>
+            <a:ext cx="2377440" cy="201168"/>
           </a:xfrm>
           <a:prstGeom prst="rect">
             <a:avLst/>
@@ -2360,17 +2449,17 @@
               <a:buNone/>
             </a:pPr>
             <a:r>
-              <a:rPr lang="en-US" sz="880" dirty="0">
+              <a:rPr lang="en-US" sz="850" dirty="0">
                 <a:solidFill>
                   <a:srgbClr val="4B5563"/>
                 </a:solidFill>
-                <a:latin typeface="Noto Sans CJK SC" pitchFamily="34" charset="0"/>
-                <a:ea typeface="Noto Sans CJK SC" pitchFamily="34" charset="-122"/>
-                <a:cs typeface="Noto Sans CJK SC" pitchFamily="34" charset="-120"/>
-              </a:rPr>
-              <a:t>源数据集</a:t>
-            </a:r>
-            <a:endParaRPr lang="en-US" sz="880" dirty="0"/>
+                <a:latin typeface="Noto Sans CJK JP" pitchFamily="34" charset="0"/>
+                <a:ea typeface="Noto Sans CJK JP" pitchFamily="34" charset="-122"/>
+                <a:cs typeface="Noto Sans CJK JP" pitchFamily="34" charset="-120"/>
+              </a:rPr>
+              <a:t>数据入口</a:t>
+            </a:r>
+            <a:endParaRPr lang="en-US" sz="850" dirty="0"/>
           </a:p>
         </p:txBody>
       </p:sp>
@@ -2382,8 +2471,8 @@
         </p:nvSpPr>
         <p:spPr>
           <a:xfrm>
-            <a:off x="1417320" y="4197096"/>
-            <a:ext cx="2560320" cy="384048"/>
+            <a:off x="1097280" y="4187952"/>
+            <a:ext cx="2377440" cy="420624"/>
           </a:xfrm>
           <a:prstGeom prst="rect">
             <a:avLst/>
@@ -2405,11 +2494,11 @@
                 <a:solidFill>
                   <a:srgbClr val="078080"/>
                 </a:solidFill>
-                <a:latin typeface="Noto Sans CJK SC" pitchFamily="34" charset="0"/>
-                <a:ea typeface="Noto Sans CJK SC" pitchFamily="34" charset="-122"/>
-                <a:cs typeface="Noto Sans CJK SC" pitchFamily="34" charset="-120"/>
-              </a:rPr>
-              <a:t>OULU-NPU</a:t>
+                <a:latin typeface="Noto Sans CJK JP" pitchFamily="34" charset="0"/>
+                <a:ea typeface="Noto Sans CJK JP" pitchFamily="34" charset="-122"/>
+                <a:cs typeface="Noto Sans CJK JP" pitchFamily="34" charset="-120"/>
+              </a:rPr>
+              <a:t>ProcessedData</a:t>
             </a:r>
             <a:endParaRPr lang="en-US" sz="1900" dirty="0"/>
           </a:p>
@@ -2423,8 +2512,8 @@
         </p:nvSpPr>
         <p:spPr>
           <a:xfrm>
-            <a:off x="4114800" y="3977640"/>
-            <a:ext cx="2834640" cy="201168"/>
+            <a:off x="3657600" y="3977640"/>
+            <a:ext cx="1828800" cy="201168"/>
           </a:xfrm>
           <a:prstGeom prst="rect">
             <a:avLst/>
@@ -2442,17 +2531,17 @@
               <a:buNone/>
             </a:pPr>
             <a:r>
-              <a:rPr lang="en-US" sz="880" dirty="0">
+              <a:rPr lang="en-US" sz="850" dirty="0">
                 <a:solidFill>
                   <a:srgbClr val="4B5563"/>
                 </a:solidFill>
-                <a:latin typeface="Noto Sans CJK SC" pitchFamily="34" charset="0"/>
-                <a:ea typeface="Noto Sans CJK SC" pitchFamily="34" charset="-122"/>
-                <a:cs typeface="Noto Sans CJK SC" pitchFamily="34" charset="-120"/>
-              </a:rPr>
-              <a:t>目标域</a:t>
-            </a:r>
-            <a:endParaRPr lang="en-US" sz="880" dirty="0"/>
+                <a:latin typeface="Noto Sans CJK JP" pitchFamily="34" charset="0"/>
+                <a:ea typeface="Noto Sans CJK JP" pitchFamily="34" charset="-122"/>
+                <a:cs typeface="Noto Sans CJK JP" pitchFamily="34" charset="-120"/>
+              </a:rPr>
+              <a:t>总图像</a:t>
+            </a:r>
+            <a:endParaRPr lang="en-US" sz="850" dirty="0"/>
           </a:p>
         </p:txBody>
       </p:sp>
@@ -2464,8 +2553,8 @@
         </p:nvSpPr>
         <p:spPr>
           <a:xfrm>
-            <a:off x="4114800" y="4197096"/>
-            <a:ext cx="2834640" cy="384048"/>
+            <a:off x="3657600" y="4187952"/>
+            <a:ext cx="1828800" cy="420624"/>
           </a:xfrm>
           <a:prstGeom prst="rect">
             <a:avLst/>
@@ -2485,13 +2574,13 @@
             <a:r>
               <a:rPr lang="en-US" sz="1900" b="1" dirty="0">
                 <a:solidFill>
-                  <a:srgbClr val="B86B00"/>
-                </a:solidFill>
-                <a:latin typeface="Noto Sans CJK SC" pitchFamily="34" charset="0"/>
-                <a:ea typeface="Noto Sans CJK SC" pitchFamily="34" charset="-122"/>
-                <a:cs typeface="Noto Sans CJK SC" pitchFamily="34" charset="-120"/>
-              </a:rPr>
-              <a:t>CASIA / MSU / Replay</a:t>
+                  <a:srgbClr val="1F4E79"/>
+                </a:solidFill>
+                <a:latin typeface="Noto Sans CJK JP" pitchFamily="34" charset="0"/>
+                <a:ea typeface="Noto Sans CJK JP" pitchFamily="34" charset="-122"/>
+                <a:cs typeface="Noto Sans CJK JP" pitchFamily="34" charset="-120"/>
+              </a:rPr>
+              <a:t>104,533</a:t>
             </a:r>
             <a:endParaRPr lang="en-US" sz="1900" dirty="0"/>
           </a:p>
@@ -2505,8 +2594,8 @@
         </p:nvSpPr>
         <p:spPr>
           <a:xfrm>
-            <a:off x="7223760" y="3977640"/>
-            <a:ext cx="1554480" cy="201168"/>
+            <a:off x="5760720" y="3977640"/>
+            <a:ext cx="1920240" cy="201168"/>
           </a:xfrm>
           <a:prstGeom prst="rect">
             <a:avLst/>
@@ -2524,17 +2613,17 @@
               <a:buNone/>
             </a:pPr>
             <a:r>
-              <a:rPr lang="en-US" sz="880" dirty="0">
+              <a:rPr lang="en-US" sz="850" dirty="0">
                 <a:solidFill>
                   <a:srgbClr val="4B5563"/>
                 </a:solidFill>
-                <a:latin typeface="Noto Sans CJK SC" pitchFamily="34" charset="0"/>
-                <a:ea typeface="Noto Sans CJK SC" pitchFamily="34" charset="-122"/>
-                <a:cs typeface="Noto Sans CJK SC" pitchFamily="34" charset="-120"/>
-              </a:rPr>
-              <a:t>方法数</a:t>
-            </a:r>
-            <a:endParaRPr lang="en-US" sz="880" dirty="0"/>
+                <a:latin typeface="Noto Sans CJK JP" pitchFamily="34" charset="0"/>
+                <a:ea typeface="Noto Sans CJK JP" pitchFamily="34" charset="-122"/>
+                <a:cs typeface="Noto Sans CJK JP" pitchFamily="34" charset="-120"/>
+              </a:rPr>
+              <a:t>源域</a:t>
+            </a:r>
+            <a:endParaRPr lang="en-US" sz="850" dirty="0"/>
           </a:p>
         </p:txBody>
       </p:sp>
@@ -2546,8 +2635,8 @@
         </p:nvSpPr>
         <p:spPr>
           <a:xfrm>
-            <a:off x="7223760" y="4197096"/>
-            <a:ext cx="1554480" cy="384048"/>
+            <a:off x="5760720" y="4187952"/>
+            <a:ext cx="1920240" cy="420624"/>
           </a:xfrm>
           <a:prstGeom prst="rect">
             <a:avLst/>
@@ -2567,13 +2656,13 @@
             <a:r>
               <a:rPr lang="en-US" sz="1900" b="1" dirty="0">
                 <a:solidFill>
-                  <a:srgbClr val="1F4E79"/>
-                </a:solidFill>
-                <a:latin typeface="Noto Sans CJK SC" pitchFamily="34" charset="0"/>
-                <a:ea typeface="Noto Sans CJK SC" pitchFamily="34" charset="-122"/>
-                <a:cs typeface="Noto Sans CJK SC" pitchFamily="34" charset="-120"/>
-              </a:rPr>
-              <a:t>5 组</a:t>
+                  <a:srgbClr val="B86B00"/>
+                </a:solidFill>
+                <a:latin typeface="Noto Sans CJK JP" pitchFamily="34" charset="0"/>
+                <a:ea typeface="Noto Sans CJK JP" pitchFamily="34" charset="-122"/>
+                <a:cs typeface="Noto Sans CJK JP" pitchFamily="34" charset="-120"/>
+              </a:rPr>
+              <a:t>OULU-NPU</a:t>
             </a:r>
             <a:endParaRPr lang="en-US" sz="1900" dirty="0"/>
           </a:p>
@@ -2587,8 +2676,8 @@
         </p:nvSpPr>
         <p:spPr>
           <a:xfrm>
-            <a:off x="9052560" y="3977640"/>
-            <a:ext cx="2103120" cy="201168"/>
+            <a:off x="7955280" y="3977640"/>
+            <a:ext cx="3017520" cy="201168"/>
           </a:xfrm>
           <a:prstGeom prst="rect">
             <a:avLst/>
@@ -2606,17 +2695,17 @@
               <a:buNone/>
             </a:pPr>
             <a:r>
-              <a:rPr lang="en-US" sz="880" dirty="0">
+              <a:rPr lang="en-US" sz="850" dirty="0">
                 <a:solidFill>
                   <a:srgbClr val="4B5563"/>
                 </a:solidFill>
-                <a:latin typeface="Noto Sans CJK SC" pitchFamily="34" charset="0"/>
-                <a:ea typeface="Noto Sans CJK SC" pitchFamily="34" charset="-122"/>
-                <a:cs typeface="Noto Sans CJK SC" pitchFamily="34" charset="-120"/>
-              </a:rPr>
-              <a:t>核心指标</a:t>
-            </a:r>
-            <a:endParaRPr lang="en-US" sz="880" dirty="0"/>
+                <a:latin typeface="Noto Sans CJK JP" pitchFamily="34" charset="0"/>
+                <a:ea typeface="Noto Sans CJK JP" pitchFamily="34" charset="-122"/>
+                <a:cs typeface="Noto Sans CJK JP" pitchFamily="34" charset="-120"/>
+              </a:rPr>
+              <a:t>目标域</a:t>
+            </a:r>
+            <a:endParaRPr lang="en-US" sz="850" dirty="0"/>
           </a:p>
         </p:txBody>
       </p:sp>
@@ -2628,8 +2717,8 @@
         </p:nvSpPr>
         <p:spPr>
           <a:xfrm>
-            <a:off x="9052560" y="4197096"/>
-            <a:ext cx="2103120" cy="384048"/>
+            <a:off x="7955280" y="4187952"/>
+            <a:ext cx="3017520" cy="420624"/>
           </a:xfrm>
           <a:prstGeom prst="rect">
             <a:avLst/>
@@ -2651,11 +2740,11 @@
                 <a:solidFill>
                   <a:srgbClr val="078080"/>
                 </a:solidFill>
-                <a:latin typeface="Noto Sans CJK SC" pitchFamily="34" charset="0"/>
-                <a:ea typeface="Noto Sans CJK SC" pitchFamily="34" charset="-122"/>
-                <a:cs typeface="Noto Sans CJK SC" pitchFamily="34" charset="-120"/>
-              </a:rPr>
-              <a:t>AUC / EER</a:t>
+                <a:latin typeface="Noto Sans CJK JP" pitchFamily="34" charset="0"/>
+                <a:ea typeface="Noto Sans CJK JP" pitchFamily="34" charset="-122"/>
+                <a:cs typeface="Noto Sans CJK JP" pitchFamily="34" charset="-120"/>
+              </a:rPr>
+              <a:t>CASIA / MSU / Replay</a:t>
             </a:r>
             <a:endParaRPr lang="en-US" sz="1900" dirty="0"/>
           </a:p>
@@ -2670,7 +2759,7 @@
         <p:spPr>
           <a:xfrm>
             <a:off x="10424160" y="6565392"/>
-            <a:ext cx="1280160" cy="137160"/>
+            <a:ext cx="1325880" cy="155448"/>
           </a:xfrm>
           <a:prstGeom prst="rect">
             <a:avLst/>
@@ -2692,11 +2781,11 @@
                 <a:solidFill>
                   <a:srgbClr val="4B5563"/>
                 </a:solidFill>
-                <a:latin typeface="Noto Sans CJK SC" pitchFamily="34" charset="0"/>
-                <a:ea typeface="Noto Sans CJK SC" pitchFamily="34" charset="-122"/>
-                <a:cs typeface="Noto Sans CJK SC" pitchFamily="34" charset="-120"/>
-              </a:rPr>
-              <a:t>FAS 实验答辩  ·  1</a:t>
+                <a:latin typeface="Noto Sans CJK JP" pitchFamily="34" charset="0"/>
+                <a:ea typeface="Noto Sans CJK JP" pitchFamily="34" charset="-122"/>
+                <a:cs typeface="Noto Sans CJK JP" pitchFamily="34" charset="-120"/>
+              </a:rPr>
+              <a:t>FAS 最终答辩 · 1</a:t>
             </a:r>
             <a:endParaRPr lang="en-US" sz="750" dirty="0"/>
           </a:p>
@@ -2742,8 +2831,8 @@
         </p:nvSpPr>
         <p:spPr>
           <a:xfrm>
-            <a:off x="502920" y="310896"/>
-            <a:ext cx="11064240" cy="384048"/>
+            <a:off x="502920" y="274320"/>
+            <a:ext cx="11155680" cy="438912"/>
           </a:xfrm>
           <a:prstGeom prst="rect">
             <a:avLst/>
@@ -2752,24 +2841,26 @@
           <a:ln/>
         </p:spPr>
         <p:txBody>
-          <a:bodyPr wrap="square" lIns="0" tIns="0" rIns="0" bIns="0" rtlCol="0" anchor="ctr"/>
-          <a:lstStyle/>
-          <a:p>
-            <a:pPr indent="0" marL="0">
-              <a:buNone/>
-            </a:pPr>
-            <a:r>
-              <a:rPr lang="en-US" sz="2300" b="1" dirty="0">
+          <a:bodyPr wrap="square" lIns="0" tIns="0" rIns="0" bIns="0" rtlCol="0" anchor="ctr">
+            <a:normAutofit/>
+          </a:bodyPr>
+          <a:lstStyle/>
+          <a:p>
+            <a:pPr indent="0" marL="0">
+              <a:buNone/>
+            </a:pPr>
+            <a:r>
+              <a:rPr lang="en-US" sz="2400" b="1" dirty="0">
                 <a:solidFill>
                   <a:srgbClr val="1F4E79"/>
                 </a:solidFill>
-                <a:latin typeface="Noto Sans CJK SC" pitchFamily="34" charset="0"/>
-                <a:ea typeface="Noto Sans CJK SC" pitchFamily="34" charset="-122"/>
-                <a:cs typeface="Noto Sans CJK SC" pitchFamily="34" charset="-120"/>
+                <a:latin typeface="Noto Sans CJK JP" pitchFamily="34" charset="0"/>
+                <a:ea typeface="Noto Sans CJK JP" pitchFamily="34" charset="-122"/>
+                <a:cs typeface="Noto Sans CJK JP" pitchFamily="34" charset="-120"/>
               </a:rPr>
               <a:t>MixStyle：特征统计层面的域泛化</a:t>
             </a:r>
-            <a:endParaRPr lang="en-US" sz="2300" dirty="0"/>
+            <a:endParaRPr lang="en-US" sz="2400" dirty="0"/>
           </a:p>
         </p:txBody>
       </p:sp>
@@ -2791,24 +2882,26 @@
           <a:ln/>
         </p:spPr>
         <p:txBody>
-          <a:bodyPr wrap="square" lIns="0" tIns="0" rIns="0" bIns="0" rtlCol="0" anchor="ctr"/>
-          <a:lstStyle/>
-          <a:p>
-            <a:pPr indent="0" marL="0">
-              <a:buNone/>
-            </a:pPr>
-            <a:r>
-              <a:rPr lang="en-US" sz="950" dirty="0">
+          <a:bodyPr wrap="square" lIns="0" tIns="0" rIns="0" bIns="0" rtlCol="0" anchor="ctr">
+            <a:normAutofit/>
+          </a:bodyPr>
+          <a:lstStyle/>
+          <a:p>
+            <a:pPr indent="0" marL="0">
+              <a:buNone/>
+            </a:pPr>
+            <a:r>
+              <a:rPr lang="en-US" sz="1000" dirty="0">
                 <a:solidFill>
                   <a:srgbClr val="4B5563"/>
                 </a:solidFill>
-                <a:latin typeface="Noto Sans CJK SC" pitchFamily="34" charset="0"/>
-                <a:ea typeface="Noto Sans CJK SC" pitchFamily="34" charset="-122"/>
-                <a:cs typeface="Noto Sans CJK SC" pitchFamily="34" charset="-120"/>
-              </a:rPr>
-              <a:t>在 ResNet18 浅层特征中混合均值和标准差</a:t>
-            </a:r>
-            <a:endParaRPr lang="en-US" sz="950" dirty="0"/>
+                <a:latin typeface="Noto Sans CJK JP" pitchFamily="34" charset="0"/>
+                <a:ea typeface="Noto Sans CJK JP" pitchFamily="34" charset="-122"/>
+                <a:cs typeface="Noto Sans CJK JP" pitchFamily="34" charset="-120"/>
+              </a:rPr>
+              <a:t>在 ResNet18 浅层混合均值与标准差</a:t>
+            </a:r>
+            <a:endParaRPr lang="en-US" sz="1000" dirty="0"/>
           </a:p>
         </p:txBody>
       </p:sp>
@@ -2821,7 +2914,7 @@
         <p:spPr>
           <a:xfrm>
             <a:off x="777240" y="1143000"/>
-            <a:ext cx="5166360" cy="2971800"/>
+            <a:ext cx="5349240" cy="3017520"/>
           </a:xfrm>
           <a:prstGeom prst="rect">
             <a:avLst/>
@@ -2836,7 +2929,7 @@
           </a:ln>
         </p:spPr>
         <p:txBody>
-          <a:bodyPr wrap="square" lIns="1270" tIns="1270" rIns="1270" bIns="1270" rtlCol="0" anchor="ctr">
+          <a:bodyPr wrap="square" lIns="1397" tIns="1397" rIns="1397" bIns="1397" rtlCol="0" anchor="ctr">
             <a:normAutofit/>
           </a:bodyPr>
           <a:lstStyle/>
@@ -2849,9 +2942,9 @@
                 <a:solidFill>
                   <a:srgbClr val="111827"/>
                 </a:solidFill>
-                <a:latin typeface="Noto Sans Mono CJK SC" pitchFamily="34" charset="0"/>
-                <a:ea typeface="Noto Sans Mono CJK SC" pitchFamily="34" charset="-122"/>
-                <a:cs typeface="Noto Sans Mono CJK SC" pitchFamily="34" charset="-120"/>
+                <a:latin typeface="Noto Sans Mono CJK JP" pitchFamily="34" charset="0"/>
+                <a:ea typeface="Noto Sans Mono CJK JP" pitchFamily="34" charset="-122"/>
+                <a:cs typeface="Noto Sans Mono CJK JP" pitchFamily="34" charset="-120"/>
               </a:rPr>
               <a:t>接入结构</a:t>
             </a:r>
@@ -2866,9 +2959,9 @@
                 <a:solidFill>
                   <a:srgbClr val="111827"/>
                 </a:solidFill>
-                <a:latin typeface="Noto Sans Mono CJK SC" pitchFamily="34" charset="0"/>
-                <a:ea typeface="Noto Sans Mono CJK SC" pitchFamily="34" charset="-122"/>
-                <a:cs typeface="Noto Sans Mono CJK SC" pitchFamily="34" charset="-120"/>
+                <a:latin typeface="Noto Sans Mono CJK JP" pitchFamily="34" charset="0"/>
+                <a:ea typeface="Noto Sans Mono CJK JP" pitchFamily="34" charset="-122"/>
+                <a:cs typeface="Noto Sans Mono CJK JP" pitchFamily="34" charset="-120"/>
               </a:rPr>
               <a:t>conv1 → bn1 → relu → maxpool</a:t>
             </a:r>
@@ -2883,9 +2976,9 @@
                 <a:solidFill>
                   <a:srgbClr val="111827"/>
                 </a:solidFill>
-                <a:latin typeface="Noto Sans Mono CJK SC" pitchFamily="34" charset="0"/>
-                <a:ea typeface="Noto Sans Mono CJK SC" pitchFamily="34" charset="-122"/>
-                <a:cs typeface="Noto Sans Mono CJK SC" pitchFamily="34" charset="-120"/>
+                <a:latin typeface="Noto Sans Mono CJK JP" pitchFamily="34" charset="0"/>
+                <a:ea typeface="Noto Sans Mono CJK JP" pitchFamily="34" charset="-122"/>
+                <a:cs typeface="Noto Sans Mono CJK JP" pitchFamily="34" charset="-120"/>
               </a:rPr>
               <a:t>layer1 → MixStyle</a:t>
             </a:r>
@@ -2900,9 +2993,9 @@
                 <a:solidFill>
                   <a:srgbClr val="111827"/>
                 </a:solidFill>
-                <a:latin typeface="Noto Sans Mono CJK SC" pitchFamily="34" charset="0"/>
-                <a:ea typeface="Noto Sans Mono CJK SC" pitchFamily="34" charset="-122"/>
-                <a:cs typeface="Noto Sans Mono CJK SC" pitchFamily="34" charset="-120"/>
+                <a:latin typeface="Noto Sans Mono CJK JP" pitchFamily="34" charset="0"/>
+                <a:ea typeface="Noto Sans Mono CJK JP" pitchFamily="34" charset="-122"/>
+                <a:cs typeface="Noto Sans Mono CJK JP" pitchFamily="34" charset="-120"/>
               </a:rPr>
               <a:t>layer2 → MixStyle</a:t>
             </a:r>
@@ -2917,9 +3010,9 @@
                 <a:solidFill>
                   <a:srgbClr val="111827"/>
                 </a:solidFill>
-                <a:latin typeface="Noto Sans Mono CJK SC" pitchFamily="34" charset="0"/>
-                <a:ea typeface="Noto Sans Mono CJK SC" pitchFamily="34" charset="-122"/>
-                <a:cs typeface="Noto Sans Mono CJK SC" pitchFamily="34" charset="-120"/>
+                <a:latin typeface="Noto Sans Mono CJK JP" pitchFamily="34" charset="0"/>
+                <a:ea typeface="Noto Sans Mono CJK JP" pitchFamily="34" charset="-122"/>
+                <a:cs typeface="Noto Sans Mono CJK JP" pitchFamily="34" charset="-120"/>
               </a:rPr>
               <a:t>layer3 → layer4 → avgpool → fc</a:t>
             </a:r>
@@ -2940,9 +3033,9 @@
                 <a:solidFill>
                   <a:srgbClr val="111827"/>
                 </a:solidFill>
-                <a:latin typeface="Noto Sans Mono CJK SC" pitchFamily="34" charset="0"/>
-                <a:ea typeface="Noto Sans Mono CJK SC" pitchFamily="34" charset="-122"/>
-                <a:cs typeface="Noto Sans Mono CJK SC" pitchFamily="34" charset="-120"/>
+                <a:latin typeface="Noto Sans Mono CJK JP" pitchFamily="34" charset="0"/>
+                <a:ea typeface="Noto Sans Mono CJK JP" pitchFamily="34" charset="-122"/>
+                <a:cs typeface="Noto Sans Mono CJK JP" pitchFamily="34" charset="-120"/>
               </a:rPr>
               <a:t>参数</a:t>
             </a:r>
@@ -2957,14 +3050,31 @@
                 <a:solidFill>
                   <a:srgbClr val="111827"/>
                 </a:solidFill>
-                <a:latin typeface="Noto Sans Mono CJK SC" pitchFamily="34" charset="0"/>
-                <a:ea typeface="Noto Sans Mono CJK SC" pitchFamily="34" charset="-122"/>
-                <a:cs typeface="Noto Sans Mono CJK SC" pitchFamily="34" charset="-120"/>
-              </a:rPr>
-              <a:t>p=0.5, alpha=0.1, lambda ~ Beta(0.1,0.1)</a:t>
+                <a:latin typeface="Noto Sans Mono CJK JP" pitchFamily="34" charset="0"/>
+                <a:ea typeface="Noto Sans Mono CJK JP" pitchFamily="34" charset="-122"/>
+                <a:cs typeface="Noto Sans Mono CJK JP" pitchFamily="34" charset="-120"/>
+              </a:rPr>
+              <a:t>p=0.5, alpha=0.1</a:t>
             </a:r>
             <a:endParaRPr lang="en-US" sz="1200" dirty="0"/>
           </a:p>
+          <a:p>
+            <a:pPr indent="0" marL="0">
+              <a:buNone/>
+            </a:pPr>
+            <a:r>
+              <a:rPr lang="en-US" sz="1200" dirty="0">
+                <a:solidFill>
+                  <a:srgbClr val="111827"/>
+                </a:solidFill>
+                <a:latin typeface="Noto Sans Mono CJK JP" pitchFamily="34" charset="0"/>
+                <a:ea typeface="Noto Sans Mono CJK JP" pitchFamily="34" charset="-122"/>
+                <a:cs typeface="Noto Sans Mono CJK JP" pitchFamily="34" charset="-120"/>
+              </a:rPr>
+              <a:t>lambda ~ Beta(0.1,0.1)</a:t>
+            </a:r>
+            <a:endParaRPr lang="en-US" sz="1200" dirty="0"/>
+          </a:p>
         </p:txBody>
       </p:sp>
       <p:sp>
@@ -2975,8 +3085,8 @@
         </p:nvSpPr>
         <p:spPr>
           <a:xfrm>
-            <a:off x="6400800" y="1417320"/>
-            <a:ext cx="5120640" cy="2743200"/>
+            <a:off x="6629400" y="1417320"/>
+            <a:ext cx="4892040" cy="2743200"/>
           </a:xfrm>
           <a:prstGeom prst="rect">
             <a:avLst/>
@@ -2995,11 +3105,11 @@
                 <a:solidFill>
                   <a:srgbClr val="111827"/>
                 </a:solidFill>
-                <a:latin typeface="Noto Sans CJK SC" pitchFamily="34" charset="0"/>
-                <a:ea typeface="Noto Sans CJK SC" pitchFamily="34" charset="-122"/>
-                <a:cs typeface="Noto Sans CJK SC" pitchFamily="34" charset="-120"/>
-              </a:rPr>
-              <a:t>训练阶段生效，验证和测试阶段关闭。
+                <a:latin typeface="Noto Sans CJK JP" pitchFamily="34" charset="0"/>
+                <a:ea typeface="Noto Sans CJK JP" pitchFamily="34" charset="-122"/>
+                <a:cs typeface="Noto Sans CJK JP" pitchFamily="34" charset="-120"/>
+              </a:rPr>
+              <a:t>训练阶段启用，验证和测试阶段关闭。
 </a:t>
             </a:r>
             <a:endParaRPr lang="en-US" sz="1400" dirty="0"/>
@@ -3010,9 +3120,9 @@
                 <a:solidFill>
                   <a:srgbClr val="111827"/>
                 </a:solidFill>
-                <a:latin typeface="Noto Sans CJK SC" pitchFamily="34" charset="0"/>
-                <a:ea typeface="Noto Sans CJK SC" pitchFamily="34" charset="-122"/>
-                <a:cs typeface="Noto Sans CJK SC" pitchFamily="34" charset="-120"/>
+                <a:latin typeface="Noto Sans CJK JP" pitchFamily="34" charset="0"/>
+                <a:ea typeface="Noto Sans CJK JP" pitchFamily="34" charset="-122"/>
+                <a:cs typeface="Noto Sans CJK JP" pitchFamily="34" charset="-120"/>
               </a:rPr>
               <a:t>CASIA 与 Replay-Attack 完整改善。
 </a:t>
@@ -3025,9 +3135,9 @@
                 <a:solidFill>
                   <a:srgbClr val="111827"/>
                 </a:solidFill>
-                <a:latin typeface="Noto Sans CJK SC" pitchFamily="34" charset="0"/>
-                <a:ea typeface="Noto Sans CJK SC" pitchFamily="34" charset="-122"/>
-                <a:cs typeface="Noto Sans CJK SC" pitchFamily="34" charset="-120"/>
+                <a:latin typeface="Noto Sans CJK JP" pitchFamily="34" charset="0"/>
+                <a:ea typeface="Noto Sans CJK JP" pitchFamily="34" charset="-122"/>
+                <a:cs typeface="Noto Sans CJK JP" pitchFamily="34" charset="-120"/>
               </a:rPr>
               <a:t>MSU-MFSD 上 AUC 下降、EER 上升。
 </a:t>
@@ -3040,9 +3150,9 @@
                 <a:solidFill>
                   <a:srgbClr val="111827"/>
                 </a:solidFill>
-                <a:latin typeface="Noto Sans CJK SC" pitchFamily="34" charset="0"/>
-                <a:ea typeface="Noto Sans CJK SC" pitchFamily="34" charset="-122"/>
-                <a:cs typeface="Noto Sans CJK SC" pitchFamily="34" charset="-120"/>
+                <a:latin typeface="Noto Sans CJK JP" pitchFamily="34" charset="0"/>
+                <a:ea typeface="Noto Sans CJK JP" pitchFamily="34" charset="-122"/>
+                <a:cs typeface="Noto Sans CJK JP" pitchFamily="34" charset="-120"/>
               </a:rPr>
               <a:t>说明浅层统计混合能缓解部分风格偏移，但稳定性仍不足。</a:t>
             </a:r>
@@ -3059,7 +3169,7 @@
         <p:spPr>
           <a:xfrm>
             <a:off x="10424160" y="6565392"/>
-            <a:ext cx="1280160" cy="137160"/>
+            <a:ext cx="1325880" cy="155448"/>
           </a:xfrm>
           <a:prstGeom prst="rect">
             <a:avLst/>
@@ -3081,11 +3191,11 @@
                 <a:solidFill>
                   <a:srgbClr val="4B5563"/>
                 </a:solidFill>
-                <a:latin typeface="Noto Sans CJK SC" pitchFamily="34" charset="0"/>
-                <a:ea typeface="Noto Sans CJK SC" pitchFamily="34" charset="-122"/>
-                <a:cs typeface="Noto Sans CJK SC" pitchFamily="34" charset="-120"/>
-              </a:rPr>
-              <a:t>FAS 实验答辩  ·  10</a:t>
+                <a:latin typeface="Noto Sans CJK JP" pitchFamily="34" charset="0"/>
+                <a:ea typeface="Noto Sans CJK JP" pitchFamily="34" charset="-122"/>
+                <a:cs typeface="Noto Sans CJK JP" pitchFamily="34" charset="-120"/>
+              </a:rPr>
+              <a:t>FAS 最终答辩 · 10</a:t>
             </a:r>
             <a:endParaRPr lang="en-US" sz="750" dirty="0"/>
           </a:p>
@@ -3131,8 +3241,8 @@
         </p:nvSpPr>
         <p:spPr>
           <a:xfrm>
-            <a:off x="502920" y="310896"/>
-            <a:ext cx="11064240" cy="384048"/>
+            <a:off x="502920" y="274320"/>
+            <a:ext cx="11155680" cy="438912"/>
           </a:xfrm>
           <a:prstGeom prst="rect">
             <a:avLst/>
@@ -3141,24 +3251,26 @@
           <a:ln/>
         </p:spPr>
         <p:txBody>
-          <a:bodyPr wrap="square" lIns="0" tIns="0" rIns="0" bIns="0" rtlCol="0" anchor="ctr"/>
-          <a:lstStyle/>
-          <a:p>
-            <a:pPr indent="0" marL="0">
-              <a:buNone/>
-            </a:pPr>
-            <a:r>
-              <a:rPr lang="en-US" sz="2300" b="1" dirty="0">
+          <a:bodyPr wrap="square" lIns="0" tIns="0" rIns="0" bIns="0" rtlCol="0" anchor="ctr">
+            <a:normAutofit/>
+          </a:bodyPr>
+          <a:lstStyle/>
+          <a:p>
+            <a:pPr indent="0" marL="0">
+              <a:buNone/>
+            </a:pPr>
+            <a:r>
+              <a:rPr lang="en-US" sz="2400" b="1" dirty="0">
                 <a:solidFill>
                   <a:srgbClr val="1F4E79"/>
                 </a:solidFill>
-                <a:latin typeface="Noto Sans CJK SC" pitchFamily="34" charset="0"/>
-                <a:ea typeface="Noto Sans CJK SC" pitchFamily="34" charset="-122"/>
-                <a:cs typeface="Noto Sans CJK SC" pitchFamily="34" charset="-120"/>
+                <a:latin typeface="Noto Sans CJK JP" pitchFamily="34" charset="0"/>
+                <a:ea typeface="Noto Sans CJK JP" pitchFamily="34" charset="-122"/>
+                <a:cs typeface="Noto Sans CJK JP" pitchFamily="34" charset="-120"/>
               </a:rPr>
               <a:t>Fourier Amplitude Augmentation</a:t>
             </a:r>
-            <a:endParaRPr lang="en-US" sz="2300" dirty="0"/>
+            <a:endParaRPr lang="en-US" sz="2400" dirty="0"/>
           </a:p>
         </p:txBody>
       </p:sp>
@@ -3180,24 +3292,26 @@
           <a:ln/>
         </p:spPr>
         <p:txBody>
-          <a:bodyPr wrap="square" lIns="0" tIns="0" rIns="0" bIns="0" rtlCol="0" anchor="ctr"/>
-          <a:lstStyle/>
-          <a:p>
-            <a:pPr indent="0" marL="0">
-              <a:buNone/>
-            </a:pPr>
-            <a:r>
-              <a:rPr lang="en-US" sz="950" dirty="0">
+          <a:bodyPr wrap="square" lIns="0" tIns="0" rIns="0" bIns="0" rtlCol="0" anchor="ctr">
+            <a:normAutofit/>
+          </a:bodyPr>
+          <a:lstStyle/>
+          <a:p>
+            <a:pPr indent="0" marL="0">
+              <a:buNone/>
+            </a:pPr>
+            <a:r>
+              <a:rPr lang="en-US" sz="1000" dirty="0">
                 <a:solidFill>
                   <a:srgbClr val="4B5563"/>
                 </a:solidFill>
-                <a:latin typeface="Noto Sans CJK SC" pitchFamily="34" charset="0"/>
-                <a:ea typeface="Noto Sans CJK SC" pitchFamily="34" charset="-122"/>
-                <a:cs typeface="Noto Sans CJK SC" pitchFamily="34" charset="-120"/>
+                <a:latin typeface="Noto Sans CJK JP" pitchFamily="34" charset="0"/>
+                <a:ea typeface="Noto Sans CJK JP" pitchFamily="34" charset="-122"/>
+                <a:cs typeface="Noto Sans CJK JP" pitchFamily="34" charset="-120"/>
               </a:rPr>
               <a:t>同类别低频幅度谱混合，保留源样本相位</a:t>
             </a:r>
-            <a:endParaRPr lang="en-US" sz="950" dirty="0"/>
+            <a:endParaRPr lang="en-US" sz="1000" dirty="0"/>
           </a:p>
         </p:txBody>
       </p:sp>
@@ -3210,7 +3324,7 @@
         <p:spPr>
           <a:xfrm>
             <a:off x="731520" y="1097280"/>
-            <a:ext cx="5852160" cy="2926080"/>
+            <a:ext cx="5943600" cy="2971800"/>
           </a:xfrm>
           <a:prstGeom prst="rect">
             <a:avLst/>
@@ -3225,7 +3339,7 @@
           </a:ln>
         </p:spPr>
         <p:txBody>
-          <a:bodyPr wrap="square" lIns="1270" tIns="1270" rIns="1270" bIns="1270" rtlCol="0" anchor="ctr">
+          <a:bodyPr wrap="square" lIns="1397" tIns="1397" rIns="1397" bIns="1397" rtlCol="0" anchor="ctr">
             <a:normAutofit/>
           </a:bodyPr>
           <a:lstStyle/>
@@ -3238,9 +3352,9 @@
                 <a:solidFill>
                   <a:srgbClr val="111827"/>
                 </a:solidFill>
-                <a:latin typeface="Noto Sans Mono CJK SC" pitchFamily="34" charset="0"/>
-                <a:ea typeface="Noto Sans Mono CJK SC" pitchFamily="34" charset="-122"/>
-                <a:cs typeface="Noto Sans Mono CJK SC" pitchFamily="34" charset="-120"/>
+                <a:latin typeface="Noto Sans Mono CJK JP" pitchFamily="34" charset="0"/>
+                <a:ea typeface="Noto Sans Mono CJK JP" pitchFamily="34" charset="-122"/>
+                <a:cs typeface="Noto Sans Mono CJK JP" pitchFamily="34" charset="-120"/>
               </a:rPr>
               <a:t>算法流程</a:t>
             </a:r>
@@ -3255,9 +3369,9 @@
                 <a:solidFill>
                   <a:srgbClr val="111827"/>
                 </a:solidFill>
-                <a:latin typeface="Noto Sans Mono CJK SC" pitchFamily="34" charset="0"/>
-                <a:ea typeface="Noto Sans Mono CJK SC" pitchFamily="34" charset="-122"/>
-                <a:cs typeface="Noto Sans Mono CJK SC" pitchFamily="34" charset="-120"/>
+                <a:latin typeface="Noto Sans Mono CJK JP" pitchFamily="34" charset="0"/>
+                <a:ea typeface="Noto Sans Mono CJK JP" pitchFamily="34" charset="-122"/>
+                <a:cs typeface="Noto Sans Mono CJK JP" pitchFamily="34" charset="-120"/>
               </a:rPr>
               <a:t>1. 反 ImageNet Normalize 到 [0,1]</a:t>
             </a:r>
@@ -3272,9 +3386,9 @@
                 <a:solidFill>
                   <a:srgbClr val="111827"/>
                 </a:solidFill>
-                <a:latin typeface="Noto Sans Mono CJK SC" pitchFamily="34" charset="0"/>
-                <a:ea typeface="Noto Sans Mono CJK SC" pitchFamily="34" charset="-122"/>
-                <a:cs typeface="Noto Sans Mono CJK SC" pitchFamily="34" charset="-120"/>
+                <a:latin typeface="Noto Sans Mono CJK JP" pitchFamily="34" charset="0"/>
+                <a:ea typeface="Noto Sans Mono CJK JP" pitchFamily="34" charset="-122"/>
+                <a:cs typeface="Noto Sans Mono CJK JP" pitchFamily="34" charset="-120"/>
               </a:rPr>
               <a:t>2. 2D FFT，分离 amplitude 与 phase</a:t>
             </a:r>
@@ -3289,11 +3403,11 @@
                 <a:solidFill>
                   <a:srgbClr val="111827"/>
                 </a:solidFill>
-                <a:latin typeface="Noto Sans Mono CJK SC" pitchFamily="34" charset="0"/>
-                <a:ea typeface="Noto Sans Mono CJK SC" pitchFamily="34" charset="-122"/>
-                <a:cs typeface="Noto Sans Mono CJK SC" pitchFamily="34" charset="-120"/>
-              </a:rPr>
-              <a:t>3. fftshift 后定位中心低频区域</a:t>
+                <a:latin typeface="Noto Sans Mono CJK JP" pitchFamily="34" charset="0"/>
+                <a:ea typeface="Noto Sans Mono CJK JP" pitchFamily="34" charset="-122"/>
+                <a:cs typeface="Noto Sans Mono CJK JP" pitchFamily="34" charset="-120"/>
+              </a:rPr>
+              <a:t>3. fftshift 定位中心低频区域</a:t>
             </a:r>
             <a:endParaRPr lang="en-US" sz="1100" dirty="0"/>
           </a:p>
@@ -3306,9 +3420,9 @@
                 <a:solidFill>
                   <a:srgbClr val="111827"/>
                 </a:solidFill>
-                <a:latin typeface="Noto Sans Mono CJK SC" pitchFamily="34" charset="0"/>
-                <a:ea typeface="Noto Sans Mono CJK SC" pitchFamily="34" charset="-122"/>
-                <a:cs typeface="Noto Sans Mono CJK SC" pitchFamily="34" charset="-120"/>
+                <a:latin typeface="Noto Sans Mono CJK JP" pitchFamily="34" charset="0"/>
+                <a:ea typeface="Noto Sans Mono CJK JP" pitchFamily="34" charset="-122"/>
+                <a:cs typeface="Noto Sans Mono CJK JP" pitchFamily="34" charset="-120"/>
               </a:rPr>
               <a:t>4. 仅同类别 donor：Live↔Live，Spoof↔Spoof</a:t>
             </a:r>
@@ -3323,9 +3437,9 @@
                 <a:solidFill>
                   <a:srgbClr val="111827"/>
                 </a:solidFill>
-                <a:latin typeface="Noto Sans Mono CJK SC" pitchFamily="34" charset="0"/>
-                <a:ea typeface="Noto Sans Mono CJK SC" pitchFamily="34" charset="-122"/>
-                <a:cs typeface="Noto Sans Mono CJK SC" pitchFamily="34" charset="-120"/>
+                <a:latin typeface="Noto Sans Mono CJK JP" pitchFamily="34" charset="0"/>
+                <a:ea typeface="Noto Sans Mono CJK JP" pitchFamily="34" charset="-122"/>
+                <a:cs typeface="Noto Sans Mono CJK JP" pitchFamily="34" charset="-120"/>
               </a:rPr>
               <a:t>5. 混合低频 amplitude，保留源样本 phase</a:t>
             </a:r>
@@ -3340,9 +3454,9 @@
                 <a:solidFill>
                   <a:srgbClr val="111827"/>
                 </a:solidFill>
-                <a:latin typeface="Noto Sans Mono CJK SC" pitchFamily="34" charset="0"/>
-                <a:ea typeface="Noto Sans Mono CJK SC" pitchFamily="34" charset="-122"/>
-                <a:cs typeface="Noto Sans Mono CJK SC" pitchFamily="34" charset="-120"/>
+                <a:latin typeface="Noto Sans Mono CJK JP" pitchFamily="34" charset="0"/>
+                <a:ea typeface="Noto Sans Mono CJK JP" pitchFamily="34" charset="-122"/>
+                <a:cs typeface="Noto Sans Mono CJK JP" pitchFamily="34" charset="-120"/>
               </a:rPr>
               <a:t>6. IFFT 后重新 Normalize，再输入 ResNet18</a:t>
             </a:r>
@@ -3358,8 +3472,8 @@
         </p:nvSpPr>
         <p:spPr>
           <a:xfrm>
-            <a:off x="6949440" y="1188720"/>
-            <a:ext cx="4297680" cy="1554480"/>
+            <a:off x="6995160" y="1188720"/>
+            <a:ext cx="4297680" cy="1600200"/>
           </a:xfrm>
           <a:prstGeom prst="rect">
             <a:avLst/>
@@ -3374,7 +3488,7 @@
           </a:ln>
         </p:spPr>
         <p:txBody>
-          <a:bodyPr wrap="square" lIns="1270" tIns="1270" rIns="1270" bIns="1270" rtlCol="0" anchor="ctr">
+          <a:bodyPr wrap="square" lIns="1397" tIns="1397" rIns="1397" bIns="1397" rtlCol="0" anchor="ctr">
             <a:normAutofit/>
           </a:bodyPr>
           <a:lstStyle/>
@@ -3387,9 +3501,9 @@
                 <a:solidFill>
                   <a:srgbClr val="111827"/>
                 </a:solidFill>
-                <a:latin typeface="Noto Sans Mono CJK SC" pitchFamily="34" charset="0"/>
-                <a:ea typeface="Noto Sans Mono CJK SC" pitchFamily="34" charset="-122"/>
-                <a:cs typeface="Noto Sans Mono CJK SC" pitchFamily="34" charset="-120"/>
+                <a:latin typeface="Noto Sans Mono CJK JP" pitchFamily="34" charset="0"/>
+                <a:ea typeface="Noto Sans Mono CJK JP" pitchFamily="34" charset="-122"/>
+                <a:cs typeface="Noto Sans Mono CJK JP" pitchFamily="34" charset="-120"/>
               </a:rPr>
               <a:t>参数</a:t>
             </a:r>
@@ -3404,9 +3518,9 @@
                 <a:solidFill>
                   <a:srgbClr val="111827"/>
                 </a:solidFill>
-                <a:latin typeface="Noto Sans Mono CJK SC" pitchFamily="34" charset="0"/>
-                <a:ea typeface="Noto Sans Mono CJK SC" pitchFamily="34" charset="-122"/>
-                <a:cs typeface="Noto Sans Mono CJK SC" pitchFamily="34" charset="-120"/>
+                <a:latin typeface="Noto Sans Mono CJK JP" pitchFamily="34" charset="0"/>
+                <a:ea typeface="Noto Sans Mono CJK JP" pitchFamily="34" charset="-122"/>
+                <a:cs typeface="Noto Sans Mono CJK JP" pitchFamily="34" charset="-120"/>
               </a:rPr>
               <a:t>fourier_p = 0.5</a:t>
             </a:r>
@@ -3421,9 +3535,9 @@
                 <a:solidFill>
                   <a:srgbClr val="111827"/>
                 </a:solidFill>
-                <a:latin typeface="Noto Sans Mono CJK SC" pitchFamily="34" charset="0"/>
-                <a:ea typeface="Noto Sans Mono CJK SC" pitchFamily="34" charset="-122"/>
-                <a:cs typeface="Noto Sans Mono CJK SC" pitchFamily="34" charset="-120"/>
+                <a:latin typeface="Noto Sans Mono CJK JP" pitchFamily="34" charset="0"/>
+                <a:ea typeface="Noto Sans Mono CJK JP" pitchFamily="34" charset="-122"/>
+                <a:cs typeface="Noto Sans Mono CJK JP" pitchFamily="34" charset="-120"/>
               </a:rPr>
               <a:t>fourier_max_lambda = 0.35</a:t>
             </a:r>
@@ -3438,9 +3552,9 @@
                 <a:solidFill>
                   <a:srgbClr val="111827"/>
                 </a:solidFill>
-                <a:latin typeface="Noto Sans Mono CJK SC" pitchFamily="34" charset="0"/>
-                <a:ea typeface="Noto Sans Mono CJK SC" pitchFamily="34" charset="-122"/>
-                <a:cs typeface="Noto Sans Mono CJK SC" pitchFamily="34" charset="-120"/>
+                <a:latin typeface="Noto Sans Mono CJK JP" pitchFamily="34" charset="0"/>
+                <a:ea typeface="Noto Sans Mono CJK JP" pitchFamily="34" charset="-122"/>
+                <a:cs typeface="Noto Sans Mono CJK JP" pitchFamily="34" charset="-120"/>
               </a:rPr>
               <a:t>fourier_low_freq_ratio = 0.10</a:t>
             </a:r>
@@ -3455,9 +3569,9 @@
                 <a:solidFill>
                   <a:srgbClr val="111827"/>
                 </a:solidFill>
-                <a:latin typeface="Noto Sans Mono CJK SC" pitchFamily="34" charset="0"/>
-                <a:ea typeface="Noto Sans Mono CJK SC" pitchFamily="34" charset="-122"/>
-                <a:cs typeface="Noto Sans Mono CJK SC" pitchFamily="34" charset="-120"/>
+                <a:latin typeface="Noto Sans Mono CJK JP" pitchFamily="34" charset="0"/>
+                <a:ea typeface="Noto Sans Mono CJK JP" pitchFamily="34" charset="-122"/>
+                <a:cs typeface="Noto Sans Mono CJK JP" pitchFamily="34" charset="-120"/>
               </a:rPr>
               <a:t>mixing = same-class only</a:t>
             </a:r>
@@ -3473,8 +3587,8 @@
         </p:nvSpPr>
         <p:spPr>
           <a:xfrm>
-            <a:off x="6949440" y="3383280"/>
-            <a:ext cx="4389120" cy="1234440"/>
+            <a:off x="6995160" y="3429000"/>
+            <a:ext cx="4389120" cy="1097280"/>
           </a:xfrm>
           <a:prstGeom prst="rect">
             <a:avLst/>
@@ -3492,17 +3606,17 @@
               <a:buNone/>
             </a:pPr>
             <a:r>
-              <a:rPr lang="en-US" sz="1350" dirty="0">
-                <a:solidFill>
-                  <a:srgbClr val="111827"/>
-                </a:solidFill>
-                <a:latin typeface="Noto Sans CJK SC" pitchFamily="34" charset="0"/>
-                <a:ea typeface="Noto Sans CJK SC" pitchFamily="34" charset="-122"/>
-                <a:cs typeface="Noto Sans CJK SC" pitchFamily="34" charset="-120"/>
-              </a:rPr>
-              <a:t>设计动机：低频幅度更关联亮度、颜色、设备成像风格；相位更多保留空间结构。该方法针对域相关外观统计进行扰动，同时尽量保留真假判别内容。</a:t>
-            </a:r>
-            <a:endParaRPr lang="en-US" sz="1350" dirty="0"/>
+              <a:rPr lang="en-US" sz="1320" dirty="0">
+                <a:solidFill>
+                  <a:srgbClr val="111827"/>
+                </a:solidFill>
+                <a:latin typeface="Noto Sans CJK JP" pitchFamily="34" charset="0"/>
+                <a:ea typeface="Noto Sans CJK JP" pitchFamily="34" charset="-122"/>
+                <a:cs typeface="Noto Sans CJK JP" pitchFamily="34" charset="-120"/>
+              </a:rPr>
+              <a:t>设计动机：低频幅度更关联亮度、颜色、设备成像风格；相位更多保留空间结构。该方法扰动域相关外观统计，同时尽量保留真假判别内容。</a:t>
+            </a:r>
+            <a:endParaRPr lang="en-US" sz="1320" dirty="0"/>
           </a:p>
         </p:txBody>
       </p:sp>
@@ -3515,7 +3629,7 @@
         <p:spPr>
           <a:xfrm>
             <a:off x="10424160" y="6565392"/>
-            <a:ext cx="1280160" cy="137160"/>
+            <a:ext cx="1325880" cy="155448"/>
           </a:xfrm>
           <a:prstGeom prst="rect">
             <a:avLst/>
@@ -3537,11 +3651,11 @@
                 <a:solidFill>
                   <a:srgbClr val="4B5563"/>
                 </a:solidFill>
-                <a:latin typeface="Noto Sans CJK SC" pitchFamily="34" charset="0"/>
-                <a:ea typeface="Noto Sans CJK SC" pitchFamily="34" charset="-122"/>
-                <a:cs typeface="Noto Sans CJK SC" pitchFamily="34" charset="-120"/>
-              </a:rPr>
-              <a:t>FAS 实验答辩  ·  11</a:t>
+                <a:latin typeface="Noto Sans CJK JP" pitchFamily="34" charset="0"/>
+                <a:ea typeface="Noto Sans CJK JP" pitchFamily="34" charset="-122"/>
+                <a:cs typeface="Noto Sans CJK JP" pitchFamily="34" charset="-120"/>
+              </a:rPr>
+              <a:t>FAS 最终答辩 · 11</a:t>
             </a:r>
             <a:endParaRPr lang="en-US" sz="750" dirty="0"/>
           </a:p>
@@ -3587,8 +3701,8 @@
         </p:nvSpPr>
         <p:spPr>
           <a:xfrm>
-            <a:off x="502920" y="310896"/>
-            <a:ext cx="11064240" cy="384048"/>
+            <a:off x="502920" y="274320"/>
+            <a:ext cx="11155680" cy="438912"/>
           </a:xfrm>
           <a:prstGeom prst="rect">
             <a:avLst/>
@@ -3597,24 +3711,26 @@
           <a:ln/>
         </p:spPr>
         <p:txBody>
-          <a:bodyPr wrap="square" lIns="0" tIns="0" rIns="0" bIns="0" rtlCol="0" anchor="ctr"/>
-          <a:lstStyle/>
-          <a:p>
-            <a:pPr indent="0" marL="0">
-              <a:buNone/>
-            </a:pPr>
-            <a:r>
-              <a:rPr lang="en-US" sz="2300" b="1" dirty="0">
+          <a:bodyPr wrap="square" lIns="0" tIns="0" rIns="0" bIns="0" rtlCol="0" anchor="ctr">
+            <a:normAutofit/>
+          </a:bodyPr>
+          <a:lstStyle/>
+          <a:p>
+            <a:pPr indent="0" marL="0">
+              <a:buNone/>
+            </a:pPr>
+            <a:r>
+              <a:rPr lang="en-US" sz="2400" b="1" dirty="0">
                 <a:solidFill>
                   <a:srgbClr val="1F4E79"/>
                 </a:solidFill>
-                <a:latin typeface="Noto Sans CJK SC" pitchFamily="34" charset="0"/>
-                <a:ea typeface="Noto Sans CJK SC" pitchFamily="34" charset="-122"/>
-                <a:cs typeface="Noto Sans CJK SC" pitchFamily="34" charset="-120"/>
-              </a:rPr>
-              <a:t>第四周：五方法跨域 AUC / EER 对比</a:t>
-            </a:r>
-            <a:endParaRPr lang="en-US" sz="2300" dirty="0"/>
+                <a:latin typeface="Noto Sans CJK JP" pitchFamily="34" charset="0"/>
+                <a:ea typeface="Noto Sans CJK JP" pitchFamily="34" charset="-122"/>
+                <a:cs typeface="Noto Sans CJK JP" pitchFamily="34" charset="-120"/>
+              </a:rPr>
+              <a:t>第三周结果：Fourier 首次实现三域完整改善</a:t>
+            </a:r>
+            <a:endParaRPr lang="en-US" sz="2400" dirty="0"/>
           </a:p>
         </p:txBody>
       </p:sp>
@@ -3636,30 +3752,32 @@
           <a:ln/>
         </p:spPr>
         <p:txBody>
-          <a:bodyPr wrap="square" lIns="0" tIns="0" rIns="0" bIns="0" rtlCol="0" anchor="ctr"/>
-          <a:lstStyle/>
-          <a:p>
-            <a:pPr indent="0" marL="0">
-              <a:buNone/>
-            </a:pPr>
-            <a:r>
-              <a:rPr lang="en-US" sz="950" dirty="0">
+          <a:bodyPr wrap="square" lIns="0" tIns="0" rIns="0" bIns="0" rtlCol="0" anchor="ctr">
+            <a:normAutofit/>
+          </a:bodyPr>
+          <a:lstStyle/>
+          <a:p>
+            <a:pPr indent="0" marL="0">
+              <a:buNone/>
+            </a:pPr>
+            <a:r>
+              <a:rPr lang="en-US" sz="1000" dirty="0">
                 <a:solidFill>
                   <a:srgbClr val="4B5563"/>
                 </a:solidFill>
-                <a:latin typeface="Noto Sans CJK SC" pitchFamily="34" charset="0"/>
-                <a:ea typeface="Noto Sans CJK SC" pitchFamily="34" charset="-122"/>
-                <a:cs typeface="Noto Sans CJK SC" pitchFamily="34" charset="-120"/>
-              </a:rPr>
-              <a:t>跨域评价更应关注排序能力和错误率</a:t>
-            </a:r>
-            <a:endParaRPr lang="en-US" sz="950" dirty="0"/>
+                <a:latin typeface="Noto Sans CJK JP" pitchFamily="34" charset="0"/>
+                <a:ea typeface="Noto Sans CJK JP" pitchFamily="34" charset="-122"/>
+                <a:cs typeface="Noto Sans CJK JP" pitchFamily="34" charset="-120"/>
+              </a:rPr>
+              <a:t>完整改善定义：Accuracy↑、AUC↑、EER↓</a:t>
+            </a:r>
+            <a:endParaRPr lang="en-US" sz="1000" dirty="0"/>
           </a:p>
         </p:txBody>
       </p:sp>
       <p:pic>
         <p:nvPicPr>
-          <p:cNvPr id="4" name="Image 0" descr="/mnt/data/fas_artifacts/charts/auc_comparison.png">    </p:cNvPr>
+          <p:cNvPr id="4" name="Image 0" descr="/mnt/data/fas_artifacts/charts/macro_summary.png">    </p:cNvPr>
           <p:cNvPicPr>
             <a:picLocks noChangeAspect="1"/>
           </p:cNvPicPr>
@@ -3673,48 +3791,173 @@
         </p:blipFill>
         <p:spPr>
           <a:xfrm>
-            <a:off x="502920" y="1143000"/>
-            <a:ext cx="5577840" cy="3063240"/>
+            <a:off x="594360" y="1097280"/>
+            <a:ext cx="5715000" cy="3154680"/>
           </a:xfrm>
           <a:prstGeom prst="rect">
             <a:avLst/>
           </a:prstGeom>
         </p:spPr>
       </p:pic>
-      <p:pic>
-        <p:nvPicPr>
-          <p:cNvPr id="5" name="Image 1" descr="/mnt/data/fas_artifacts/charts/eer_comparison.png">    </p:cNvPr>
-          <p:cNvPicPr>
-            <a:picLocks noChangeAspect="1"/>
-          </p:cNvPicPr>
-          <p:nvPr/>
-        </p:nvPicPr>
-        <p:blipFill>
-          <a:blip r:embed="rId2"/>
-          <a:stretch>
-            <a:fillRect/>
-          </a:stretch>
-        </p:blipFill>
-        <p:spPr>
-          <a:xfrm>
-            <a:off x="6355080" y="1143000"/>
-            <a:ext cx="5394960" cy="3063240"/>
-          </a:xfrm>
-          <a:prstGeom prst="rect">
-            <a:avLst/>
-          </a:prstGeom>
-        </p:spPr>
-      </p:pic>
-      <p:sp>
-        <p:nvSpPr>
-          <p:cNvPr id="6" name="Text 2"/>
-          <p:cNvSpPr/>
-          <p:nvPr/>
-        </p:nvSpPr>
-        <p:spPr>
-          <a:xfrm>
-            <a:off x="914400" y="4663440"/>
-            <a:ext cx="10332720" cy="594360"/>
+      <p:sp>
+        <p:nvSpPr>
+          <p:cNvPr id="5" name="Text 2"/>
+          <p:cNvSpPr/>
+          <p:nvPr/>
+        </p:nvSpPr>
+        <p:spPr>
+          <a:xfrm>
+            <a:off x="6537960" y="1234440"/>
+            <a:ext cx="4663440" cy="2331720"/>
+          </a:xfrm>
+          <a:prstGeom prst="rect">
+            <a:avLst/>
+          </a:prstGeom>
+          <a:solidFill>
+            <a:srgbClr val="FFFFFF"/>
+          </a:solidFill>
+          <a:ln w="6350">
+            <a:solidFill>
+              <a:srgbClr val="C9D6E3"/>
+            </a:solidFill>
+          </a:ln>
+        </p:spPr>
+        <p:txBody>
+          <a:bodyPr wrap="square" lIns="1397" tIns="1397" rIns="1397" bIns="1397" rtlCol="0" anchor="ctr">
+            <a:normAutofit/>
+          </a:bodyPr>
+          <a:lstStyle/>
+          <a:p>
+            <a:pPr indent="0" marL="0">
+              <a:buNone/>
+            </a:pPr>
+            <a:r>
+              <a:rPr lang="en-US" sz="970" dirty="0">
+                <a:solidFill>
+                  <a:srgbClr val="111827"/>
+                </a:solidFill>
+                <a:latin typeface="Noto Sans Mono CJK JP" pitchFamily="34" charset="0"/>
+                <a:ea typeface="Noto Sans Mono CJK JP" pitchFamily="34" charset="-122"/>
+                <a:cs typeface="Noto Sans Mono CJK JP" pitchFamily="34" charset="-120"/>
+              </a:rPr>
+              <a:t>三目标域宏平均</a:t>
+            </a:r>
+            <a:endParaRPr lang="en-US" sz="970" dirty="0"/>
+          </a:p>
+          <a:p>
+            <a:pPr indent="0" marL="0">
+              <a:buNone/>
+            </a:pPr>
+            <a:r>
+              <a:rPr lang="en-US" sz="970" dirty="0">
+                <a:solidFill>
+                  <a:srgbClr val="111827"/>
+                </a:solidFill>
+                <a:latin typeface="Noto Sans Mono CJK JP" pitchFamily="34" charset="0"/>
+                <a:ea typeface="Noto Sans Mono CJK JP" pitchFamily="34" charset="-122"/>
+                <a:cs typeface="Noto Sans Mono CJK JP" pitchFamily="34" charset="-120"/>
+              </a:rPr>
+              <a:t>方法        Avg Acc    Avg AUC    Avg EER   完整改善</a:t>
+            </a:r>
+            <a:endParaRPr lang="en-US" sz="970" dirty="0"/>
+          </a:p>
+          <a:p>
+            <a:pPr indent="0" marL="0">
+              <a:buNone/>
+            </a:pPr>
+            <a:r>
+              <a:rPr lang="en-US" sz="970" dirty="0">
+                <a:solidFill>
+                  <a:srgbClr val="111827"/>
+                </a:solidFill>
+                <a:latin typeface="Noto Sans Mono CJK JP" pitchFamily="34" charset="0"/>
+                <a:ea typeface="Noto Sans Mono CJK JP" pitchFamily="34" charset="-122"/>
+                <a:cs typeface="Noto Sans Mono CJK JP" pitchFamily="34" charset="-120"/>
+              </a:rPr>
+              <a:t>Baseline    45.7576%   42.2235%   55.3802%  -</a:t>
+            </a:r>
+            <a:endParaRPr lang="en-US" sz="970" dirty="0"/>
+          </a:p>
+          <a:p>
+            <a:pPr indent="0" marL="0">
+              <a:buNone/>
+            </a:pPr>
+            <a:r>
+              <a:rPr lang="en-US" sz="970" dirty="0">
+                <a:solidFill>
+                  <a:srgbClr val="111827"/>
+                </a:solidFill>
+                <a:latin typeface="Noto Sans Mono CJK JP" pitchFamily="34" charset="0"/>
+                <a:ea typeface="Noto Sans Mono CJK JP" pitchFamily="34" charset="-122"/>
+                <a:cs typeface="Noto Sans Mono CJK JP" pitchFamily="34" charset="-120"/>
+              </a:rPr>
+              <a:t>Strong      59.5185%   46.9866%   50.7384%  1/3</a:t>
+            </a:r>
+            <a:endParaRPr lang="en-US" sz="970" dirty="0"/>
+          </a:p>
+          <a:p>
+            <a:pPr indent="0" marL="0">
+              <a:buNone/>
+            </a:pPr>
+            <a:r>
+              <a:rPr lang="en-US" sz="970" dirty="0">
+                <a:solidFill>
+                  <a:srgbClr val="111827"/>
+                </a:solidFill>
+                <a:latin typeface="Noto Sans Mono CJK JP" pitchFamily="34" charset="0"/>
+                <a:ea typeface="Noto Sans Mono CJK JP" pitchFamily="34" charset="-122"/>
+                <a:cs typeface="Noto Sans Mono CJK JP" pitchFamily="34" charset="-120"/>
+              </a:rPr>
+              <a:t>Appearance  50.5986%   47.1715%   51.7376%  2/3</a:t>
+            </a:r>
+            <a:endParaRPr lang="en-US" sz="970" dirty="0"/>
+          </a:p>
+          <a:p>
+            <a:pPr indent="0" marL="0">
+              <a:buNone/>
+            </a:pPr>
+            <a:r>
+              <a:rPr lang="en-US" sz="970" dirty="0">
+                <a:solidFill>
+                  <a:srgbClr val="111827"/>
+                </a:solidFill>
+                <a:latin typeface="Noto Sans Mono CJK JP" pitchFamily="34" charset="0"/>
+                <a:ea typeface="Noto Sans Mono CJK JP" pitchFamily="34" charset="-122"/>
+                <a:cs typeface="Noto Sans Mono CJK JP" pitchFamily="34" charset="-120"/>
+              </a:rPr>
+              <a:t>MixStyle    53.5927%   46.5625%   52.2578%  2/3</a:t>
+            </a:r>
+            <a:endParaRPr lang="en-US" sz="970" dirty="0"/>
+          </a:p>
+          <a:p>
+            <a:pPr indent="0" marL="0">
+              <a:buNone/>
+            </a:pPr>
+            <a:r>
+              <a:rPr lang="en-US" sz="970" dirty="0">
+                <a:solidFill>
+                  <a:srgbClr val="111827"/>
+                </a:solidFill>
+                <a:latin typeface="Noto Sans Mono CJK JP" pitchFamily="34" charset="0"/>
+                <a:ea typeface="Noto Sans Mono CJK JP" pitchFamily="34" charset="-122"/>
+                <a:cs typeface="Noto Sans Mono CJK JP" pitchFamily="34" charset="-120"/>
+              </a:rPr>
+              <a:t>Fourier     58.4002%   53.7558%   48.4219%  3/3</a:t>
+            </a:r>
+            <a:endParaRPr lang="en-US" sz="970" dirty="0"/>
+          </a:p>
+        </p:txBody>
+      </p:sp>
+      <p:sp>
+        <p:nvSpPr>
+          <p:cNvPr id="6" name="Text 3"/>
+          <p:cNvSpPr/>
+          <p:nvPr/>
+        </p:nvSpPr>
+        <p:spPr>
+          <a:xfrm>
+            <a:off x="6583680" y="4160520"/>
+            <a:ext cx="4617720" cy="594360"/>
           </a:xfrm>
           <a:prstGeom prst="rect">
             <a:avLst/>
@@ -3728,34 +3971,34 @@
           </a:bodyPr>
           <a:lstStyle/>
           <a:p>
-            <a:pPr algn="ctr" indent="0" marL="0">
-              <a:buNone/>
-            </a:pPr>
-            <a:r>
-              <a:rPr lang="en-US" sz="1420" b="1" dirty="0">
-                <a:solidFill>
-                  <a:srgbClr val="111827"/>
-                </a:solidFill>
-                <a:latin typeface="Noto Sans CJK SC" pitchFamily="34" charset="0"/>
-                <a:ea typeface="Noto Sans CJK SC" pitchFamily="34" charset="-122"/>
-                <a:cs typeface="Noto Sans CJK SC" pitchFamily="34" charset="-120"/>
-              </a:rPr>
-              <a:t>观察：Strong 在 CASIA 上局部最优；Fourier 在 MSU-MFSD 和 Replay-Attack 上最优，并且是三域一致改善的唯一方案。</a:t>
-            </a:r>
-            <a:endParaRPr lang="en-US" sz="1420" dirty="0"/>
-          </a:p>
-        </p:txBody>
-      </p:sp>
-      <p:sp>
-        <p:nvSpPr>
-          <p:cNvPr id="7" name="Text 3"/>
+            <a:pPr indent="0" marL="0">
+              <a:buNone/>
+            </a:pPr>
+            <a:r>
+              <a:rPr lang="en-US" sz="1350" b="1" dirty="0">
+                <a:solidFill>
+                  <a:srgbClr val="111827"/>
+                </a:solidFill>
+                <a:latin typeface="Noto Sans CJK JP" pitchFamily="34" charset="0"/>
+                <a:ea typeface="Noto Sans CJK JP" pitchFamily="34" charset="-122"/>
+                <a:cs typeface="Noto Sans CJK JP" pitchFamily="34" charset="-120"/>
+              </a:rPr>
+              <a:t>Strong 的平均 Accuracy 最高；Fourier 的平均 AUC 最高、平均 EER 最低，并且一致性最好。</a:t>
+            </a:r>
+            <a:endParaRPr lang="en-US" sz="1350" dirty="0"/>
+          </a:p>
+        </p:txBody>
+      </p:sp>
+      <p:sp>
+        <p:nvSpPr>
+          <p:cNvPr id="7" name="Text 4"/>
           <p:cNvSpPr/>
           <p:nvPr/>
         </p:nvSpPr>
         <p:spPr>
           <a:xfrm>
             <a:off x="10424160" y="6565392"/>
-            <a:ext cx="1280160" cy="137160"/>
+            <a:ext cx="1325880" cy="155448"/>
           </a:xfrm>
           <a:prstGeom prst="rect">
             <a:avLst/>
@@ -3777,11 +4020,11 @@
                 <a:solidFill>
                   <a:srgbClr val="4B5563"/>
                 </a:solidFill>
-                <a:latin typeface="Noto Sans CJK SC" pitchFamily="34" charset="0"/>
-                <a:ea typeface="Noto Sans CJK SC" pitchFamily="34" charset="-122"/>
-                <a:cs typeface="Noto Sans CJK SC" pitchFamily="34" charset="-120"/>
-              </a:rPr>
-              <a:t>FAS 实验答辩  ·  12</a:t>
+                <a:latin typeface="Noto Sans CJK JP" pitchFamily="34" charset="0"/>
+                <a:ea typeface="Noto Sans CJK JP" pitchFamily="34" charset="-122"/>
+                <a:cs typeface="Noto Sans CJK JP" pitchFamily="34" charset="-120"/>
+              </a:rPr>
+              <a:t>FAS 最终答辩 · 12</a:t>
             </a:r>
             <a:endParaRPr lang="en-US" sz="750" dirty="0"/>
           </a:p>
@@ -3827,8 +4070,8 @@
         </p:nvSpPr>
         <p:spPr>
           <a:xfrm>
-            <a:off x="502920" y="310896"/>
-            <a:ext cx="11064240" cy="384048"/>
+            <a:off x="502920" y="274320"/>
+            <a:ext cx="11155680" cy="438912"/>
           </a:xfrm>
           <a:prstGeom prst="rect">
             <a:avLst/>
@@ -3837,24 +4080,26 @@
           <a:ln/>
         </p:spPr>
         <p:txBody>
-          <a:bodyPr wrap="square" lIns="0" tIns="0" rIns="0" bIns="0" rtlCol="0" anchor="ctr"/>
-          <a:lstStyle/>
-          <a:p>
-            <a:pPr indent="0" marL="0">
-              <a:buNone/>
-            </a:pPr>
-            <a:r>
-              <a:rPr lang="en-US" sz="2300" b="1" dirty="0">
+          <a:bodyPr wrap="square" lIns="0" tIns="0" rIns="0" bIns="0" rtlCol="0" anchor="ctr">
+            <a:normAutofit/>
+          </a:bodyPr>
+          <a:lstStyle/>
+          <a:p>
+            <a:pPr indent="0" marL="0">
+              <a:buNone/>
+            </a:pPr>
+            <a:r>
+              <a:rPr lang="en-US" sz="2400" b="1" dirty="0">
                 <a:solidFill>
                   <a:srgbClr val="1F4E79"/>
                 </a:solidFill>
-                <a:latin typeface="Noto Sans CJK SC" pitchFamily="34" charset="0"/>
-                <a:ea typeface="Noto Sans CJK SC" pitchFamily="34" charset="-122"/>
-                <a:cs typeface="Noto Sans CJK SC" pitchFamily="34" charset="-120"/>
-              </a:rPr>
-              <a:t>宏平均与一致性判断</a:t>
-            </a:r>
-            <a:endParaRPr lang="en-US" sz="2300" dirty="0"/>
+                <a:latin typeface="Noto Sans CJK JP" pitchFamily="34" charset="0"/>
+                <a:ea typeface="Noto Sans CJK JP" pitchFamily="34" charset="-122"/>
+                <a:cs typeface="Noto Sans CJK JP" pitchFamily="34" charset="-120"/>
+              </a:rPr>
+              <a:t>第四周：五方法跨域 AUC / EER 对比</a:t>
+            </a:r>
+            <a:endParaRPr lang="en-US" sz="2400" dirty="0"/>
           </a:p>
         </p:txBody>
       </p:sp>
@@ -3876,30 +4121,32 @@
           <a:ln/>
         </p:spPr>
         <p:txBody>
-          <a:bodyPr wrap="square" lIns="0" tIns="0" rIns="0" bIns="0" rtlCol="0" anchor="ctr"/>
-          <a:lstStyle/>
-          <a:p>
-            <a:pPr indent="0" marL="0">
-              <a:buNone/>
-            </a:pPr>
-            <a:r>
-              <a:rPr lang="en-US" sz="950" dirty="0">
+          <a:bodyPr wrap="square" lIns="0" tIns="0" rIns="0" bIns="0" rtlCol="0" anchor="ctr">
+            <a:normAutofit/>
+          </a:bodyPr>
+          <a:lstStyle/>
+          <a:p>
+            <a:pPr indent="0" marL="0">
+              <a:buNone/>
+            </a:pPr>
+            <a:r>
+              <a:rPr lang="en-US" sz="1000" dirty="0">
                 <a:solidFill>
                   <a:srgbClr val="4B5563"/>
                 </a:solidFill>
-                <a:latin typeface="Noto Sans CJK SC" pitchFamily="34" charset="0"/>
-                <a:ea typeface="Noto Sans CJK SC" pitchFamily="34" charset="-122"/>
-                <a:cs typeface="Noto Sans CJK SC" pitchFamily="34" charset="-120"/>
-              </a:rPr>
-              <a:t>避免只挑单个目标域上的最好结果</a:t>
-            </a:r>
-            <a:endParaRPr lang="en-US" sz="950" dirty="0"/>
+                <a:latin typeface="Noto Sans CJK JP" pitchFamily="34" charset="0"/>
+                <a:ea typeface="Noto Sans CJK JP" pitchFamily="34" charset="-122"/>
+                <a:cs typeface="Noto Sans CJK JP" pitchFamily="34" charset="-120"/>
+              </a:rPr>
+              <a:t>跨域评价更应关注排序能力和错误率</a:t>
+            </a:r>
+            <a:endParaRPr lang="en-US" sz="1000" dirty="0"/>
           </a:p>
         </p:txBody>
       </p:sp>
       <p:pic>
         <p:nvPicPr>
-          <p:cNvPr id="4" name="Image 0" descr="/mnt/data/fas_artifacts/charts/macro_summary.png">    </p:cNvPr>
+          <p:cNvPr id="4" name="Image 0" descr="/mnt/data/fas_artifacts/charts/auc_comparison.png">    </p:cNvPr>
           <p:cNvPicPr>
             <a:picLocks noChangeAspect="1"/>
           </p:cNvPicPr>
@@ -3913,156 +4160,48 @@
         </p:blipFill>
         <p:spPr>
           <a:xfrm>
-            <a:off x="594360" y="1143000"/>
-            <a:ext cx="5669280" cy="3063240"/>
+            <a:off x="502920" y="1097280"/>
+            <a:ext cx="5577840" cy="3108960"/>
           </a:xfrm>
           <a:prstGeom prst="rect">
             <a:avLst/>
           </a:prstGeom>
         </p:spPr>
       </p:pic>
-      <p:sp>
-        <p:nvSpPr>
-          <p:cNvPr id="5" name="Text 2"/>
-          <p:cNvSpPr/>
-          <p:nvPr/>
-        </p:nvSpPr>
-        <p:spPr>
-          <a:xfrm>
-            <a:off x="6537960" y="1234440"/>
-            <a:ext cx="4663440" cy="2194560"/>
-          </a:xfrm>
-          <a:prstGeom prst="rect">
-            <a:avLst/>
-          </a:prstGeom>
-          <a:solidFill>
-            <a:srgbClr val="FFFFFF"/>
-          </a:solidFill>
-          <a:ln w="6350">
-            <a:solidFill>
-              <a:srgbClr val="C9D6E3"/>
-            </a:solidFill>
-          </a:ln>
-        </p:spPr>
-        <p:txBody>
-          <a:bodyPr wrap="square" lIns="1270" tIns="1270" rIns="1270" bIns="1270" rtlCol="0" anchor="ctr">
-            <a:normAutofit/>
-          </a:bodyPr>
-          <a:lstStyle/>
-          <a:p>
-            <a:pPr indent="0" marL="0">
-              <a:buNone/>
-            </a:pPr>
-            <a:r>
-              <a:rPr lang="en-US" sz="1100" dirty="0">
-                <a:solidFill>
-                  <a:srgbClr val="111827"/>
-                </a:solidFill>
-                <a:latin typeface="Noto Sans Mono CJK SC" pitchFamily="34" charset="0"/>
-                <a:ea typeface="Noto Sans Mono CJK SC" pitchFamily="34" charset="-122"/>
-                <a:cs typeface="Noto Sans Mono CJK SC" pitchFamily="34" charset="-120"/>
-              </a:rPr>
-              <a:t>方法        平均AUC    平均EER   完整改善</a:t>
-            </a:r>
-            <a:endParaRPr lang="en-US" sz="1100" dirty="0"/>
-          </a:p>
-          <a:p>
-            <a:pPr indent="0" marL="0">
-              <a:buNone/>
-            </a:pPr>
-            <a:r>
-              <a:rPr lang="en-US" sz="1100" dirty="0">
-                <a:solidFill>
-                  <a:srgbClr val="111827"/>
-                </a:solidFill>
-                <a:latin typeface="Noto Sans Mono CJK SC" pitchFamily="34" charset="0"/>
-                <a:ea typeface="Noto Sans Mono CJK SC" pitchFamily="34" charset="-122"/>
-                <a:cs typeface="Noto Sans Mono CJK SC" pitchFamily="34" charset="-120"/>
-              </a:rPr>
-              <a:t>Baseline    42.2235%   55.3802%  -</a:t>
-            </a:r>
-            <a:endParaRPr lang="en-US" sz="1100" dirty="0"/>
-          </a:p>
-          <a:p>
-            <a:pPr indent="0" marL="0">
-              <a:buNone/>
-            </a:pPr>
-            <a:r>
-              <a:rPr lang="en-US" sz="1100" dirty="0">
-                <a:solidFill>
-                  <a:srgbClr val="111827"/>
-                </a:solidFill>
-                <a:latin typeface="Noto Sans Mono CJK SC" pitchFamily="34" charset="0"/>
-                <a:ea typeface="Noto Sans Mono CJK SC" pitchFamily="34" charset="-122"/>
-                <a:cs typeface="Noto Sans Mono CJK SC" pitchFamily="34" charset="-120"/>
-              </a:rPr>
-              <a:t>Strong      46.9866%   50.7384%  1/3</a:t>
-            </a:r>
-            <a:endParaRPr lang="en-US" sz="1100" dirty="0"/>
-          </a:p>
-          <a:p>
-            <a:pPr indent="0" marL="0">
-              <a:buNone/>
-            </a:pPr>
-            <a:r>
-              <a:rPr lang="en-US" sz="1100" dirty="0">
-                <a:solidFill>
-                  <a:srgbClr val="111827"/>
-                </a:solidFill>
-                <a:latin typeface="Noto Sans Mono CJK SC" pitchFamily="34" charset="0"/>
-                <a:ea typeface="Noto Sans Mono CJK SC" pitchFamily="34" charset="-122"/>
-                <a:cs typeface="Noto Sans Mono CJK SC" pitchFamily="34" charset="-120"/>
-              </a:rPr>
-              <a:t>Appearance  47.1715%   51.7376%  2/3</a:t>
-            </a:r>
-            <a:endParaRPr lang="en-US" sz="1100" dirty="0"/>
-          </a:p>
-          <a:p>
-            <a:pPr indent="0" marL="0">
-              <a:buNone/>
-            </a:pPr>
-            <a:r>
-              <a:rPr lang="en-US" sz="1100" dirty="0">
-                <a:solidFill>
-                  <a:srgbClr val="111827"/>
-                </a:solidFill>
-                <a:latin typeface="Noto Sans Mono CJK SC" pitchFamily="34" charset="0"/>
-                <a:ea typeface="Noto Sans Mono CJK SC" pitchFamily="34" charset="-122"/>
-                <a:cs typeface="Noto Sans Mono CJK SC" pitchFamily="34" charset="-120"/>
-              </a:rPr>
-              <a:t>MixStyle    46.5625%   52.2578%  2/3</a:t>
-            </a:r>
-            <a:endParaRPr lang="en-US" sz="1100" dirty="0"/>
-          </a:p>
-          <a:p>
-            <a:pPr indent="0" marL="0">
-              <a:buNone/>
-            </a:pPr>
-            <a:r>
-              <a:rPr lang="en-US" sz="1100" dirty="0">
-                <a:solidFill>
-                  <a:srgbClr val="111827"/>
-                </a:solidFill>
-                <a:latin typeface="Noto Sans Mono CJK SC" pitchFamily="34" charset="0"/>
-                <a:ea typeface="Noto Sans Mono CJK SC" pitchFamily="34" charset="-122"/>
-                <a:cs typeface="Noto Sans Mono CJK SC" pitchFamily="34" charset="-120"/>
-              </a:rPr>
-              <a:t>Fourier     53.7558%   48.4219%  3/3</a:t>
-            </a:r>
-            <a:endParaRPr lang="en-US" sz="1100" dirty="0"/>
-          </a:p>
-        </p:txBody>
-      </p:sp>
-      <p:sp>
-        <p:nvSpPr>
-          <p:cNvPr id="6" name="Text 3"/>
-          <p:cNvSpPr/>
-          <p:nvPr/>
-        </p:nvSpPr>
-        <p:spPr>
-          <a:xfrm>
-            <a:off x="6537960" y="4023360"/>
-            <a:ext cx="4663440" cy="822960"/>
+      <p:pic>
+        <p:nvPicPr>
+          <p:cNvPr id="5" name="Image 1" descr="/mnt/data/fas_artifacts/charts/eer_comparison.png">    </p:cNvPr>
+          <p:cNvPicPr>
+            <a:picLocks noChangeAspect="1"/>
+          </p:cNvPicPr>
+          <p:nvPr/>
+        </p:nvPicPr>
+        <p:blipFill>
+          <a:blip r:embed="rId2"/>
+          <a:stretch>
+            <a:fillRect/>
+          </a:stretch>
+        </p:blipFill>
+        <p:spPr>
+          <a:xfrm>
+            <a:off x="6355080" y="1097280"/>
+            <a:ext cx="5394960" cy="3108960"/>
+          </a:xfrm>
+          <a:prstGeom prst="rect">
+            <a:avLst/>
+          </a:prstGeom>
+        </p:spPr>
+      </p:pic>
+      <p:sp>
+        <p:nvSpPr>
+          <p:cNvPr id="6" name="Text 2"/>
+          <p:cNvSpPr/>
+          <p:nvPr/>
+        </p:nvSpPr>
+        <p:spPr>
+          <a:xfrm>
+            <a:off x="914400" y="4663440"/>
+            <a:ext cx="10332720" cy="594360"/>
           </a:xfrm>
           <a:prstGeom prst="rect">
             <a:avLst/>
@@ -4076,34 +4215,34 @@
           </a:bodyPr>
           <a:lstStyle/>
           <a:p>
-            <a:pPr indent="0" marL="0">
-              <a:buNone/>
-            </a:pPr>
-            <a:r>
-              <a:rPr lang="en-US" sz="1350" b="1" dirty="0">
-                <a:solidFill>
-                  <a:srgbClr val="111827"/>
-                </a:solidFill>
-                <a:latin typeface="Noto Sans CJK SC" pitchFamily="34" charset="0"/>
-                <a:ea typeface="Noto Sans CJK SC" pitchFamily="34" charset="-122"/>
-                <a:cs typeface="Noto Sans CJK SC" pitchFamily="34" charset="-120"/>
-              </a:rPr>
-              <a:t>结论：Strong 的平均 Accuracy 最高，但 Fourier 的平均 AUC 最高、平均 EER 最低，并且完整改善数为 3/3。</a:t>
-            </a:r>
-            <a:endParaRPr lang="en-US" sz="1350" dirty="0"/>
-          </a:p>
-        </p:txBody>
-      </p:sp>
-      <p:sp>
-        <p:nvSpPr>
-          <p:cNvPr id="7" name="Text 4"/>
+            <a:pPr algn="ctr" indent="0" marL="0">
+              <a:buNone/>
+            </a:pPr>
+            <a:r>
+              <a:rPr lang="en-US" sz="1420" b="1" dirty="0">
+                <a:solidFill>
+                  <a:srgbClr val="111827"/>
+                </a:solidFill>
+                <a:latin typeface="Noto Sans CJK JP" pitchFamily="34" charset="0"/>
+                <a:ea typeface="Noto Sans CJK JP" pitchFamily="34" charset="-122"/>
+                <a:cs typeface="Noto Sans CJK JP" pitchFamily="34" charset="-120"/>
+              </a:rPr>
+              <a:t>观察：Strong 在 CASIA 上局部最优；Fourier 在 MSU-MFSD 和 Replay-Attack 上最优，并且是三域一致改善的唯一方案。</a:t>
+            </a:r>
+            <a:endParaRPr lang="en-US" sz="1420" dirty="0"/>
+          </a:p>
+        </p:txBody>
+      </p:sp>
+      <p:sp>
+        <p:nvSpPr>
+          <p:cNvPr id="7" name="Text 3"/>
           <p:cNvSpPr/>
           <p:nvPr/>
         </p:nvSpPr>
         <p:spPr>
           <a:xfrm>
             <a:off x="10424160" y="6565392"/>
-            <a:ext cx="1280160" cy="137160"/>
+            <a:ext cx="1325880" cy="155448"/>
           </a:xfrm>
           <a:prstGeom prst="rect">
             <a:avLst/>
@@ -4125,11 +4264,11 @@
                 <a:solidFill>
                   <a:srgbClr val="4B5563"/>
                 </a:solidFill>
-                <a:latin typeface="Noto Sans CJK SC" pitchFamily="34" charset="0"/>
-                <a:ea typeface="Noto Sans CJK SC" pitchFamily="34" charset="-122"/>
-                <a:cs typeface="Noto Sans CJK SC" pitchFamily="34" charset="-120"/>
-              </a:rPr>
-              <a:t>FAS 实验答辩  ·  13</a:t>
+                <a:latin typeface="Noto Sans CJK JP" pitchFamily="34" charset="0"/>
+                <a:ea typeface="Noto Sans CJK JP" pitchFamily="34" charset="-122"/>
+                <a:cs typeface="Noto Sans CJK JP" pitchFamily="34" charset="-120"/>
+              </a:rPr>
+              <a:t>FAS 最终答辩 · 13</a:t>
             </a:r>
             <a:endParaRPr lang="en-US" sz="750" dirty="0"/>
           </a:p>
@@ -4175,8 +4314,8 @@
         </p:nvSpPr>
         <p:spPr>
           <a:xfrm>
-            <a:off x="502920" y="310896"/>
-            <a:ext cx="11064240" cy="384048"/>
+            <a:off x="502920" y="274320"/>
+            <a:ext cx="11155680" cy="438912"/>
           </a:xfrm>
           <a:prstGeom prst="rect">
             <a:avLst/>
@@ -4185,24 +4324,26 @@
           <a:ln/>
         </p:spPr>
         <p:txBody>
-          <a:bodyPr wrap="square" lIns="0" tIns="0" rIns="0" bIns="0" rtlCol="0" anchor="ctr"/>
-          <a:lstStyle/>
-          <a:p>
-            <a:pPr indent="0" marL="0">
-              <a:buNone/>
-            </a:pPr>
-            <a:r>
-              <a:rPr lang="en-US" sz="2300" b="1" dirty="0">
+          <a:bodyPr wrap="square" lIns="0" tIns="0" rIns="0" bIns="0" rtlCol="0" anchor="ctr">
+            <a:normAutofit/>
+          </a:bodyPr>
+          <a:lstStyle/>
+          <a:p>
+            <a:pPr indent="0" marL="0">
+              <a:buNone/>
+            </a:pPr>
+            <a:r>
+              <a:rPr lang="en-US" sz="2400" b="1" dirty="0">
                 <a:solidFill>
                   <a:srgbClr val="1F4E79"/>
                 </a:solidFill>
-                <a:latin typeface="Noto Sans CJK SC" pitchFamily="34" charset="0"/>
-                <a:ea typeface="Noto Sans CJK SC" pitchFamily="34" charset="-122"/>
-                <a:cs typeface="Noto Sans CJK SC" pitchFamily="34" charset="-120"/>
+                <a:latin typeface="Noto Sans CJK JP" pitchFamily="34" charset="0"/>
+                <a:ea typeface="Noto Sans CJK JP" pitchFamily="34" charset="-122"/>
+                <a:cs typeface="Noto Sans CJK JP" pitchFamily="34" charset="-120"/>
               </a:rPr>
               <a:t>为什么最终推荐 Fourier</a:t>
             </a:r>
-            <a:endParaRPr lang="en-US" sz="2300" dirty="0"/>
+            <a:endParaRPr lang="en-US" sz="2400" dirty="0"/>
           </a:p>
         </p:txBody>
       </p:sp>
@@ -4224,24 +4365,26 @@
           <a:ln/>
         </p:spPr>
         <p:txBody>
-          <a:bodyPr wrap="square" lIns="0" tIns="0" rIns="0" bIns="0" rtlCol="0" anchor="ctr"/>
-          <a:lstStyle/>
-          <a:p>
-            <a:pPr indent="0" marL="0">
-              <a:buNone/>
-            </a:pPr>
-            <a:r>
-              <a:rPr lang="en-US" sz="950" dirty="0">
+          <a:bodyPr wrap="square" lIns="0" tIns="0" rIns="0" bIns="0" rtlCol="0" anchor="ctr">
+            <a:normAutofit/>
+          </a:bodyPr>
+          <a:lstStyle/>
+          <a:p>
+            <a:pPr indent="0" marL="0">
+              <a:buNone/>
+            </a:pPr>
+            <a:r>
+              <a:rPr lang="en-US" sz="1000" dirty="0">
                 <a:solidFill>
                   <a:srgbClr val="4B5563"/>
                 </a:solidFill>
-                <a:latin typeface="Noto Sans CJK SC" pitchFamily="34" charset="0"/>
-                <a:ea typeface="Noto Sans CJK SC" pitchFamily="34" charset="-122"/>
-                <a:cs typeface="Noto Sans CJK SC" pitchFamily="34" charset="-120"/>
+                <a:latin typeface="Noto Sans CJK JP" pitchFamily="34" charset="0"/>
+                <a:ea typeface="Noto Sans CJK JP" pitchFamily="34" charset="-122"/>
+                <a:cs typeface="Noto Sans CJK JP" pitchFamily="34" charset="-120"/>
               </a:rPr>
               <a:t>三域一致改善是最关键证据</a:t>
             </a:r>
-            <a:endParaRPr lang="en-US" sz="950" dirty="0"/>
+            <a:endParaRPr lang="en-US" sz="1000" dirty="0"/>
           </a:p>
         </p:txBody>
       </p:sp>
@@ -4261,8 +4404,8 @@
         </p:blipFill>
         <p:spPr>
           <a:xfrm>
-            <a:off x="685800" y="1143000"/>
-            <a:ext cx="5669280" cy="3063240"/>
+            <a:off x="685800" y="1115568"/>
+            <a:ext cx="5715000" cy="3154680"/>
           </a:xfrm>
           <a:prstGeom prst="rect">
             <a:avLst/>
@@ -4285,8 +4428,8 @@
         </p:blipFill>
         <p:spPr>
           <a:xfrm>
-            <a:off x="6675120" y="1115568"/>
-            <a:ext cx="4572000" cy="3246120"/>
+            <a:off x="6720840" y="1097280"/>
+            <a:ext cx="4526280" cy="3337560"/>
           </a:xfrm>
           <a:prstGeom prst="rect">
             <a:avLst/>
@@ -4301,7 +4444,7 @@
         </p:nvSpPr>
         <p:spPr>
           <a:xfrm>
-            <a:off x="914400" y="4754880"/>
+            <a:off x="914400" y="4800600"/>
             <a:ext cx="10241280" cy="594360"/>
           </a:xfrm>
           <a:prstGeom prst="rect">
@@ -4324,11 +4467,11 @@
                 <a:solidFill>
                   <a:srgbClr val="111827"/>
                 </a:solidFill>
-                <a:latin typeface="Noto Sans CJK SC" pitchFamily="34" charset="0"/>
-                <a:ea typeface="Noto Sans CJK SC" pitchFamily="34" charset="-122"/>
-                <a:cs typeface="Noto Sans CJK SC" pitchFamily="34" charset="-120"/>
-              </a:rPr>
-              <a:t>Fourier 相对 Baseline 在 CASIA、MSU-MFSD、Replay-Attack 上均满足：Accuracy↑、AUC↑、EER↓。这说明它的收益不依赖单一目标域。</a:t>
+                <a:latin typeface="Noto Sans CJK JP" pitchFamily="34" charset="0"/>
+                <a:ea typeface="Noto Sans CJK JP" pitchFamily="34" charset="-122"/>
+                <a:cs typeface="Noto Sans CJK JP" pitchFamily="34" charset="-120"/>
+              </a:rPr>
+              <a:t>Fourier 相对 Baseline 在 CASIA、MSU-MFSD、Replay-Attack 上均满足：Accuracy↑、AUC↑、EER↓。这说明其收益不依赖单一目标域。</a:t>
             </a:r>
             <a:endParaRPr lang="en-US" sz="1420" dirty="0"/>
           </a:p>
@@ -4343,7 +4486,7 @@
         <p:spPr>
           <a:xfrm>
             <a:off x="10424160" y="6565392"/>
-            <a:ext cx="1280160" cy="137160"/>
+            <a:ext cx="1325880" cy="155448"/>
           </a:xfrm>
           <a:prstGeom prst="rect">
             <a:avLst/>
@@ -4365,11 +4508,11 @@
                 <a:solidFill>
                   <a:srgbClr val="4B5563"/>
                 </a:solidFill>
-                <a:latin typeface="Noto Sans CJK SC" pitchFamily="34" charset="0"/>
-                <a:ea typeface="Noto Sans CJK SC" pitchFamily="34" charset="-122"/>
-                <a:cs typeface="Noto Sans CJK SC" pitchFamily="34" charset="-120"/>
-              </a:rPr>
-              <a:t>FAS 实验答辩  ·  14</a:t>
+                <a:latin typeface="Noto Sans CJK JP" pitchFamily="34" charset="0"/>
+                <a:ea typeface="Noto Sans CJK JP" pitchFamily="34" charset="-122"/>
+                <a:cs typeface="Noto Sans CJK JP" pitchFamily="34" charset="-120"/>
+              </a:rPr>
+              <a:t>FAS 最终答辩 · 14</a:t>
             </a:r>
             <a:endParaRPr lang="en-US" sz="750" dirty="0"/>
           </a:p>
@@ -4415,8 +4558,8 @@
         </p:nvSpPr>
         <p:spPr>
           <a:xfrm>
-            <a:off x="502920" y="310896"/>
-            <a:ext cx="11064240" cy="384048"/>
+            <a:off x="502920" y="274320"/>
+            <a:ext cx="11155680" cy="438912"/>
           </a:xfrm>
           <a:prstGeom prst="rect">
             <a:avLst/>
@@ -4425,24 +4568,26 @@
           <a:ln/>
         </p:spPr>
         <p:txBody>
-          <a:bodyPr wrap="square" lIns="0" tIns="0" rIns="0" bIns="0" rtlCol="0" anchor="ctr"/>
-          <a:lstStyle/>
-          <a:p>
-            <a:pPr indent="0" marL="0">
-              <a:buNone/>
-            </a:pPr>
-            <a:r>
-              <a:rPr lang="en-US" sz="2300" b="1" dirty="0">
+          <a:bodyPr wrap="square" lIns="0" tIns="0" rIns="0" bIns="0" rtlCol="0" anchor="ctr">
+            <a:normAutofit/>
+          </a:bodyPr>
+          <a:lstStyle/>
+          <a:p>
+            <a:pPr indent="0" marL="0">
+              <a:buNone/>
+            </a:pPr>
+            <a:r>
+              <a:rPr lang="en-US" sz="2400" b="1" dirty="0">
                 <a:solidFill>
                   <a:srgbClr val="1F4E79"/>
                 </a:solidFill>
-                <a:latin typeface="Noto Sans CJK SC" pitchFamily="34" charset="0"/>
-                <a:ea typeface="Noto Sans CJK SC" pitchFamily="34" charset="-122"/>
-                <a:cs typeface="Noto Sans CJK SC" pitchFamily="34" charset="-120"/>
-              </a:rPr>
-              <a:t>最终结论与边界</a:t>
-            </a:r>
-            <a:endParaRPr lang="en-US" sz="2300" dirty="0"/>
+                <a:latin typeface="Noto Sans CJK JP" pitchFamily="34" charset="0"/>
+                <a:ea typeface="Noto Sans CJK JP" pitchFamily="34" charset="-122"/>
+                <a:cs typeface="Noto Sans CJK JP" pitchFamily="34" charset="-120"/>
+              </a:rPr>
+              <a:t>第四周消融式分析结论</a:t>
+            </a:r>
+            <a:endParaRPr lang="en-US" sz="2400" dirty="0"/>
           </a:p>
         </p:txBody>
       </p:sp>
@@ -4464,24 +4609,26 @@
           <a:ln/>
         </p:spPr>
         <p:txBody>
-          <a:bodyPr wrap="square" lIns="0" tIns="0" rIns="0" bIns="0" rtlCol="0" anchor="ctr"/>
-          <a:lstStyle/>
-          <a:p>
-            <a:pPr indent="0" marL="0">
-              <a:buNone/>
-            </a:pPr>
-            <a:r>
-              <a:rPr lang="en-US" sz="950" dirty="0">
+          <a:bodyPr wrap="square" lIns="0" tIns="0" rIns="0" bIns="0" rtlCol="0" anchor="ctr">
+            <a:normAutofit/>
+          </a:bodyPr>
+          <a:lstStyle/>
+          <a:p>
+            <a:pPr indent="0" marL="0">
+              <a:buNone/>
+            </a:pPr>
+            <a:r>
+              <a:rPr lang="en-US" sz="1000" dirty="0">
                 <a:solidFill>
                   <a:srgbClr val="4B5563"/>
                 </a:solidFill>
-                <a:latin typeface="Noto Sans CJK SC" pitchFamily="34" charset="0"/>
-                <a:ea typeface="Noto Sans CJK SC" pitchFamily="34" charset="-122"/>
-                <a:cs typeface="Noto Sans CJK SC" pitchFamily="34" charset="-120"/>
-              </a:rPr>
-              <a:t>稳定改善不等于彻底解决</a:t>
-            </a:r>
-            <a:endParaRPr lang="en-US" sz="950" dirty="0"/>
+                <a:latin typeface="Noto Sans CJK JP" pitchFamily="34" charset="0"/>
+                <a:ea typeface="Noto Sans CJK JP" pitchFamily="34" charset="-122"/>
+                <a:cs typeface="Noto Sans CJK JP" pitchFamily="34" charset="-120"/>
+              </a:rPr>
+              <a:t>不同机制对应不同域偏移类型</a:t>
+            </a:r>
+            <a:endParaRPr lang="en-US" sz="1000" dirty="0"/>
           </a:p>
         </p:txBody>
       </p:sp>
@@ -4493,8 +4640,8 @@
         </p:nvSpPr>
         <p:spPr>
           <a:xfrm>
-            <a:off x="822960" y="1234440"/>
-            <a:ext cx="5303520" cy="2926080"/>
+            <a:off x="822960" y="1143000"/>
+            <a:ext cx="10698480" cy="3108960"/>
           </a:xfrm>
           <a:prstGeom prst="rect">
             <a:avLst/>
@@ -4513,11 +4660,11 @@
                 <a:solidFill>
                   <a:srgbClr val="111827"/>
                 </a:solidFill>
-                <a:latin typeface="Noto Sans CJK SC" pitchFamily="34" charset="0"/>
-                <a:ea typeface="Noto Sans CJK SC" pitchFamily="34" charset="-122"/>
-                <a:cs typeface="Noto Sans CJK SC" pitchFamily="34" charset="-120"/>
-              </a:rPr>
-              <a:t>第一周：ResNet18 在 OULU-NPU 同域几乎满分。
+                <a:latin typeface="Noto Sans CJK JP" pitchFamily="34" charset="0"/>
+                <a:ea typeface="Noto Sans CJK JP" pitchFamily="34" charset="-122"/>
+                <a:cs typeface="Noto Sans CJK JP" pitchFamily="34" charset="-120"/>
+              </a:rPr>
+              <a:t>Strong：CASIA 最优，但 MSU-MFSD 和 Replay-Attack 的 AUC/EER 不稳定，说明强增强可能破坏有用 FAS 纹理。
 </a:t>
             </a:r>
             <a:endParaRPr lang="en-US" sz="1400" dirty="0"/>
@@ -4528,11 +4675,11 @@
                 <a:solidFill>
                   <a:srgbClr val="111827"/>
                 </a:solidFill>
-                <a:latin typeface="Noto Sans CJK SC" pitchFamily="34" charset="0"/>
-                <a:ea typeface="Noto Sans CJK SC" pitchFamily="34" charset="-122"/>
-                <a:cs typeface="Noto Sans CJK SC" pitchFamily="34" charset="-120"/>
-              </a:rPr>
-              <a:t>第二周：迁移到 CASIA、MSU-MFSD、Replay-Attack 后性能显著下降。
+                <a:latin typeface="Noto Sans CJK JP" pitchFamily="34" charset="0"/>
+                <a:ea typeface="Noto Sans CJK JP" pitchFamily="34" charset="-122"/>
+                <a:cs typeface="Noto Sans CJK JP" pitchFamily="34" charset="-120"/>
+              </a:rPr>
+              <a:t>Appearance：改善 Replay-Attack，说明外观/成像风格随机化能够覆盖部分域偏移。
 </a:t>
             </a:r>
             <a:endParaRPr lang="en-US" sz="1400" dirty="0"/>
@@ -4543,11 +4690,11 @@
                 <a:solidFill>
                   <a:srgbClr val="111827"/>
                 </a:solidFill>
-                <a:latin typeface="Noto Sans CJK SC" pitchFamily="34" charset="0"/>
-                <a:ea typeface="Noto Sans CJK SC" pitchFamily="34" charset="-122"/>
-                <a:cs typeface="Noto Sans CJK SC" pitchFamily="34" charset="-120"/>
-              </a:rPr>
-              <a:t>第三周：Strong、Appearance、MixStyle 均只能改善部分目标域。
+                <a:latin typeface="Noto Sans CJK JP" pitchFamily="34" charset="0"/>
+                <a:ea typeface="Noto Sans CJK JP" pitchFamily="34" charset="-122"/>
+                <a:cs typeface="Noto Sans CJK JP" pitchFamily="34" charset="-120"/>
+              </a:rPr>
+              <a:t>MixStyle：改善部分浅层风格偏移，但对 MSU-MFSD 不稳定。
 </a:t>
             </a:r>
             <a:endParaRPr lang="en-US" sz="1400" dirty="0"/>
@@ -4558,11 +4705,11 @@
                 <a:solidFill>
                   <a:srgbClr val="111827"/>
                 </a:solidFill>
-                <a:latin typeface="Noto Sans CJK SC" pitchFamily="34" charset="0"/>
-                <a:ea typeface="Noto Sans CJK SC" pitchFamily="34" charset="-122"/>
-                <a:cs typeface="Noto Sans CJK SC" pitchFamily="34" charset="-120"/>
-              </a:rPr>
-              <a:t>第四周：Fourier 是唯一三域完整改善的方法，平均 AUC 最高、平均 EER 最低。</a:t>
+                <a:latin typeface="Noto Sans CJK JP" pitchFamily="34" charset="0"/>
+                <a:ea typeface="Noto Sans CJK JP" pitchFamily="34" charset="-122"/>
+                <a:cs typeface="Noto Sans CJK JP" pitchFamily="34" charset="-120"/>
+              </a:rPr>
+              <a:t>Fourier：三域一致改善，说明低频幅度扰动更适合当前 Source-only 泛化设置。</a:t>
             </a:r>
             <a:endParaRPr lang="en-US" sz="1400" dirty="0"/>
           </a:p>
@@ -4576,8 +4723,72 @@
         </p:nvSpPr>
         <p:spPr>
           <a:xfrm>
-            <a:off x="6583680" y="1280160"/>
-            <a:ext cx="4114800" cy="320040"/>
+            <a:off x="1188720" y="4709160"/>
+            <a:ext cx="9784080" cy="594360"/>
+          </a:xfrm>
+          <a:prstGeom prst="rect">
+            <a:avLst/>
+          </a:prstGeom>
+          <a:solidFill>
+            <a:srgbClr val="FFFFFF"/>
+          </a:solidFill>
+          <a:ln w="6350">
+            <a:solidFill>
+              <a:srgbClr val="C9D6E3"/>
+            </a:solidFill>
+          </a:ln>
+        </p:spPr>
+        <p:txBody>
+          <a:bodyPr wrap="square" lIns="1397" tIns="1397" rIns="1397" bIns="1397" rtlCol="0" anchor="ctr">
+            <a:normAutofit/>
+          </a:bodyPr>
+          <a:lstStyle/>
+          <a:p>
+            <a:pPr indent="0" marL="0">
+              <a:buNone/>
+            </a:pPr>
+            <a:r>
+              <a:rPr lang="en-US" sz="1250" dirty="0">
+                <a:solidFill>
+                  <a:srgbClr val="111827"/>
+                </a:solidFill>
+                <a:latin typeface="Noto Sans Mono CJK JP" pitchFamily="34" charset="0"/>
+                <a:ea typeface="Noto Sans Mono CJK JP" pitchFamily="34" charset="-122"/>
+                <a:cs typeface="Noto Sans Mono CJK JP" pitchFamily="34" charset="-120"/>
+              </a:rPr>
+              <a:t>不能过度表述：Fourier 改善了跨域泛化一致性，</a:t>
+            </a:r>
+            <a:endParaRPr lang="en-US" sz="1250" dirty="0"/>
+          </a:p>
+          <a:p>
+            <a:pPr indent="0" marL="0">
+              <a:buNone/>
+            </a:pPr>
+            <a:r>
+              <a:rPr lang="en-US" sz="1250" dirty="0">
+                <a:solidFill>
+                  <a:srgbClr val="111827"/>
+                </a:solidFill>
+                <a:latin typeface="Noto Sans Mono CJK JP" pitchFamily="34" charset="0"/>
+                <a:ea typeface="Noto Sans Mono CJK JP" pitchFamily="34" charset="-122"/>
+                <a:cs typeface="Noto Sans Mono CJK JP" pitchFamily="34" charset="-120"/>
+              </a:rPr>
+              <a:t>但 CASIA 绝对 AUC 仍低于 0.5，不能说已经解决跨域问题。</a:t>
+            </a:r>
+            <a:endParaRPr lang="en-US" sz="1250" dirty="0"/>
+          </a:p>
+        </p:txBody>
+      </p:sp>
+      <p:sp>
+        <p:nvSpPr>
+          <p:cNvPr id="6" name="Text 4"/>
+          <p:cNvSpPr/>
+          <p:nvPr/>
+        </p:nvSpPr>
+        <p:spPr>
+          <a:xfrm>
+            <a:off x="10424160" y="6565392"/>
+            <a:ext cx="1325880" cy="155448"/>
           </a:xfrm>
           <a:prstGeom prst="rect">
             <a:avLst/>
@@ -4591,156 +4802,6 @@
           </a:bodyPr>
           <a:lstStyle/>
           <a:p>
-            <a:pPr indent="0" marL="0">
-              <a:buNone/>
-            </a:pPr>
-            <a:r>
-              <a:rPr lang="en-US" sz="1700" b="1" dirty="0">
-                <a:solidFill>
-                  <a:srgbClr val="B86B00"/>
-                </a:solidFill>
-                <a:latin typeface="Noto Sans CJK SC" pitchFamily="34" charset="0"/>
-                <a:ea typeface="Noto Sans CJK SC" pitchFamily="34" charset="-122"/>
-                <a:cs typeface="Noto Sans CJK SC" pitchFamily="34" charset="-120"/>
-              </a:rPr>
-              <a:t>必须保留的限制</a:t>
-            </a:r>
-            <a:endParaRPr lang="en-US" sz="1700" dirty="0"/>
-          </a:p>
-        </p:txBody>
-      </p:sp>
-      <p:sp>
-        <p:nvSpPr>
-          <p:cNvPr id="6" name="Text 4"/>
-          <p:cNvSpPr/>
-          <p:nvPr/>
-        </p:nvSpPr>
-        <p:spPr>
-          <a:xfrm>
-            <a:off x="6583680" y="1828800"/>
-            <a:ext cx="4937760" cy="1874520"/>
-          </a:xfrm>
-          <a:prstGeom prst="rect">
-            <a:avLst/>
-          </a:prstGeom>
-          <a:noFill/>
-          <a:ln/>
-        </p:spPr>
-        <p:txBody>
-          <a:bodyPr wrap="square" lIns="635" tIns="635" rIns="635" bIns="635" rtlCol="0" anchor="ctr">
-            <a:normAutofit/>
-          </a:bodyPr>
-          <a:lstStyle/>
-          <a:p>
-            <a:r>
-              <a:rPr lang="en-US" sz="1400" dirty="0">
-                <a:solidFill>
-                  <a:srgbClr val="111827"/>
-                </a:solidFill>
-                <a:latin typeface="Noto Sans CJK SC" pitchFamily="34" charset="0"/>
-                <a:ea typeface="Noto Sans CJK SC" pitchFamily="34" charset="-122"/>
-                <a:cs typeface="Noto Sans CJK SC" pitchFamily="34" charset="-120"/>
-              </a:rPr>
-              <a:t>CASIA 上 Fourier 的绝对 AUC 仍低于 0.5。
-</a:t>
-            </a:r>
-            <a:endParaRPr lang="en-US" sz="1400" dirty="0"/>
-          </a:p>
-          <a:p>
-            <a:r>
-              <a:rPr lang="en-US" sz="1400" dirty="0">
-                <a:solidFill>
-                  <a:srgbClr val="111827"/>
-                </a:solidFill>
-                <a:latin typeface="Noto Sans CJK SC" pitchFamily="34" charset="0"/>
-                <a:ea typeface="Noto Sans CJK SC" pitchFamily="34" charset="-122"/>
-                <a:cs typeface="Noto Sans CJK SC" pitchFamily="34" charset="-120"/>
-              </a:rPr>
-              <a:t>当前是单源域训练，没有使用多源域或目标域无监督适应。
-</a:t>
-            </a:r>
-            <a:endParaRPr lang="en-US" sz="1400" dirty="0"/>
-          </a:p>
-          <a:p>
-            <a:r>
-              <a:rPr lang="en-US" sz="1400" dirty="0">
-                <a:solidFill>
-                  <a:srgbClr val="111827"/>
-                </a:solidFill>
-                <a:latin typeface="Noto Sans CJK SC" pitchFamily="34" charset="0"/>
-                <a:ea typeface="Noto Sans CJK SC" pitchFamily="34" charset="-122"/>
-                <a:cs typeface="Noto Sans CJK SC" pitchFamily="34" charset="-120"/>
-              </a:rPr>
-              <a:t>Fourier 是轻量幅度扰动实现，不是完整频域 FAS 网络。</a:t>
-            </a:r>
-            <a:endParaRPr lang="en-US" sz="1400" dirty="0"/>
-          </a:p>
-        </p:txBody>
-      </p:sp>
-      <p:sp>
-        <p:nvSpPr>
-          <p:cNvPr id="7" name="Text 5"/>
-          <p:cNvSpPr/>
-          <p:nvPr/>
-        </p:nvSpPr>
-        <p:spPr>
-          <a:xfrm>
-            <a:off x="6583680" y="4251960"/>
-            <a:ext cx="4754880" cy="731520"/>
-          </a:xfrm>
-          <a:prstGeom prst="rect">
-            <a:avLst/>
-          </a:prstGeom>
-          <a:noFill/>
-          <a:ln/>
-        </p:spPr>
-        <p:txBody>
-          <a:bodyPr wrap="square" lIns="635" tIns="635" rIns="635" bIns="635" rtlCol="0" anchor="ctr">
-            <a:normAutofit/>
-          </a:bodyPr>
-          <a:lstStyle/>
-          <a:p>
-            <a:pPr indent="0" marL="0">
-              <a:buNone/>
-            </a:pPr>
-            <a:r>
-              <a:rPr lang="en-US" sz="1370" b="1" dirty="0">
-                <a:solidFill>
-                  <a:srgbClr val="111827"/>
-                </a:solidFill>
-                <a:latin typeface="Noto Sans CJK SC" pitchFamily="34" charset="0"/>
-                <a:ea typeface="Noto Sans CJK SC" pitchFamily="34" charset="-122"/>
-                <a:cs typeface="Noto Sans CJK SC" pitchFamily="34" charset="-120"/>
-              </a:rPr>
-              <a:t>推荐表述：频域幅度增强能够稳定改善跨数据集泛化，但尚未彻底解决 FAS 跨域泛化问题。</a:t>
-            </a:r>
-            <a:endParaRPr lang="en-US" sz="1370" dirty="0"/>
-          </a:p>
-        </p:txBody>
-      </p:sp>
-      <p:sp>
-        <p:nvSpPr>
-          <p:cNvPr id="8" name="Text 6"/>
-          <p:cNvSpPr/>
-          <p:nvPr/>
-        </p:nvSpPr>
-        <p:spPr>
-          <a:xfrm>
-            <a:off x="10424160" y="6565392"/>
-            <a:ext cx="1280160" cy="137160"/>
-          </a:xfrm>
-          <a:prstGeom prst="rect">
-            <a:avLst/>
-          </a:prstGeom>
-          <a:noFill/>
-          <a:ln/>
-        </p:spPr>
-        <p:txBody>
-          <a:bodyPr wrap="square" lIns="635" tIns="635" rIns="635" bIns="635" rtlCol="0" anchor="ctr">
-            <a:normAutofit/>
-          </a:bodyPr>
-          <a:lstStyle/>
-          <a:p>
             <a:pPr algn="r" indent="0" marL="0">
               <a:buNone/>
             </a:pPr>
@@ -4749,11 +4810,11 @@
                 <a:solidFill>
                   <a:srgbClr val="4B5563"/>
                 </a:solidFill>
-                <a:latin typeface="Noto Sans CJK SC" pitchFamily="34" charset="0"/>
-                <a:ea typeface="Noto Sans CJK SC" pitchFamily="34" charset="-122"/>
-                <a:cs typeface="Noto Sans CJK SC" pitchFamily="34" charset="-120"/>
-              </a:rPr>
-              <a:t>FAS 实验答辩  ·  15</a:t>
+                <a:latin typeface="Noto Sans CJK JP" pitchFamily="34" charset="0"/>
+                <a:ea typeface="Noto Sans CJK JP" pitchFamily="34" charset="-122"/>
+                <a:cs typeface="Noto Sans CJK JP" pitchFamily="34" charset="-120"/>
+              </a:rPr>
+              <a:t>FAS 最终答辩 · 15</a:t>
             </a:r>
             <a:endParaRPr lang="en-US" sz="750" dirty="0"/>
           </a:p>
@@ -4799,8 +4860,8 @@
         </p:nvSpPr>
         <p:spPr>
           <a:xfrm>
-            <a:off x="502920" y="310896"/>
-            <a:ext cx="11064240" cy="384048"/>
+            <a:off x="502920" y="274320"/>
+            <a:ext cx="11155680" cy="438912"/>
           </a:xfrm>
           <a:prstGeom prst="rect">
             <a:avLst/>
@@ -4809,24 +4870,26 @@
           <a:ln/>
         </p:spPr>
         <p:txBody>
-          <a:bodyPr wrap="square" lIns="0" tIns="0" rIns="0" bIns="0" rtlCol="0" anchor="ctr"/>
-          <a:lstStyle/>
-          <a:p>
-            <a:pPr indent="0" marL="0">
-              <a:buNone/>
-            </a:pPr>
-            <a:r>
-              <a:rPr lang="en-US" sz="2300" b="1" dirty="0">
+          <a:bodyPr wrap="square" lIns="0" tIns="0" rIns="0" bIns="0" rtlCol="0" anchor="ctr">
+            <a:normAutofit/>
+          </a:bodyPr>
+          <a:lstStyle/>
+          <a:p>
+            <a:pPr indent="0" marL="0">
+              <a:buNone/>
+            </a:pPr>
+            <a:r>
+              <a:rPr lang="en-US" sz="2400" b="1" dirty="0">
                 <a:solidFill>
                   <a:srgbClr val="1F4E79"/>
                 </a:solidFill>
-                <a:latin typeface="Noto Sans CJK SC" pitchFamily="34" charset="0"/>
-                <a:ea typeface="Noto Sans CJK SC" pitchFamily="34" charset="-122"/>
-                <a:cs typeface="Noto Sans CJK SC" pitchFamily="34" charset="-120"/>
-              </a:rPr>
-              <a:t>仓库与实验产物</a:t>
-            </a:r>
-            <a:endParaRPr lang="en-US" sz="2300" dirty="0"/>
+                <a:latin typeface="Noto Sans CJK JP" pitchFamily="34" charset="0"/>
+                <a:ea typeface="Noto Sans CJK JP" pitchFamily="34" charset="-122"/>
+                <a:cs typeface="Noto Sans CJK JP" pitchFamily="34" charset="-120"/>
+              </a:rPr>
+              <a:t>最终结论与边界</a:t>
+            </a:r>
+            <a:endParaRPr lang="en-US" sz="2400" dirty="0"/>
           </a:p>
         </p:txBody>
       </p:sp>
@@ -4848,24 +4911,26 @@
           <a:ln/>
         </p:spPr>
         <p:txBody>
-          <a:bodyPr wrap="square" lIns="0" tIns="0" rIns="0" bIns="0" rtlCol="0" anchor="ctr"/>
-          <a:lstStyle/>
-          <a:p>
-            <a:pPr indent="0" marL="0">
-              <a:buNone/>
-            </a:pPr>
-            <a:r>
-              <a:rPr lang="en-US" sz="950" dirty="0">
+          <a:bodyPr wrap="square" lIns="0" tIns="0" rIns="0" bIns="0" rtlCol="0" anchor="ctr">
+            <a:normAutofit/>
+          </a:bodyPr>
+          <a:lstStyle/>
+          <a:p>
+            <a:pPr indent="0" marL="0">
+              <a:buNone/>
+            </a:pPr>
+            <a:r>
+              <a:rPr lang="en-US" sz="1000" dirty="0">
                 <a:solidFill>
                   <a:srgbClr val="4B5563"/>
                 </a:solidFill>
-                <a:latin typeface="Noto Sans CJK SC" pitchFamily="34" charset="0"/>
-                <a:ea typeface="Noto Sans CJK SC" pitchFamily="34" charset="-122"/>
-                <a:cs typeface="Noto Sans CJK SC" pitchFamily="34" charset="-120"/>
-              </a:rPr>
-              <a:t>代码、报告、图表和结果表已形成可复现实验档案</a:t>
-            </a:r>
-            <a:endParaRPr lang="en-US" sz="950" dirty="0"/>
+                <a:latin typeface="Noto Sans CJK JP" pitchFamily="34" charset="0"/>
+                <a:ea typeface="Noto Sans CJK JP" pitchFamily="34" charset="-122"/>
+                <a:cs typeface="Noto Sans CJK JP" pitchFamily="34" charset="-120"/>
+              </a:rPr>
+              <a:t>稳定改善不等于彻底解决</a:t>
+            </a:r>
+            <a:endParaRPr lang="en-US" sz="1000" dirty="0"/>
           </a:p>
         </p:txBody>
       </p:sp>
@@ -4877,8 +4942,396 @@
         </p:nvSpPr>
         <p:spPr>
           <a:xfrm>
-            <a:off x="822960" y="1188720"/>
-            <a:ext cx="5212080" cy="2377440"/>
+            <a:off x="822960" y="1234440"/>
+            <a:ext cx="5394960" cy="2926080"/>
+          </a:xfrm>
+          <a:prstGeom prst="rect">
+            <a:avLst/>
+          </a:prstGeom>
+          <a:noFill/>
+          <a:ln/>
+        </p:spPr>
+        <p:txBody>
+          <a:bodyPr wrap="square" lIns="635" tIns="635" rIns="635" bIns="635" rtlCol="0" anchor="ctr">
+            <a:normAutofit/>
+          </a:bodyPr>
+          <a:lstStyle/>
+          <a:p>
+            <a:r>
+              <a:rPr lang="en-US" sz="1400" dirty="0">
+                <a:solidFill>
+                  <a:srgbClr val="111827"/>
+                </a:solidFill>
+                <a:latin typeface="Noto Sans CJK JP" pitchFamily="34" charset="0"/>
+                <a:ea typeface="Noto Sans CJK JP" pitchFamily="34" charset="-122"/>
+                <a:cs typeface="Noto Sans CJK JP" pitchFamily="34" charset="-120"/>
+              </a:rPr>
+              <a:t>第一周：ResNet18 在 OULU-NPU 同域几乎满分。
+</a:t>
+            </a:r>
+            <a:endParaRPr lang="en-US" sz="1400" dirty="0"/>
+          </a:p>
+          <a:p>
+            <a:r>
+              <a:rPr lang="en-US" sz="1400" dirty="0">
+                <a:solidFill>
+                  <a:srgbClr val="111827"/>
+                </a:solidFill>
+                <a:latin typeface="Noto Sans CJK JP" pitchFamily="34" charset="0"/>
+                <a:ea typeface="Noto Sans CJK JP" pitchFamily="34" charset="-122"/>
+                <a:cs typeface="Noto Sans CJK JP" pitchFamily="34" charset="-120"/>
+              </a:rPr>
+              <a:t>第二周：迁移到 CASIA、MSU-MFSD、Replay-Attack 后性能显著下降。
+</a:t>
+            </a:r>
+            <a:endParaRPr lang="en-US" sz="1400" dirty="0"/>
+          </a:p>
+          <a:p>
+            <a:r>
+              <a:rPr lang="en-US" sz="1400" dirty="0">
+                <a:solidFill>
+                  <a:srgbClr val="111827"/>
+                </a:solidFill>
+                <a:latin typeface="Noto Sans CJK JP" pitchFamily="34" charset="0"/>
+                <a:ea typeface="Noto Sans CJK JP" pitchFamily="34" charset="-122"/>
+                <a:cs typeface="Noto Sans CJK JP" pitchFamily="34" charset="-120"/>
+              </a:rPr>
+              <a:t>第三周：Strong、Appearance、MixStyle 均只能改善部分目标域。
+</a:t>
+            </a:r>
+            <a:endParaRPr lang="en-US" sz="1400" dirty="0"/>
+          </a:p>
+          <a:p>
+            <a:r>
+              <a:rPr lang="en-US" sz="1400" dirty="0">
+                <a:solidFill>
+                  <a:srgbClr val="111827"/>
+                </a:solidFill>
+                <a:latin typeface="Noto Sans CJK JP" pitchFamily="34" charset="0"/>
+                <a:ea typeface="Noto Sans CJK JP" pitchFamily="34" charset="-122"/>
+                <a:cs typeface="Noto Sans CJK JP" pitchFamily="34" charset="-120"/>
+              </a:rPr>
+              <a:t>第四周：Fourier 是唯一三域完整改善的方法，平均 AUC 最高、平均 EER 最低。</a:t>
+            </a:r>
+            <a:endParaRPr lang="en-US" sz="1400" dirty="0"/>
+          </a:p>
+        </p:txBody>
+      </p:sp>
+      <p:sp>
+        <p:nvSpPr>
+          <p:cNvPr id="5" name="Text 3"/>
+          <p:cNvSpPr/>
+          <p:nvPr/>
+        </p:nvSpPr>
+        <p:spPr>
+          <a:xfrm>
+            <a:off x="6675120" y="1280160"/>
+            <a:ext cx="4023360" cy="320040"/>
+          </a:xfrm>
+          <a:prstGeom prst="rect">
+            <a:avLst/>
+          </a:prstGeom>
+          <a:noFill/>
+          <a:ln/>
+        </p:spPr>
+        <p:txBody>
+          <a:bodyPr wrap="square" lIns="635" tIns="635" rIns="635" bIns="635" rtlCol="0" anchor="ctr">
+            <a:normAutofit/>
+          </a:bodyPr>
+          <a:lstStyle/>
+          <a:p>
+            <a:pPr indent="0" marL="0">
+              <a:buNone/>
+            </a:pPr>
+            <a:r>
+              <a:rPr lang="en-US" sz="1800" b="1" dirty="0">
+                <a:solidFill>
+                  <a:srgbClr val="B86B00"/>
+                </a:solidFill>
+                <a:latin typeface="Noto Sans CJK JP" pitchFamily="34" charset="0"/>
+                <a:ea typeface="Noto Sans CJK JP" pitchFamily="34" charset="-122"/>
+                <a:cs typeface="Noto Sans CJK JP" pitchFamily="34" charset="-120"/>
+              </a:rPr>
+              <a:t>保留限制</a:t>
+            </a:r>
+            <a:endParaRPr lang="en-US" sz="1800" dirty="0"/>
+          </a:p>
+        </p:txBody>
+      </p:sp>
+      <p:sp>
+        <p:nvSpPr>
+          <p:cNvPr id="6" name="Text 4"/>
+          <p:cNvSpPr/>
+          <p:nvPr/>
+        </p:nvSpPr>
+        <p:spPr>
+          <a:xfrm>
+            <a:off x="6675120" y="1828800"/>
+            <a:ext cx="4800600" cy="1874520"/>
+          </a:xfrm>
+          <a:prstGeom prst="rect">
+            <a:avLst/>
+          </a:prstGeom>
+          <a:noFill/>
+          <a:ln/>
+        </p:spPr>
+        <p:txBody>
+          <a:bodyPr wrap="square" lIns="635" tIns="635" rIns="635" bIns="635" rtlCol="0" anchor="ctr">
+            <a:normAutofit/>
+          </a:bodyPr>
+          <a:lstStyle/>
+          <a:p>
+            <a:r>
+              <a:rPr lang="en-US" sz="1400" dirty="0">
+                <a:solidFill>
+                  <a:srgbClr val="111827"/>
+                </a:solidFill>
+                <a:latin typeface="Noto Sans CJK JP" pitchFamily="34" charset="0"/>
+                <a:ea typeface="Noto Sans CJK JP" pitchFamily="34" charset="-122"/>
+                <a:cs typeface="Noto Sans CJK JP" pitchFamily="34" charset="-120"/>
+              </a:rPr>
+              <a:t>CASIA 上 Fourier 的绝对 AUC 仍低于 0.5。
+</a:t>
+            </a:r>
+            <a:endParaRPr lang="en-US" sz="1400" dirty="0"/>
+          </a:p>
+          <a:p>
+            <a:r>
+              <a:rPr lang="en-US" sz="1400" dirty="0">
+                <a:solidFill>
+                  <a:srgbClr val="111827"/>
+                </a:solidFill>
+                <a:latin typeface="Noto Sans CJK JP" pitchFamily="34" charset="0"/>
+                <a:ea typeface="Noto Sans CJK JP" pitchFamily="34" charset="-122"/>
+                <a:cs typeface="Noto Sans CJK JP" pitchFamily="34" charset="-120"/>
+              </a:rPr>
+              <a:t>当前是单源域训练，没有使用多源域或目标域无监督适应。
+</a:t>
+            </a:r>
+            <a:endParaRPr lang="en-US" sz="1400" dirty="0"/>
+          </a:p>
+          <a:p>
+            <a:r>
+              <a:rPr lang="en-US" sz="1400" dirty="0">
+                <a:solidFill>
+                  <a:srgbClr val="111827"/>
+                </a:solidFill>
+                <a:latin typeface="Noto Sans CJK JP" pitchFamily="34" charset="0"/>
+                <a:ea typeface="Noto Sans CJK JP" pitchFamily="34" charset="-122"/>
+                <a:cs typeface="Noto Sans CJK JP" pitchFamily="34" charset="-120"/>
+              </a:rPr>
+              <a:t>Fourier 是轻量幅度扰动实现，不是完整频域 FAS 网络。</a:t>
+            </a:r>
+            <a:endParaRPr lang="en-US" sz="1400" dirty="0"/>
+          </a:p>
+        </p:txBody>
+      </p:sp>
+      <p:sp>
+        <p:nvSpPr>
+          <p:cNvPr id="7" name="Text 5"/>
+          <p:cNvSpPr/>
+          <p:nvPr/>
+        </p:nvSpPr>
+        <p:spPr>
+          <a:xfrm>
+            <a:off x="6675120" y="4206240"/>
+            <a:ext cx="4663440" cy="777240"/>
+          </a:xfrm>
+          <a:prstGeom prst="rect">
+            <a:avLst/>
+          </a:prstGeom>
+          <a:noFill/>
+          <a:ln/>
+        </p:spPr>
+        <p:txBody>
+          <a:bodyPr wrap="square" lIns="635" tIns="635" rIns="635" bIns="635" rtlCol="0" anchor="ctr">
+            <a:normAutofit/>
+          </a:bodyPr>
+          <a:lstStyle/>
+          <a:p>
+            <a:pPr indent="0" marL="0">
+              <a:buNone/>
+            </a:pPr>
+            <a:r>
+              <a:rPr lang="en-US" sz="1370" b="1" dirty="0">
+                <a:solidFill>
+                  <a:srgbClr val="111827"/>
+                </a:solidFill>
+                <a:latin typeface="Noto Sans CJK JP" pitchFamily="34" charset="0"/>
+                <a:ea typeface="Noto Sans CJK JP" pitchFamily="34" charset="-122"/>
+                <a:cs typeface="Noto Sans CJK JP" pitchFamily="34" charset="-120"/>
+              </a:rPr>
+              <a:t>推荐表述：频域幅度增强能够稳定改善跨数据集泛化，但尚未彻底解决 FAS 跨域泛化问题。</a:t>
+            </a:r>
+            <a:endParaRPr lang="en-US" sz="1370" dirty="0"/>
+          </a:p>
+        </p:txBody>
+      </p:sp>
+      <p:sp>
+        <p:nvSpPr>
+          <p:cNvPr id="8" name="Text 6"/>
+          <p:cNvSpPr/>
+          <p:nvPr/>
+        </p:nvSpPr>
+        <p:spPr>
+          <a:xfrm>
+            <a:off x="10424160" y="6565392"/>
+            <a:ext cx="1325880" cy="155448"/>
+          </a:xfrm>
+          <a:prstGeom prst="rect">
+            <a:avLst/>
+          </a:prstGeom>
+          <a:noFill/>
+          <a:ln/>
+        </p:spPr>
+        <p:txBody>
+          <a:bodyPr wrap="square" lIns="635" tIns="635" rIns="635" bIns="635" rtlCol="0" anchor="ctr">
+            <a:normAutofit/>
+          </a:bodyPr>
+          <a:lstStyle/>
+          <a:p>
+            <a:pPr algn="r" indent="0" marL="0">
+              <a:buNone/>
+            </a:pPr>
+            <a:r>
+              <a:rPr lang="en-US" sz="750" dirty="0">
+                <a:solidFill>
+                  <a:srgbClr val="4B5563"/>
+                </a:solidFill>
+                <a:latin typeface="Noto Sans CJK JP" pitchFamily="34" charset="0"/>
+                <a:ea typeface="Noto Sans CJK JP" pitchFamily="34" charset="-122"/>
+                <a:cs typeface="Noto Sans CJK JP" pitchFamily="34" charset="-120"/>
+              </a:rPr>
+              <a:t>FAS 最终答辩 · 16</a:t>
+            </a:r>
+            <a:endParaRPr lang="en-US" sz="750" dirty="0"/>
+          </a:p>
+        </p:txBody>
+      </p:sp>
+    </p:spTree>
+  </p:cSld>
+  <p:clrMapOvr>
+    <a:masterClrMapping/>
+  </p:clrMapOvr>
+</p:sld>
+</file>
+
+<file path=ppt/slides/slide17.xml><?xml version="1.0" encoding="utf-8"?>
+<p:sld xmlns:a="http://schemas.openxmlformats.org/drawingml/2006/main" xmlns:r="http://schemas.openxmlformats.org/officeDocument/2006/relationships" xmlns:p="http://schemas.openxmlformats.org/presentationml/2006/main">
+  <p:cSld name="Slide 17">
+    <p:bg>
+      <p:bgPr>
+        <a:solidFill>
+          <a:srgbClr val="F7F9FC"/>
+        </a:solidFill>
+      </p:bgPr>
+    </p:bg>
+    <p:spTree>
+      <p:nvGrpSpPr>
+        <p:cNvPr id="1" name=""/>
+        <p:cNvGrpSpPr/>
+        <p:nvPr/>
+      </p:nvGrpSpPr>
+      <p:grpSpPr>
+        <a:xfrm>
+          <a:off x="0" y="0"/>
+          <a:ext cx="0" cy="0"/>
+          <a:chOff x="0" y="0"/>
+          <a:chExt cx="0" cy="0"/>
+        </a:xfrm>
+      </p:grpSpPr>
+      <p:sp>
+        <p:nvSpPr>
+          <p:cNvPr id="2" name="Text 0"/>
+          <p:cNvSpPr/>
+          <p:nvPr/>
+        </p:nvSpPr>
+        <p:spPr>
+          <a:xfrm>
+            <a:off x="502920" y="274320"/>
+            <a:ext cx="11155680" cy="438912"/>
+          </a:xfrm>
+          <a:prstGeom prst="rect">
+            <a:avLst/>
+          </a:prstGeom>
+          <a:noFill/>
+          <a:ln/>
+        </p:spPr>
+        <p:txBody>
+          <a:bodyPr wrap="square" lIns="0" tIns="0" rIns="0" bIns="0" rtlCol="0" anchor="ctr">
+            <a:normAutofit/>
+          </a:bodyPr>
+          <a:lstStyle/>
+          <a:p>
+            <a:pPr indent="0" marL="0">
+              <a:buNone/>
+            </a:pPr>
+            <a:r>
+              <a:rPr lang="en-US" sz="2400" b="1" dirty="0">
+                <a:solidFill>
+                  <a:srgbClr val="1F4E79"/>
+                </a:solidFill>
+                <a:latin typeface="Noto Sans CJK JP" pitchFamily="34" charset="0"/>
+                <a:ea typeface="Noto Sans CJK JP" pitchFamily="34" charset="-122"/>
+                <a:cs typeface="Noto Sans CJK JP" pitchFamily="34" charset="-120"/>
+              </a:rPr>
+              <a:t>仓库与最终产物</a:t>
+            </a:r>
+            <a:endParaRPr lang="en-US" sz="2400" dirty="0"/>
+          </a:p>
+        </p:txBody>
+      </p:sp>
+      <p:sp>
+        <p:nvSpPr>
+          <p:cNvPr id="3" name="Text 1"/>
+          <p:cNvSpPr/>
+          <p:nvPr/>
+        </p:nvSpPr>
+        <p:spPr>
+          <a:xfrm>
+            <a:off x="530352" y="749808"/>
+            <a:ext cx="10972800" cy="228600"/>
+          </a:xfrm>
+          <a:prstGeom prst="rect">
+            <a:avLst/>
+          </a:prstGeom>
+          <a:noFill/>
+          <a:ln/>
+        </p:spPr>
+        <p:txBody>
+          <a:bodyPr wrap="square" lIns="0" tIns="0" rIns="0" bIns="0" rtlCol="0" anchor="ctr">
+            <a:normAutofit/>
+          </a:bodyPr>
+          <a:lstStyle/>
+          <a:p>
+            <a:pPr indent="0" marL="0">
+              <a:buNone/>
+            </a:pPr>
+            <a:r>
+              <a:rPr lang="en-US" sz="1000" dirty="0">
+                <a:solidFill>
+                  <a:srgbClr val="4B5563"/>
+                </a:solidFill>
+                <a:latin typeface="Noto Sans CJK JP" pitchFamily="34" charset="0"/>
+                <a:ea typeface="Noto Sans CJK JP" pitchFamily="34" charset="-122"/>
+                <a:cs typeface="Noto Sans CJK JP" pitchFamily="34" charset="-120"/>
+              </a:rPr>
+              <a:t>代码、报告、图表和审计结果已形成可复现实验档案</a:t>
+            </a:r>
+            <a:endParaRPr lang="en-US" sz="1000" dirty="0"/>
+          </a:p>
+        </p:txBody>
+      </p:sp>
+      <p:sp>
+        <p:nvSpPr>
+          <p:cNvPr id="4" name="Text 2"/>
+          <p:cNvSpPr/>
+          <p:nvPr/>
+        </p:nvSpPr>
+        <p:spPr>
+          <a:xfrm>
+            <a:off x="822960" y="1115568"/>
+            <a:ext cx="5577840" cy="2926080"/>
           </a:xfrm>
           <a:prstGeom prst="rect">
             <a:avLst/>
@@ -4893,128 +5346,162 @@
           </a:ln>
         </p:spPr>
         <p:txBody>
-          <a:bodyPr wrap="square" lIns="1270" tIns="1270" rIns="1270" bIns="1270" rtlCol="0" anchor="ctr">
-            <a:normAutofit/>
-          </a:bodyPr>
-          <a:lstStyle/>
-          <a:p>
-            <a:pPr indent="0" marL="0">
-              <a:buNone/>
-            </a:pPr>
-            <a:r>
-              <a:rPr lang="en-US" sz="1250" dirty="0">
-                <a:solidFill>
-                  <a:srgbClr val="111827"/>
-                </a:solidFill>
-                <a:latin typeface="Noto Sans Mono CJK SC" pitchFamily="34" charset="0"/>
-                <a:ea typeface="Noto Sans Mono CJK SC" pitchFamily="34" charset="-122"/>
-                <a:cs typeface="Noto Sans Mono CJK SC" pitchFamily="34" charset="-120"/>
+          <a:bodyPr wrap="square" lIns="1397" tIns="1397" rIns="1397" bIns="1397" rtlCol="0" anchor="ctr">
+            <a:normAutofit/>
+          </a:bodyPr>
+          <a:lstStyle/>
+          <a:p>
+            <a:pPr indent="0" marL="0">
+              <a:buNone/>
+            </a:pPr>
+            <a:r>
+              <a:rPr lang="en-US" sz="1170" dirty="0">
+                <a:solidFill>
+                  <a:srgbClr val="111827"/>
+                </a:solidFill>
+                <a:latin typeface="Noto Sans Mono CJK JP" pitchFamily="34" charset="0"/>
+                <a:ea typeface="Noto Sans Mono CJK JP" pitchFamily="34" charset="-122"/>
+                <a:cs typeface="Noto Sans Mono CJK JP" pitchFamily="34" charset="-120"/>
               </a:rPr>
               <a:t>关键文档</a:t>
             </a:r>
-            <a:endParaRPr lang="en-US" sz="1250" dirty="0"/>
-          </a:p>
-          <a:p>
-            <a:pPr indent="0" marL="0">
-              <a:buNone/>
-            </a:pPr>
-            <a:r>
-              <a:rPr lang="en-US" sz="1250" dirty="0">
-                <a:solidFill>
-                  <a:srgbClr val="111827"/>
-                </a:solidFill>
-                <a:latin typeface="Noto Sans Mono CJK SC" pitchFamily="34" charset="0"/>
-                <a:ea typeface="Noto Sans Mono CJK SC" pitchFamily="34" charset="-122"/>
-                <a:cs typeface="Noto Sans Mono CJK SC" pitchFamily="34" charset="-120"/>
+            <a:endParaRPr lang="en-US" sz="1170" dirty="0"/>
+          </a:p>
+          <a:p>
+            <a:pPr indent="0" marL="0">
+              <a:buNone/>
+            </a:pPr>
+            <a:r>
+              <a:rPr lang="en-US" sz="1170" dirty="0">
+                <a:solidFill>
+                  <a:srgbClr val="111827"/>
+                </a:solidFill>
+                <a:latin typeface="Noto Sans Mono CJK JP" pitchFamily="34" charset="0"/>
+                <a:ea typeface="Noto Sans Mono CJK JP" pitchFamily="34" charset="-122"/>
+                <a:cs typeface="Noto Sans Mono CJK JP" pitchFamily="34" charset="-120"/>
               </a:rPr>
               <a:t>README.md</a:t>
             </a:r>
-            <a:endParaRPr lang="en-US" sz="1250" dirty="0"/>
-          </a:p>
-          <a:p>
-            <a:pPr indent="0" marL="0">
-              <a:buNone/>
-            </a:pPr>
-            <a:r>
-              <a:rPr lang="en-US" sz="1250" dirty="0">
-                <a:solidFill>
-                  <a:srgbClr val="111827"/>
-                </a:solidFill>
-                <a:latin typeface="Noto Sans Mono CJK SC" pitchFamily="34" charset="0"/>
-                <a:ea typeface="Noto Sans Mono CJK SC" pitchFamily="34" charset="-122"/>
-                <a:cs typeface="Noto Sans Mono CJK SC" pitchFamily="34" charset="-120"/>
+            <a:endParaRPr lang="en-US" sz="1170" dirty="0"/>
+          </a:p>
+          <a:p>
+            <a:pPr indent="0" marL="0">
+              <a:buNone/>
+            </a:pPr>
+            <a:r>
+              <a:rPr lang="en-US" sz="1170" dirty="0">
+                <a:solidFill>
+                  <a:srgbClr val="111827"/>
+                </a:solidFill>
+                <a:latin typeface="Noto Sans Mono CJK JP" pitchFamily="34" charset="0"/>
+                <a:ea typeface="Noto Sans Mono CJK JP" pitchFamily="34" charset="-122"/>
+                <a:cs typeface="Noto Sans Mono CJK JP" pitchFamily="34" charset="-120"/>
+              </a:rPr>
+              <a:t>DATA_PREPROCESSING.md</a:t>
+            </a:r>
+            <a:endParaRPr lang="en-US" sz="1170" dirty="0"/>
+          </a:p>
+          <a:p>
+            <a:pPr indent="0" marL="0">
+              <a:buNone/>
+            </a:pPr>
+            <a:r>
+              <a:rPr lang="en-US" sz="1170" dirty="0">
+                <a:solidFill>
+                  <a:srgbClr val="111827"/>
+                </a:solidFill>
+                <a:latin typeface="Noto Sans Mono CJK JP" pitchFamily="34" charset="0"/>
+                <a:ea typeface="Noto Sans Mono CJK JP" pitchFamily="34" charset="-122"/>
+                <a:cs typeface="Noto Sans Mono CJK JP" pitchFamily="34" charset="-120"/>
               </a:rPr>
               <a:t>EXPERIMENT_RESULTS.md</a:t>
             </a:r>
-            <a:endParaRPr lang="en-US" sz="1250" dirty="0"/>
-          </a:p>
-          <a:p>
-            <a:pPr indent="0" marL="0">
-              <a:buNone/>
-            </a:pPr>
-            <a:r>
-              <a:rPr lang="en-US" sz="1250" dirty="0">
-                <a:solidFill>
-                  <a:srgbClr val="111827"/>
-                </a:solidFill>
-                <a:latin typeface="Noto Sans Mono CJK SC" pitchFamily="34" charset="0"/>
-                <a:ea typeface="Noto Sans Mono CJK SC" pitchFamily="34" charset="-122"/>
-                <a:cs typeface="Noto Sans Mono CJK SC" pitchFamily="34" charset="-120"/>
+            <a:endParaRPr lang="en-US" sz="1170" dirty="0"/>
+          </a:p>
+          <a:p>
+            <a:pPr indent="0" marL="0">
+              <a:buNone/>
+            </a:pPr>
+            <a:r>
+              <a:rPr lang="en-US" sz="1170" dirty="0">
+                <a:solidFill>
+                  <a:srgbClr val="111827"/>
+                </a:solidFill>
+                <a:latin typeface="Noto Sans Mono CJK JP" pitchFamily="34" charset="0"/>
+                <a:ea typeface="Noto Sans Mono CJK JP" pitchFamily="34" charset="-122"/>
+                <a:cs typeface="Noto Sans Mono CJK JP" pitchFamily="34" charset="-120"/>
               </a:rPr>
               <a:t>METHOD_IMPLEMENTATION.md</a:t>
             </a:r>
-            <a:endParaRPr lang="en-US" sz="1250" dirty="0"/>
-          </a:p>
-          <a:p>
-            <a:pPr indent="0" marL="0">
-              <a:buNone/>
-            </a:pPr>
-            <a:r>
-              <a:rPr lang="en-US" sz="1250" dirty="0">
-                <a:solidFill>
-                  <a:srgbClr val="111827"/>
-                </a:solidFill>
-                <a:latin typeface="Noto Sans Mono CJK SC" pitchFamily="34" charset="0"/>
-                <a:ea typeface="Noto Sans Mono CJK SC" pitchFamily="34" charset="-122"/>
-                <a:cs typeface="Noto Sans Mono CJK SC" pitchFamily="34" charset="-120"/>
-              </a:rPr>
-              <a:t>WEEK3_FINAL_REPORT.md</a:t>
-            </a:r>
-            <a:endParaRPr lang="en-US" sz="1250" dirty="0"/>
-          </a:p>
-          <a:p>
-            <a:pPr indent="0" marL="0">
-              <a:buNone/>
-            </a:pPr>
-            <a:r>
-              <a:rPr lang="en-US" sz="1250" dirty="0">
-                <a:solidFill>
-                  <a:srgbClr val="111827"/>
-                </a:solidFill>
-                <a:latin typeface="Noto Sans Mono CJK SC" pitchFamily="34" charset="0"/>
-                <a:ea typeface="Noto Sans Mono CJK SC" pitchFamily="34" charset="-122"/>
-                <a:cs typeface="Noto Sans Mono CJK SC" pitchFamily="34" charset="-120"/>
-              </a:rPr>
-              <a:t>WEEK4_REPORT.md</a:t>
-            </a:r>
-            <a:endParaRPr lang="en-US" sz="1250" dirty="0"/>
-          </a:p>
-          <a:p>
-            <a:pPr indent="0" marL="0">
-              <a:buNone/>
-            </a:pPr>
-            <a:r>
-              <a:rPr lang="en-US" sz="1250" dirty="0">
-                <a:solidFill>
-                  <a:srgbClr val="111827"/>
-                </a:solidFill>
-                <a:latin typeface="Noto Sans Mono CJK SC" pitchFamily="34" charset="0"/>
-                <a:ea typeface="Noto Sans Mono CJK SC" pitchFamily="34" charset="-122"/>
-                <a:cs typeface="Noto Sans Mono CJK SC" pitchFamily="34" charset="-120"/>
+            <a:endParaRPr lang="en-US" sz="1170" dirty="0"/>
+          </a:p>
+          <a:p>
+            <a:pPr indent="0" marL="0">
+              <a:buNone/>
+            </a:pPr>
+            <a:r>
+              <a:rPr lang="en-US" sz="1170" dirty="0">
+                <a:solidFill>
+                  <a:srgbClr val="111827"/>
+                </a:solidFill>
+                <a:latin typeface="Noto Sans Mono CJK JP" pitchFamily="34" charset="0"/>
+                <a:ea typeface="Noto Sans Mono CJK JP" pitchFamily="34" charset="-122"/>
+                <a:cs typeface="Noto Sans Mono CJK JP" pitchFamily="34" charset="-120"/>
+              </a:rPr>
+              <a:t>WEEK1_REPORT.md / WEEK2_REPORT.md</a:t>
+            </a:r>
+            <a:endParaRPr lang="en-US" sz="1170" dirty="0"/>
+          </a:p>
+          <a:p>
+            <a:pPr indent="0" marL="0">
+              <a:buNone/>
+            </a:pPr>
+            <a:r>
+              <a:rPr lang="en-US" sz="1170" dirty="0">
+                <a:solidFill>
+                  <a:srgbClr val="111827"/>
+                </a:solidFill>
+                <a:latin typeface="Noto Sans Mono CJK JP" pitchFamily="34" charset="0"/>
+                <a:ea typeface="Noto Sans Mono CJK JP" pitchFamily="34" charset="-122"/>
+                <a:cs typeface="Noto Sans Mono CJK JP" pitchFamily="34" charset="-120"/>
+              </a:rPr>
+              <a:t>WEEK3_FINAL_REPORT.md / WEEK4_REPORT.md</a:t>
+            </a:r>
+            <a:endParaRPr lang="en-US" sz="1170" dirty="0"/>
+          </a:p>
+          <a:p>
+            <a:pPr indent="0" marL="0">
+              <a:buNone/>
+            </a:pPr>
+            <a:r>
+              <a:rPr lang="en-US" sz="1170" dirty="0">
+                <a:solidFill>
+                  <a:srgbClr val="111827"/>
+                </a:solidFill>
+                <a:latin typeface="Noto Sans Mono CJK JP" pitchFamily="34" charset="0"/>
+                <a:ea typeface="Noto Sans Mono CJK JP" pitchFamily="34" charset="-122"/>
+                <a:cs typeface="Noto Sans Mono CJK JP" pitchFamily="34" charset="-120"/>
+              </a:rPr>
+              <a:t>outputs_data_audit/</a:t>
+            </a:r>
+            <a:endParaRPr lang="en-US" sz="1170" dirty="0"/>
+          </a:p>
+          <a:p>
+            <a:pPr indent="0" marL="0">
+              <a:buNone/>
+            </a:pPr>
+            <a:r>
+              <a:rPr lang="en-US" sz="1170" dirty="0">
+                <a:solidFill>
+                  <a:srgbClr val="111827"/>
+                </a:solidFill>
+                <a:latin typeface="Noto Sans Mono CJK JP" pitchFamily="34" charset="0"/>
+                <a:ea typeface="Noto Sans Mono CJK JP" pitchFamily="34" charset="-122"/>
+                <a:cs typeface="Noto Sans Mono CJK JP" pitchFamily="34" charset="-120"/>
               </a:rPr>
               <a:t>outputs_week4/</a:t>
             </a:r>
-            <a:endParaRPr lang="en-US" sz="1250" dirty="0"/>
+            <a:endParaRPr lang="en-US" sz="1170" dirty="0"/>
           </a:p>
         </p:txBody>
       </p:sp>
@@ -5026,8 +5513,8 @@
         </p:nvSpPr>
         <p:spPr>
           <a:xfrm>
-            <a:off x="6583680" y="1280160"/>
-            <a:ext cx="4114800" cy="320040"/>
+            <a:off x="6720840" y="1280160"/>
+            <a:ext cx="4023360" cy="320040"/>
           </a:xfrm>
           <a:prstGeom prst="rect">
             <a:avLst/>
@@ -5049,9 +5536,9 @@
                 <a:solidFill>
                   <a:srgbClr val="1F4E79"/>
                 </a:solidFill>
-                <a:latin typeface="Noto Sans CJK SC" pitchFamily="34" charset="0"/>
-                <a:ea typeface="Noto Sans CJK SC" pitchFamily="34" charset="-122"/>
-                <a:cs typeface="Noto Sans CJK SC" pitchFamily="34" charset="-120"/>
+                <a:latin typeface="Noto Sans CJK JP" pitchFamily="34" charset="0"/>
+                <a:ea typeface="Noto Sans CJK JP" pitchFamily="34" charset="-122"/>
+                <a:cs typeface="Noto Sans CJK JP" pitchFamily="34" charset="-120"/>
               </a:rPr>
               <a:t>答辩主线</a:t>
             </a:r>
@@ -5067,8 +5554,8 @@
         </p:nvSpPr>
         <p:spPr>
           <a:xfrm>
-            <a:off x="6583680" y="1874520"/>
-            <a:ext cx="4572000" cy="1645920"/>
+            <a:off x="6720840" y="1874520"/>
+            <a:ext cx="4572000" cy="1691640"/>
           </a:xfrm>
           <a:prstGeom prst="rect">
             <a:avLst/>
@@ -5086,17 +5573,17 @@
               <a:buNone/>
             </a:pPr>
             <a:r>
-              <a:rPr lang="en-US" sz="1600" b="1" dirty="0">
-                <a:solidFill>
-                  <a:srgbClr val="111827"/>
-                </a:solidFill>
-                <a:latin typeface="Noto Sans CJK SC" pitchFamily="34" charset="0"/>
-                <a:ea typeface="Noto Sans CJK SC" pitchFamily="34" charset="-122"/>
-                <a:cs typeface="Noto Sans CJK SC" pitchFamily="34" charset="-120"/>
-              </a:rPr>
-              <a:t>Baseline 很强 → 跨域失败 → 域偏移诊断 → 泛化增强探索 → Fourier 三域一致改善 → 局限性与未来工作</a:t>
-            </a:r>
-            <a:endParaRPr lang="en-US" sz="1600" dirty="0"/>
+              <a:rPr lang="en-US" sz="1550" b="1" dirty="0">
+                <a:solidFill>
+                  <a:srgbClr val="111827"/>
+                </a:solidFill>
+                <a:latin typeface="Noto Sans CJK JP" pitchFamily="34" charset="0"/>
+                <a:ea typeface="Noto Sans CJK JP" pitchFamily="34" charset="-122"/>
+                <a:cs typeface="Noto Sans CJK JP" pitchFamily="34" charset="-120"/>
+              </a:rPr>
+              <a:t>数据审计 → Baseline 很强 → 跨域失败 → 域偏移诊断 → 泛化增强探索 → Fourier 三域一致改善 → 局限性与未来工作</a:t>
+            </a:r>
+            <a:endParaRPr lang="en-US" sz="1550" dirty="0"/>
           </a:p>
         </p:txBody>
       </p:sp>
@@ -5108,7 +5595,7 @@
         </p:nvSpPr>
         <p:spPr>
           <a:xfrm>
-            <a:off x="6583680" y="4297680"/>
+            <a:off x="6720840" y="4297680"/>
             <a:ext cx="4572000" cy="548640"/>
           </a:xfrm>
           <a:prstGeom prst="rect">
@@ -5131,9 +5618,9 @@
                 <a:solidFill>
                   <a:srgbClr val="078080"/>
                 </a:solidFill>
-                <a:latin typeface="Noto Sans CJK SC" pitchFamily="34" charset="0"/>
-                <a:ea typeface="Noto Sans CJK SC" pitchFamily="34" charset="-122"/>
-                <a:cs typeface="Noto Sans CJK SC" pitchFamily="34" charset="-120"/>
+                <a:latin typeface="Noto Sans CJK JP" pitchFamily="34" charset="0"/>
+                <a:ea typeface="Noto Sans CJK JP" pitchFamily="34" charset="-122"/>
+                <a:cs typeface="Noto Sans CJK JP" pitchFamily="34" charset="-120"/>
               </a:rPr>
               <a:t>谢谢</a:t>
             </a:r>
@@ -5150,7 +5637,7 @@
         <p:spPr>
           <a:xfrm>
             <a:off x="10424160" y="6565392"/>
-            <a:ext cx="1280160" cy="137160"/>
+            <a:ext cx="1325880" cy="155448"/>
           </a:xfrm>
           <a:prstGeom prst="rect">
             <a:avLst/>
@@ -5172,11 +5659,11 @@
                 <a:solidFill>
                   <a:srgbClr val="4B5563"/>
                 </a:solidFill>
-                <a:latin typeface="Noto Sans CJK SC" pitchFamily="34" charset="0"/>
-                <a:ea typeface="Noto Sans CJK SC" pitchFamily="34" charset="-122"/>
-                <a:cs typeface="Noto Sans CJK SC" pitchFamily="34" charset="-120"/>
-              </a:rPr>
-              <a:t>FAS 实验答辩  ·  16</a:t>
+                <a:latin typeface="Noto Sans CJK JP" pitchFamily="34" charset="0"/>
+                <a:ea typeface="Noto Sans CJK JP" pitchFamily="34" charset="-122"/>
+                <a:cs typeface="Noto Sans CJK JP" pitchFamily="34" charset="-120"/>
+              </a:rPr>
+              <a:t>FAS 最终答辩 · 17</a:t>
             </a:r>
             <a:endParaRPr lang="en-US" sz="750" dirty="0"/>
           </a:p>
@@ -5222,8 +5709,8 @@
         </p:nvSpPr>
         <p:spPr>
           <a:xfrm>
-            <a:off x="502920" y="310896"/>
-            <a:ext cx="11064240" cy="384048"/>
+            <a:off x="502920" y="274320"/>
+            <a:ext cx="11155680" cy="438912"/>
           </a:xfrm>
           <a:prstGeom prst="rect">
             <a:avLst/>
@@ -5232,24 +5719,26 @@
           <a:ln/>
         </p:spPr>
         <p:txBody>
-          <a:bodyPr wrap="square" lIns="0" tIns="0" rIns="0" bIns="0" rtlCol="0" anchor="ctr"/>
-          <a:lstStyle/>
-          <a:p>
-            <a:pPr indent="0" marL="0">
-              <a:buNone/>
-            </a:pPr>
-            <a:r>
-              <a:rPr lang="en-US" sz="2300" b="1" dirty="0">
+          <a:bodyPr wrap="square" lIns="0" tIns="0" rIns="0" bIns="0" rtlCol="0" anchor="ctr">
+            <a:normAutofit/>
+          </a:bodyPr>
+          <a:lstStyle/>
+          <a:p>
+            <a:pPr indent="0" marL="0">
+              <a:buNone/>
+            </a:pPr>
+            <a:r>
+              <a:rPr lang="en-US" sz="2400" b="1" dirty="0">
                 <a:solidFill>
                   <a:srgbClr val="1F4E79"/>
                 </a:solidFill>
-                <a:latin typeface="Noto Sans CJK SC" pitchFamily="34" charset="0"/>
-                <a:ea typeface="Noto Sans CJK SC" pitchFamily="34" charset="-122"/>
-                <a:cs typeface="Noto Sans CJK SC" pitchFamily="34" charset="-120"/>
+                <a:latin typeface="Noto Sans CJK JP" pitchFamily="34" charset="0"/>
+                <a:ea typeface="Noto Sans CJK JP" pitchFamily="34" charset="-122"/>
+                <a:cs typeface="Noto Sans CJK JP" pitchFamily="34" charset="-120"/>
               </a:rPr>
               <a:t>项目总体路线</a:t>
             </a:r>
-            <a:endParaRPr lang="en-US" sz="2300" dirty="0"/>
+            <a:endParaRPr lang="en-US" sz="2400" dirty="0"/>
           </a:p>
         </p:txBody>
       </p:sp>
@@ -5271,24 +5760,26 @@
           <a:ln/>
         </p:spPr>
         <p:txBody>
-          <a:bodyPr wrap="square" lIns="0" tIns="0" rIns="0" bIns="0" rtlCol="0" anchor="ctr"/>
-          <a:lstStyle/>
-          <a:p>
-            <a:pPr indent="0" marL="0">
-              <a:buNone/>
-            </a:pPr>
-            <a:r>
-              <a:rPr lang="en-US" sz="950" dirty="0">
+          <a:bodyPr wrap="square" lIns="0" tIns="0" rIns="0" bIns="0" rtlCol="0" anchor="ctr">
+            <a:normAutofit/>
+          </a:bodyPr>
+          <a:lstStyle/>
+          <a:p>
+            <a:pPr indent="0" marL="0">
+              <a:buNone/>
+            </a:pPr>
+            <a:r>
+              <a:rPr lang="en-US" sz="1000" dirty="0">
                 <a:solidFill>
                   <a:srgbClr val="4B5563"/>
                 </a:solidFill>
-                <a:latin typeface="Noto Sans CJK SC" pitchFamily="34" charset="0"/>
-                <a:ea typeface="Noto Sans CJK SC" pitchFamily="34" charset="-122"/>
-                <a:cs typeface="Noto Sans CJK SC" pitchFamily="34" charset="-120"/>
-              </a:rPr>
-              <a:t>按周推进实验，形成完整证据链</a:t>
-            </a:r>
-            <a:endParaRPr lang="en-US" sz="950" dirty="0"/>
+                <a:latin typeface="Noto Sans CJK JP" pitchFamily="34" charset="0"/>
+                <a:ea typeface="Noto Sans CJK JP" pitchFamily="34" charset="-122"/>
+                <a:cs typeface="Noto Sans CJK JP" pitchFamily="34" charset="-120"/>
+              </a:rPr>
+              <a:t>从可靠 Baseline 到跨域泛化分析</a:t>
+            </a:r>
+            <a:endParaRPr lang="en-US" sz="1000" dirty="0"/>
           </a:p>
         </p:txBody>
       </p:sp>
@@ -5300,8 +5791,8 @@
         </p:nvSpPr>
         <p:spPr>
           <a:xfrm>
-            <a:off x="777240" y="1207008"/>
-            <a:ext cx="6400800" cy="4160520"/>
+            <a:off x="731520" y="1115568"/>
+            <a:ext cx="6583680" cy="4800600"/>
           </a:xfrm>
           <a:prstGeom prst="rect">
             <a:avLst/>
@@ -5316,163 +5807,186 @@
           </a:ln>
         </p:spPr>
         <p:txBody>
-          <a:bodyPr wrap="square" lIns="1270" tIns="1270" rIns="1270" bIns="1270" rtlCol="0" anchor="ctr">
-            <a:normAutofit/>
-          </a:bodyPr>
-          <a:lstStyle/>
-          <a:p>
-            <a:pPr indent="0" marL="0">
-              <a:buNone/>
-            </a:pPr>
-            <a:r>
-              <a:rPr lang="en-US" sz="1220" dirty="0">
-                <a:solidFill>
-                  <a:srgbClr val="111827"/>
-                </a:solidFill>
-                <a:latin typeface="Noto Sans Mono CJK SC" pitchFamily="34" charset="0"/>
-                <a:ea typeface="Noto Sans Mono CJK SC" pitchFamily="34" charset="-122"/>
-                <a:cs typeface="Noto Sans Mono CJK SC" pitchFamily="34" charset="-120"/>
-              </a:rPr>
-              <a:t>第一周  OULU-NPU 同域 Baseline</a:t>
-            </a:r>
-            <a:endParaRPr lang="en-US" sz="1220" dirty="0"/>
-          </a:p>
-          <a:p>
-            <a:pPr indent="0" marL="0">
-              <a:buNone/>
-            </a:pPr>
-            <a:r>
-              <a:rPr lang="en-US" sz="1220" dirty="0">
-                <a:solidFill>
-                  <a:srgbClr val="111827"/>
-                </a:solidFill>
-                <a:latin typeface="Noto Sans Mono CJK SC" pitchFamily="34" charset="0"/>
-                <a:ea typeface="Noto Sans Mono CJK SC" pitchFamily="34" charset="-122"/>
-                <a:cs typeface="Noto Sans Mono CJK SC" pitchFamily="34" charset="-120"/>
-              </a:rPr>
-              <a:t>        ResNet18 + Subject-disjoint + AUC/EER/ROC/混淆矩阵</a:t>
-            </a:r>
-            <a:endParaRPr lang="en-US" sz="1220" dirty="0"/>
-          </a:p>
-          <a:p>
-            <a:pPr indent="0" marL="0">
-              <a:buNone/>
-            </a:pPr>
-            <a:endParaRPr lang="en-US" sz="1220" dirty="0"/>
-          </a:p>
-          <a:p>
-            <a:pPr indent="0" marL="0">
-              <a:buNone/>
-            </a:pPr>
-            <a:r>
-              <a:rPr lang="en-US" sz="1220" dirty="0">
-                <a:solidFill>
-                  <a:srgbClr val="111827"/>
-                </a:solidFill>
-                <a:latin typeface="Noto Sans Mono CJK SC" pitchFamily="34" charset="0"/>
-                <a:ea typeface="Noto Sans Mono CJK SC" pitchFamily="34" charset="-122"/>
-                <a:cs typeface="Noto Sans Mono CJK SC" pitchFamily="34" charset="-120"/>
+          <a:bodyPr wrap="square" lIns="1397" tIns="1397" rIns="1397" bIns="1397" rtlCol="0" anchor="ctr">
+            <a:normAutofit/>
+          </a:bodyPr>
+          <a:lstStyle/>
+          <a:p>
+            <a:pPr indent="0" marL="0">
+              <a:buNone/>
+            </a:pPr>
+            <a:r>
+              <a:rPr lang="en-US" sz="1120" dirty="0">
+                <a:solidFill>
+                  <a:srgbClr val="111827"/>
+                </a:solidFill>
+                <a:latin typeface="Noto Sans Mono CJK JP" pitchFamily="34" charset="0"/>
+                <a:ea typeface="Noto Sans Mono CJK JP" pitchFamily="34" charset="-122"/>
+                <a:cs typeface="Noto Sans Mono CJK JP" pitchFamily="34" charset="-120"/>
+              </a:rPr>
+              <a:t>第一周  数据审计 + 同域 Baseline</a:t>
+            </a:r>
+            <a:endParaRPr lang="en-US" sz="1120" dirty="0"/>
+          </a:p>
+          <a:p>
+            <a:pPr indent="0" marL="0">
+              <a:buNone/>
+            </a:pPr>
+            <a:r>
+              <a:rPr lang="en-US" sz="1120" dirty="0">
+                <a:solidFill>
+                  <a:srgbClr val="111827"/>
+                </a:solidFill>
+                <a:latin typeface="Noto Sans Mono CJK JP" pitchFamily="34" charset="0"/>
+                <a:ea typeface="Noto Sans Mono CJK JP" pitchFamily="34" charset="-122"/>
+                <a:cs typeface="Noto Sans Mono CJK JP" pitchFamily="34" charset="-120"/>
+              </a:rPr>
+              <a:t>        ProcessedData 质量检查；OULU-NPU → ResNet18 → OULU-NPU Test</a:t>
+            </a:r>
+            <a:endParaRPr lang="en-US" sz="1120" dirty="0"/>
+          </a:p>
+          <a:p>
+            <a:pPr indent="0" marL="0">
+              <a:buNone/>
+            </a:pPr>
+            <a:endParaRPr lang="en-US" sz="1120" dirty="0"/>
+          </a:p>
+          <a:p>
+            <a:pPr indent="0" marL="0">
+              <a:buNone/>
+            </a:pPr>
+            <a:r>
+              <a:rPr lang="en-US" sz="1120" dirty="0">
+                <a:solidFill>
+                  <a:srgbClr val="111827"/>
+                </a:solidFill>
+                <a:latin typeface="Noto Sans Mono CJK JP" pitchFamily="34" charset="0"/>
+                <a:ea typeface="Noto Sans Mono CJK JP" pitchFamily="34" charset="-122"/>
+                <a:cs typeface="Noto Sans Mono CJK JP" pitchFamily="34" charset="-120"/>
               </a:rPr>
               <a:t>第二周  跨数据集泛化测试</a:t>
             </a:r>
-            <a:endParaRPr lang="en-US" sz="1220" dirty="0"/>
-          </a:p>
-          <a:p>
-            <a:pPr indent="0" marL="0">
-              <a:buNone/>
-            </a:pPr>
-            <a:r>
-              <a:rPr lang="en-US" sz="1220" dirty="0">
-                <a:solidFill>
-                  <a:srgbClr val="111827"/>
-                </a:solidFill>
-                <a:latin typeface="Noto Sans Mono CJK SC" pitchFamily="34" charset="0"/>
-                <a:ea typeface="Noto Sans Mono CJK SC" pitchFamily="34" charset="-122"/>
-                <a:cs typeface="Noto Sans Mono CJK SC" pitchFamily="34" charset="-120"/>
+            <a:endParaRPr lang="en-US" sz="1120" dirty="0"/>
+          </a:p>
+          <a:p>
+            <a:pPr indent="0" marL="0">
+              <a:buNone/>
+            </a:pPr>
+            <a:r>
+              <a:rPr lang="en-US" sz="1120" dirty="0">
+                <a:solidFill>
+                  <a:srgbClr val="111827"/>
+                </a:solidFill>
+                <a:latin typeface="Noto Sans Mono CJK JP" pitchFamily="34" charset="0"/>
+                <a:ea typeface="Noto Sans Mono CJK JP" pitchFamily="34" charset="-122"/>
+                <a:cs typeface="Noto Sans Mono CJK JP" pitchFamily="34" charset="-120"/>
               </a:rPr>
               <a:t>        OULU → CASIA / MSU-MFSD / Replay-Attack</a:t>
             </a:r>
-            <a:endParaRPr lang="en-US" sz="1220" dirty="0"/>
-          </a:p>
-          <a:p>
-            <a:pPr indent="0" marL="0">
-              <a:buNone/>
-            </a:pPr>
-            <a:endParaRPr lang="en-US" sz="1220" dirty="0"/>
-          </a:p>
-          <a:p>
-            <a:pPr indent="0" marL="0">
-              <a:buNone/>
-            </a:pPr>
-            <a:r>
-              <a:rPr lang="en-US" sz="1220" dirty="0">
-                <a:solidFill>
-                  <a:srgbClr val="111827"/>
-                </a:solidFill>
-                <a:latin typeface="Noto Sans Mono CJK SC" pitchFamily="34" charset="0"/>
-                <a:ea typeface="Noto Sans Mono CJK SC" pitchFamily="34" charset="-122"/>
-                <a:cs typeface="Noto Sans Mono CJK SC" pitchFamily="34" charset="-120"/>
-              </a:rPr>
-              <a:t>第三周  泛化增强探索</a:t>
-            </a:r>
-            <a:endParaRPr lang="en-US" sz="1220" dirty="0"/>
-          </a:p>
-          <a:p>
-            <a:pPr indent="0" marL="0">
-              <a:buNone/>
-            </a:pPr>
-            <a:r>
-              <a:rPr lang="en-US" sz="1220" dirty="0">
-                <a:solidFill>
-                  <a:srgbClr val="111827"/>
-                </a:solidFill>
-                <a:latin typeface="Noto Sans Mono CJK SC" pitchFamily="34" charset="0"/>
-                <a:ea typeface="Noto Sans Mono CJK SC" pitchFamily="34" charset="-122"/>
-                <a:cs typeface="Noto Sans Mono CJK SC" pitchFamily="34" charset="-120"/>
+            <a:endParaRPr lang="en-US" sz="1120" dirty="0"/>
+          </a:p>
+          <a:p>
+            <a:pPr indent="0" marL="0">
+              <a:buNone/>
+            </a:pPr>
+            <a:endParaRPr lang="en-US" sz="1120" dirty="0"/>
+          </a:p>
+          <a:p>
+            <a:pPr indent="0" marL="0">
+              <a:buNone/>
+            </a:pPr>
+            <a:r>
+              <a:rPr lang="en-US" sz="1120" dirty="0">
+                <a:solidFill>
+                  <a:srgbClr val="111827"/>
+                </a:solidFill>
+                <a:latin typeface="Noto Sans Mono CJK JP" pitchFamily="34" charset="0"/>
+                <a:ea typeface="Noto Sans Mono CJK JP" pitchFamily="34" charset="-122"/>
+                <a:cs typeface="Noto Sans Mono CJK JP" pitchFamily="34" charset="-120"/>
+              </a:rPr>
+              <a:t>第三周  泛化增强方法探索</a:t>
+            </a:r>
+            <a:endParaRPr lang="en-US" sz="1120" dirty="0"/>
+          </a:p>
+          <a:p>
+            <a:pPr indent="0" marL="0">
+              <a:buNone/>
+            </a:pPr>
+            <a:r>
+              <a:rPr lang="en-US" sz="1120" dirty="0">
+                <a:solidFill>
+                  <a:srgbClr val="111827"/>
+                </a:solidFill>
+                <a:latin typeface="Noto Sans Mono CJK JP" pitchFamily="34" charset="0"/>
+                <a:ea typeface="Noto Sans Mono CJK JP" pitchFamily="34" charset="-122"/>
+                <a:cs typeface="Noto Sans Mono CJK JP" pitchFamily="34" charset="-120"/>
               </a:rPr>
               <a:t>        Strong / Appearance / MixStyle / Fourier</a:t>
             </a:r>
-            <a:endParaRPr lang="en-US" sz="1220" dirty="0"/>
-          </a:p>
-          <a:p>
-            <a:pPr indent="0" marL="0">
-              <a:buNone/>
-            </a:pPr>
-            <a:endParaRPr lang="en-US" sz="1220" dirty="0"/>
-          </a:p>
-          <a:p>
-            <a:pPr indent="0" marL="0">
-              <a:buNone/>
-            </a:pPr>
-            <a:r>
-              <a:rPr lang="en-US" sz="1220" dirty="0">
-                <a:solidFill>
-                  <a:srgbClr val="111827"/>
-                </a:solidFill>
-                <a:latin typeface="Noto Sans Mono CJK SC" pitchFamily="34" charset="0"/>
-                <a:ea typeface="Noto Sans Mono CJK SC" pitchFamily="34" charset="-122"/>
-                <a:cs typeface="Noto Sans Mono CJK SC" pitchFamily="34" charset="-120"/>
+            <a:endParaRPr lang="en-US" sz="1120" dirty="0"/>
+          </a:p>
+          <a:p>
+            <a:pPr indent="0" marL="0">
+              <a:buNone/>
+            </a:pPr>
+            <a:endParaRPr lang="en-US" sz="1120" dirty="0"/>
+          </a:p>
+          <a:p>
+            <a:pPr indent="0" marL="0">
+              <a:buNone/>
+            </a:pPr>
+            <a:r>
+              <a:rPr lang="en-US" sz="1120" dirty="0">
+                <a:solidFill>
+                  <a:srgbClr val="111827"/>
+                </a:solidFill>
+                <a:latin typeface="Noto Sans Mono CJK JP" pitchFamily="34" charset="0"/>
+                <a:ea typeface="Noto Sans Mono CJK JP" pitchFamily="34" charset="-122"/>
+                <a:cs typeface="Noto Sans Mono CJK JP" pitchFamily="34" charset="-120"/>
               </a:rPr>
               <a:t>第四周  统一对比与消融式分析</a:t>
             </a:r>
-            <a:endParaRPr lang="en-US" sz="1220" dirty="0"/>
-          </a:p>
-          <a:p>
-            <a:pPr indent="0" marL="0">
-              <a:buNone/>
-            </a:pPr>
-            <a:r>
-              <a:rPr lang="en-US" sz="1220" dirty="0">
-                <a:solidFill>
-                  <a:srgbClr val="111827"/>
-                </a:solidFill>
-                <a:latin typeface="Noto Sans Mono CJK SC" pitchFamily="34" charset="0"/>
-                <a:ea typeface="Noto Sans Mono CJK SC" pitchFamily="34" charset="-122"/>
-                <a:cs typeface="Noto Sans Mono CJK SC" pitchFamily="34" charset="-120"/>
+            <a:endParaRPr lang="en-US" sz="1120" dirty="0"/>
+          </a:p>
+          <a:p>
+            <a:pPr indent="0" marL="0">
+              <a:buNone/>
+            </a:pPr>
+            <a:r>
+              <a:rPr lang="en-US" sz="1120" dirty="0">
+                <a:solidFill>
+                  <a:srgbClr val="111827"/>
+                </a:solidFill>
+                <a:latin typeface="Noto Sans Mono CJK JP" pitchFamily="34" charset="0"/>
+                <a:ea typeface="Noto Sans Mono CJK JP" pitchFamily="34" charset="-122"/>
+                <a:cs typeface="Noto Sans Mono CJK JP" pitchFamily="34" charset="-120"/>
               </a:rPr>
               <a:t>        五方法横向比较、宏平均、提升热力图</a:t>
             </a:r>
-            <a:endParaRPr lang="en-US" sz="1220" dirty="0"/>
+            <a:endParaRPr lang="en-US" sz="1120" dirty="0"/>
+          </a:p>
+          <a:p>
+            <a:pPr indent="0" marL="0">
+              <a:buNone/>
+            </a:pPr>
+            <a:endParaRPr lang="en-US" sz="1120" dirty="0"/>
+          </a:p>
+          <a:p>
+            <a:pPr indent="0" marL="0">
+              <a:buNone/>
+            </a:pPr>
+            <a:r>
+              <a:rPr lang="en-US" sz="1120" dirty="0">
+                <a:solidFill>
+                  <a:srgbClr val="111827"/>
+                </a:solidFill>
+                <a:latin typeface="Noto Sans Mono CJK JP" pitchFamily="34" charset="0"/>
+                <a:ea typeface="Noto Sans Mono CJK JP" pitchFamily="34" charset="-122"/>
+                <a:cs typeface="Noto Sans Mono CJK JP" pitchFamily="34" charset="-120"/>
+              </a:rPr>
+              <a:t>第五周  最终报告与答辩</a:t>
+            </a:r>
+            <a:endParaRPr lang="en-US" sz="1120" dirty="0"/>
           </a:p>
         </p:txBody>
       </p:sp>
@@ -5485,7 +5999,7 @@
         <p:spPr>
           <a:xfrm>
             <a:off x="7543800" y="1417320"/>
-            <a:ext cx="4023360" cy="2971800"/>
+            <a:ext cx="4069080" cy="3291840"/>
           </a:xfrm>
           <a:prstGeom prst="rect">
             <a:avLst/>
@@ -5504,11 +6018,11 @@
                 <a:solidFill>
                   <a:srgbClr val="111827"/>
                 </a:solidFill>
-                <a:latin typeface="Noto Sans CJK SC" pitchFamily="34" charset="0"/>
-                <a:ea typeface="Noto Sans CJK SC" pitchFamily="34" charset="-122"/>
-                <a:cs typeface="Noto Sans CJK SC" pitchFamily="34" charset="-120"/>
-              </a:rPr>
-              <a:t>主线不是单纯追求同域精度，而是验证并缓解跨数据集泛化退化。
+                <a:latin typeface="Noto Sans CJK JP" pitchFamily="34" charset="0"/>
+                <a:ea typeface="Noto Sans CJK JP" pitchFamily="34" charset="-122"/>
+                <a:cs typeface="Noto Sans CJK JP" pitchFamily="34" charset="-120"/>
+              </a:rPr>
+              <a:t>主线不是只追求同域精度，而是验证并缓解跨数据集性能退化。
 </a:t>
             </a:r>
             <a:endParaRPr lang="en-US" sz="1400" dirty="0"/>
@@ -5519,11 +6033,11 @@
                 <a:solidFill>
                   <a:srgbClr val="111827"/>
                 </a:solidFill>
-                <a:latin typeface="Noto Sans CJK SC" pitchFamily="34" charset="0"/>
-                <a:ea typeface="Noto Sans CJK SC" pitchFamily="34" charset="-122"/>
-                <a:cs typeface="Noto Sans CJK SC" pitchFamily="34" charset="-120"/>
-              </a:rPr>
-              <a:t>所有跨域实验均为 Source-only：目标域不参与训练、微调或参数选择。
+                <a:latin typeface="Noto Sans CJK JP" pitchFamily="34" charset="0"/>
+                <a:ea typeface="Noto Sans CJK JP" pitchFamily="34" charset="-122"/>
+                <a:cs typeface="Noto Sans CJK JP" pitchFamily="34" charset="-120"/>
+              </a:rPr>
+              <a:t>所有跨域实验均为 Source-only，目标域不参与训练、微调或参数选择。
 </a:t>
             </a:r>
             <a:endParaRPr lang="en-US" sz="1400" dirty="0"/>
@@ -5534,11 +6048,11 @@
                 <a:solidFill>
                   <a:srgbClr val="111827"/>
                 </a:solidFill>
-                <a:latin typeface="Noto Sans CJK SC" pitchFamily="34" charset="0"/>
-                <a:ea typeface="Noto Sans CJK SC" pitchFamily="34" charset="-122"/>
-                <a:cs typeface="Noto Sans CJK SC" pitchFamily="34" charset="-120"/>
-              </a:rPr>
-              <a:t>最终推荐依据为跨目标域一致性，而不是某一个目标域上的局部最优。</a:t>
+                <a:latin typeface="Noto Sans CJK JP" pitchFamily="34" charset="0"/>
+                <a:ea typeface="Noto Sans CJK JP" pitchFamily="34" charset="-122"/>
+                <a:cs typeface="Noto Sans CJK JP" pitchFamily="34" charset="-120"/>
+              </a:rPr>
+              <a:t>最终推荐依据是跨目标域一致性，而不是某个目标域的单点最优。</a:t>
             </a:r>
             <a:endParaRPr lang="en-US" sz="1400" dirty="0"/>
           </a:p>
@@ -5553,7 +6067,7 @@
         <p:spPr>
           <a:xfrm>
             <a:off x="10424160" y="6565392"/>
-            <a:ext cx="1280160" cy="137160"/>
+            <a:ext cx="1325880" cy="155448"/>
           </a:xfrm>
           <a:prstGeom prst="rect">
             <a:avLst/>
@@ -5575,11 +6089,11 @@
                 <a:solidFill>
                   <a:srgbClr val="4B5563"/>
                 </a:solidFill>
-                <a:latin typeface="Noto Sans CJK SC" pitchFamily="34" charset="0"/>
-                <a:ea typeface="Noto Sans CJK SC" pitchFamily="34" charset="-122"/>
-                <a:cs typeface="Noto Sans CJK SC" pitchFamily="34" charset="-120"/>
-              </a:rPr>
-              <a:t>FAS 实验答辩  ·  2</a:t>
+                <a:latin typeface="Noto Sans CJK JP" pitchFamily="34" charset="0"/>
+                <a:ea typeface="Noto Sans CJK JP" pitchFamily="34" charset="-122"/>
+                <a:cs typeface="Noto Sans CJK JP" pitchFamily="34" charset="-120"/>
+              </a:rPr>
+              <a:t>FAS 最终答辩 · 2</a:t>
             </a:r>
             <a:endParaRPr lang="en-US" sz="750" dirty="0"/>
           </a:p>
@@ -5625,8 +6139,8 @@
         </p:nvSpPr>
         <p:spPr>
           <a:xfrm>
-            <a:off x="502920" y="310896"/>
-            <a:ext cx="11064240" cy="384048"/>
+            <a:off x="502920" y="274320"/>
+            <a:ext cx="11155680" cy="438912"/>
           </a:xfrm>
           <a:prstGeom prst="rect">
             <a:avLst/>
@@ -5635,24 +6149,26 @@
           <a:ln/>
         </p:spPr>
         <p:txBody>
-          <a:bodyPr wrap="square" lIns="0" tIns="0" rIns="0" bIns="0" rtlCol="0" anchor="ctr"/>
-          <a:lstStyle/>
-          <a:p>
-            <a:pPr indent="0" marL="0">
-              <a:buNone/>
-            </a:pPr>
-            <a:r>
-              <a:rPr lang="en-US" sz="2300" b="1" dirty="0">
+          <a:bodyPr wrap="square" lIns="0" tIns="0" rIns="0" bIns="0" rtlCol="0" anchor="ctr">
+            <a:normAutofit/>
+          </a:bodyPr>
+          <a:lstStyle/>
+          <a:p>
+            <a:pPr indent="0" marL="0">
+              <a:buNone/>
+            </a:pPr>
+            <a:r>
+              <a:rPr lang="en-US" sz="2400" b="1" dirty="0">
                 <a:solidFill>
                   <a:srgbClr val="1F4E79"/>
                 </a:solidFill>
-                <a:latin typeface="Noto Sans CJK SC" pitchFamily="34" charset="0"/>
-                <a:ea typeface="Noto Sans CJK SC" pitchFamily="34" charset="-122"/>
-                <a:cs typeface="Noto Sans CJK SC" pitchFamily="34" charset="-120"/>
-              </a:rPr>
-              <a:t>数据与防泄漏协议</a:t>
-            </a:r>
-            <a:endParaRPr lang="en-US" sz="2300" dirty="0"/>
+                <a:latin typeface="Noto Sans CJK JP" pitchFamily="34" charset="0"/>
+                <a:ea typeface="Noto Sans CJK JP" pitchFamily="34" charset="-122"/>
+                <a:cs typeface="Noto Sans CJK JP" pitchFamily="34" charset="-120"/>
+              </a:rPr>
+              <a:t>数据入口与质量审计</a:t>
+            </a:r>
+            <a:endParaRPr lang="en-US" sz="2400" dirty="0"/>
           </a:p>
         </p:txBody>
       </p:sp>
@@ -5674,37 +6190,63 @@
           <a:ln/>
         </p:spPr>
         <p:txBody>
-          <a:bodyPr wrap="square" lIns="0" tIns="0" rIns="0" bIns="0" rtlCol="0" anchor="ctr"/>
-          <a:lstStyle/>
-          <a:p>
-            <a:pPr indent="0" marL="0">
-              <a:buNone/>
-            </a:pPr>
-            <a:r>
-              <a:rPr lang="en-US" sz="950" dirty="0">
+          <a:bodyPr wrap="square" lIns="0" tIns="0" rIns="0" bIns="0" rtlCol="0" anchor="ctr">
+            <a:normAutofit/>
+          </a:bodyPr>
+          <a:lstStyle/>
+          <a:p>
+            <a:pPr indent="0" marL="0">
+              <a:buNone/>
+            </a:pPr>
+            <a:r>
+              <a:rPr lang="en-US" sz="1000" dirty="0">
                 <a:solidFill>
                   <a:srgbClr val="4B5563"/>
                 </a:solidFill>
-                <a:latin typeface="Noto Sans CJK SC" pitchFamily="34" charset="0"/>
-                <a:ea typeface="Noto Sans CJK SC" pitchFamily="34" charset="-122"/>
-                <a:cs typeface="Noto Sans CJK SC" pitchFamily="34" charset="-120"/>
-              </a:rPr>
-              <a:t>Subject-disjoint 是实验可信性的前提</a:t>
-            </a:r>
-            <a:endParaRPr lang="en-US" sz="950" dirty="0"/>
-          </a:p>
-        </p:txBody>
-      </p:sp>
-      <p:sp>
-        <p:nvSpPr>
-          <p:cNvPr id="4" name="Text 2"/>
-          <p:cNvSpPr/>
-          <p:nvPr/>
-        </p:nvSpPr>
-        <p:spPr>
-          <a:xfrm>
-            <a:off x="685800" y="1143000"/>
-            <a:ext cx="5166360" cy="2103120"/>
+                <a:latin typeface="Noto Sans CJK JP" pitchFamily="34" charset="0"/>
+                <a:ea typeface="Noto Sans CJK JP" pitchFamily="34" charset="-122"/>
+                <a:cs typeface="Noto Sans CJK JP" pitchFamily="34" charset="-120"/>
+              </a:rPr>
+              <a:t>最终训练输入已完成可复现只读审计</a:t>
+            </a:r>
+            <a:endParaRPr lang="en-US" sz="1000" dirty="0"/>
+          </a:p>
+        </p:txBody>
+      </p:sp>
+      <p:pic>
+        <p:nvPicPr>
+          <p:cNvPr id="4" name="Image 0" descr="/mnt/data/fas_artifacts/charts/data_audit_counts.png">    </p:cNvPr>
+          <p:cNvPicPr>
+            <a:picLocks noChangeAspect="1"/>
+          </p:cNvPicPr>
+          <p:nvPr/>
+        </p:nvPicPr>
+        <p:blipFill>
+          <a:blip r:embed="rId1"/>
+          <a:stretch>
+            <a:fillRect/>
+          </a:stretch>
+        </p:blipFill>
+        <p:spPr>
+          <a:xfrm>
+            <a:off x="594360" y="1078992"/>
+            <a:ext cx="5989320" cy="3154680"/>
+          </a:xfrm>
+          <a:prstGeom prst="rect">
+            <a:avLst/>
+          </a:prstGeom>
+        </p:spPr>
+      </p:pic>
+      <p:sp>
+        <p:nvSpPr>
+          <p:cNvPr id="5" name="Text 2"/>
+          <p:cNvSpPr/>
+          <p:nvPr/>
+        </p:nvSpPr>
+        <p:spPr>
+          <a:xfrm>
+            <a:off x="6903720" y="1143000"/>
+            <a:ext cx="4480560" cy="2377440"/>
           </a:xfrm>
           <a:prstGeom prst="rect">
             <a:avLst/>
@@ -5719,222 +6261,158 @@
           </a:ln>
         </p:spPr>
         <p:txBody>
-          <a:bodyPr wrap="square" lIns="1270" tIns="1270" rIns="1270" bIns="1270" rtlCol="0" anchor="ctr">
-            <a:normAutofit/>
-          </a:bodyPr>
-          <a:lstStyle/>
-          <a:p>
-            <a:pPr indent="0" marL="0">
-              <a:buNone/>
-            </a:pPr>
-            <a:r>
-              <a:rPr lang="en-US" sz="1250" dirty="0">
-                <a:solidFill>
-                  <a:srgbClr val="111827"/>
-                </a:solidFill>
-                <a:latin typeface="Noto Sans Mono CJK SC" pitchFamily="34" charset="0"/>
-                <a:ea typeface="Noto Sans Mono CJK SC" pitchFamily="34" charset="-122"/>
-                <a:cs typeface="Noto Sans Mono CJK SC" pitchFamily="34" charset="-120"/>
-              </a:rPr>
-              <a:t>数据集与角色</a:t>
-            </a:r>
-            <a:endParaRPr lang="en-US" sz="1250" dirty="0"/>
-          </a:p>
-          <a:p>
-            <a:pPr indent="0" marL="0">
-              <a:buNone/>
-            </a:pPr>
-            <a:r>
-              <a:rPr lang="en-US" sz="1250" dirty="0">
-                <a:solidFill>
-                  <a:srgbClr val="111827"/>
-                </a:solidFill>
-                <a:latin typeface="Noto Sans Mono CJK SC" pitchFamily="34" charset="0"/>
-                <a:ea typeface="Noto Sans Mono CJK SC" pitchFamily="34" charset="-122"/>
-                <a:cs typeface="Noto Sans Mono CJK SC" pitchFamily="34" charset="-120"/>
-              </a:rPr>
-              <a:t>OULU-NPU       源域 / 同域测试</a:t>
-            </a:r>
-            <a:endParaRPr lang="en-US" sz="1250" dirty="0"/>
-          </a:p>
-          <a:p>
-            <a:pPr indent="0" marL="0">
-              <a:buNone/>
-            </a:pPr>
-            <a:r>
-              <a:rPr lang="en-US" sz="1250" dirty="0">
-                <a:solidFill>
-                  <a:srgbClr val="111827"/>
-                </a:solidFill>
-                <a:latin typeface="Noto Sans Mono CJK SC" pitchFamily="34" charset="0"/>
-                <a:ea typeface="Noto Sans Mono CJK SC" pitchFamily="34" charset="-122"/>
-                <a:cs typeface="Noto Sans Mono CJK SC" pitchFamily="34" charset="-120"/>
-              </a:rPr>
-              <a:t>CASIA          目标域，仅测试</a:t>
-            </a:r>
-            <a:endParaRPr lang="en-US" sz="1250" dirty="0"/>
-          </a:p>
-          <a:p>
-            <a:pPr indent="0" marL="0">
-              <a:buNone/>
-            </a:pPr>
-            <a:r>
-              <a:rPr lang="en-US" sz="1250" dirty="0">
-                <a:solidFill>
-                  <a:srgbClr val="111827"/>
-                </a:solidFill>
-                <a:latin typeface="Noto Sans Mono CJK SC" pitchFamily="34" charset="0"/>
-                <a:ea typeface="Noto Sans Mono CJK SC" pitchFamily="34" charset="-122"/>
-                <a:cs typeface="Noto Sans Mono CJK SC" pitchFamily="34" charset="-120"/>
-              </a:rPr>
-              <a:t>MSU-MFSD       目标域，仅测试</a:t>
-            </a:r>
-            <a:endParaRPr lang="en-US" sz="1250" dirty="0"/>
-          </a:p>
-          <a:p>
-            <a:pPr indent="0" marL="0">
-              <a:buNone/>
-            </a:pPr>
-            <a:r>
-              <a:rPr lang="en-US" sz="1250" dirty="0">
-                <a:solidFill>
-                  <a:srgbClr val="111827"/>
-                </a:solidFill>
-                <a:latin typeface="Noto Sans Mono CJK SC" pitchFamily="34" charset="0"/>
-                <a:ea typeface="Noto Sans Mono CJK SC" pitchFamily="34" charset="-122"/>
-                <a:cs typeface="Noto Sans Mono CJK SC" pitchFamily="34" charset="-120"/>
-              </a:rPr>
-              <a:t>Replay-Attack  目标域，仅测试</a:t>
-            </a:r>
-            <a:endParaRPr lang="en-US" sz="1250" dirty="0"/>
-          </a:p>
-        </p:txBody>
-      </p:sp>
-      <p:sp>
-        <p:nvSpPr>
-          <p:cNvPr id="5" name="Text 3"/>
-          <p:cNvSpPr/>
-          <p:nvPr/>
-        </p:nvSpPr>
-        <p:spPr>
-          <a:xfrm>
-            <a:off x="685800" y="3657600"/>
-            <a:ext cx="5166360" cy="1920240"/>
-          </a:xfrm>
-          <a:prstGeom prst="rect">
-            <a:avLst/>
-          </a:prstGeom>
-          <a:solidFill>
-            <a:srgbClr val="FFFFFF"/>
-          </a:solidFill>
-          <a:ln w="6350">
-            <a:solidFill>
-              <a:srgbClr val="C9D6E3"/>
-            </a:solidFill>
-          </a:ln>
-        </p:spPr>
-        <p:txBody>
-          <a:bodyPr wrap="square" lIns="1270" tIns="1270" rIns="1270" bIns="1270" rtlCol="0" anchor="ctr">
-            <a:normAutofit/>
-          </a:bodyPr>
-          <a:lstStyle/>
-          <a:p>
-            <a:pPr indent="0" marL="0">
-              <a:buNone/>
-            </a:pPr>
-            <a:r>
-              <a:rPr lang="en-US" sz="1150" dirty="0">
-                <a:solidFill>
-                  <a:srgbClr val="111827"/>
-                </a:solidFill>
-                <a:latin typeface="Noto Sans Mono CJK SC" pitchFamily="34" charset="0"/>
-                <a:ea typeface="Noto Sans Mono CJK SC" pitchFamily="34" charset="-122"/>
-                <a:cs typeface="Noto Sans Mono CJK SC" pitchFamily="34" charset="-120"/>
-              </a:rPr>
-              <a:t>Subject 提取规则</a:t>
-            </a:r>
-            <a:endParaRPr lang="en-US" sz="1150" dirty="0"/>
-          </a:p>
-          <a:p>
-            <a:pPr indent="0" marL="0">
-              <a:buNone/>
-            </a:pPr>
-            <a:r>
-              <a:rPr lang="en-US" sz="1150" dirty="0">
-                <a:solidFill>
-                  <a:srgbClr val="111827"/>
-                </a:solidFill>
-                <a:latin typeface="Noto Sans Mono CJK SC" pitchFamily="34" charset="0"/>
-                <a:ea typeface="Noto Sans Mono CJK SC" pitchFamily="34" charset="-122"/>
-                <a:cs typeface="Noto Sans Mono CJK SC" pitchFamily="34" charset="-120"/>
-              </a:rPr>
-              <a:t>OULU-NPU: 1_1_01_1_frame00000 → 01</a:t>
-            </a:r>
-            <a:endParaRPr lang="en-US" sz="1150" dirty="0"/>
-          </a:p>
-          <a:p>
-            <a:pPr indent="0" marL="0">
-              <a:buNone/>
-            </a:pPr>
-            <a:r>
-              <a:rPr lang="en-US" sz="1150" dirty="0">
-                <a:solidFill>
-                  <a:srgbClr val="111827"/>
-                </a:solidFill>
-                <a:latin typeface="Noto Sans Mono CJK SC" pitchFamily="34" charset="0"/>
-                <a:ea typeface="Noto Sans Mono CJK SC" pitchFamily="34" charset="-122"/>
-                <a:cs typeface="Noto Sans Mono CJK SC" pitchFamily="34" charset="-120"/>
-              </a:rPr>
-              <a:t>MSU-MFSD: real_client026_... → client026</a:t>
-            </a:r>
-            <a:endParaRPr lang="en-US" sz="1150" dirty="0"/>
-          </a:p>
-          <a:p>
-            <a:pPr indent="0" marL="0">
-              <a:buNone/>
-            </a:pPr>
-            <a:r>
-              <a:rPr lang="en-US" sz="1150" dirty="0">
-                <a:solidFill>
-                  <a:srgbClr val="111827"/>
-                </a:solidFill>
-                <a:latin typeface="Noto Sans Mono CJK SC" pitchFamily="34" charset="0"/>
-                <a:ea typeface="Noto Sans Mono CJK SC" pitchFamily="34" charset="-122"/>
-                <a:cs typeface="Noto Sans Mono CJK SC" pitchFamily="34" charset="-120"/>
-              </a:rPr>
-              <a:t>Replay:   client030_session... → client030</a:t>
-            </a:r>
-            <a:endParaRPr lang="en-US" sz="1150" dirty="0"/>
-          </a:p>
-          <a:p>
-            <a:pPr indent="0" marL="0">
-              <a:buNone/>
-            </a:pPr>
-            <a:r>
-              <a:rPr lang="en-US" sz="1150" dirty="0">
-                <a:solidFill>
-                  <a:srgbClr val="111827"/>
-                </a:solidFill>
-                <a:latin typeface="Noto Sans Mono CJK SC" pitchFamily="34" charset="0"/>
-                <a:ea typeface="Noto Sans Mono CJK SC" pitchFamily="34" charset="-122"/>
-                <a:cs typeface="Noto Sans Mono CJK SC" pitchFamily="34" charset="-120"/>
-              </a:rPr>
-              <a:t>CASIA:    train/test 前缀 + 人物编号</a:t>
-            </a:r>
-            <a:endParaRPr lang="en-US" sz="1150" dirty="0"/>
-          </a:p>
-        </p:txBody>
-      </p:sp>
-      <p:sp>
-        <p:nvSpPr>
-          <p:cNvPr id="6" name="Text 4"/>
-          <p:cNvSpPr/>
-          <p:nvPr/>
-        </p:nvSpPr>
-        <p:spPr>
-          <a:xfrm>
-            <a:off x="6400800" y="1234440"/>
-            <a:ext cx="5120640" cy="1920240"/>
+          <a:bodyPr wrap="square" lIns="1397" tIns="1397" rIns="1397" bIns="1397" rtlCol="0" anchor="ctr">
+            <a:normAutofit/>
+          </a:bodyPr>
+          <a:lstStyle/>
+          <a:p>
+            <a:pPr indent="0" marL="0">
+              <a:buNone/>
+            </a:pPr>
+            <a:r>
+              <a:rPr lang="en-US" sz="1230" dirty="0">
+                <a:solidFill>
+                  <a:srgbClr val="111827"/>
+                </a:solidFill>
+                <a:latin typeface="Noto Sans Mono CJK JP" pitchFamily="34" charset="0"/>
+                <a:ea typeface="Noto Sans Mono CJK JP" pitchFamily="34" charset="-122"/>
+                <a:cs typeface="Noto Sans Mono CJK JP" pitchFamily="34" charset="-120"/>
+              </a:rPr>
+              <a:t>ProcessedData 审计结论</a:t>
+            </a:r>
+            <a:endParaRPr lang="en-US" sz="1230" dirty="0"/>
+          </a:p>
+          <a:p>
+            <a:pPr indent="0" marL="0">
+              <a:buNone/>
+            </a:pPr>
+            <a:r>
+              <a:rPr lang="en-US" sz="1230" dirty="0">
+                <a:solidFill>
+                  <a:srgbClr val="111827"/>
+                </a:solidFill>
+                <a:latin typeface="Noto Sans Mono CJK JP" pitchFamily="34" charset="0"/>
+                <a:ea typeface="Noto Sans Mono CJK JP" pitchFamily="34" charset="-122"/>
+                <a:cs typeface="Noto Sans Mono CJK JP" pitchFamily="34" charset="-120"/>
+              </a:rPr>
+              <a:t>总图像数：104,533</a:t>
+            </a:r>
+            <a:endParaRPr lang="en-US" sz="1230" dirty="0"/>
+          </a:p>
+          <a:p>
+            <a:pPr indent="0" marL="0">
+              <a:buNone/>
+            </a:pPr>
+            <a:r>
+              <a:rPr lang="en-US" sz="1230" dirty="0">
+                <a:solidFill>
+                  <a:srgbClr val="111827"/>
+                </a:solidFill>
+                <a:latin typeface="Noto Sans Mono CJK JP" pitchFamily="34" charset="0"/>
+                <a:ea typeface="Noto Sans Mono CJK JP" pitchFamily="34" charset="-122"/>
+                <a:cs typeface="Noto Sans Mono CJK JP" pitchFamily="34" charset="-120"/>
+              </a:rPr>
+              <a:t>无法读取：0</a:t>
+            </a:r>
+            <a:endParaRPr lang="en-US" sz="1230" dirty="0"/>
+          </a:p>
+          <a:p>
+            <a:pPr indent="0" marL="0">
+              <a:buNone/>
+            </a:pPr>
+            <a:r>
+              <a:rPr lang="en-US" sz="1230" dirty="0">
+                <a:solidFill>
+                  <a:srgbClr val="111827"/>
+                </a:solidFill>
+                <a:latin typeface="Noto Sans Mono CJK JP" pitchFamily="34" charset="0"/>
+                <a:ea typeface="Noto Sans Mono CJK JP" pitchFamily="34" charset="-122"/>
+                <a:cs typeface="Noto Sans Mono CJK JP" pitchFamily="34" charset="-120"/>
+              </a:rPr>
+              <a:t>无法推断标签：0</a:t>
+            </a:r>
+            <a:endParaRPr lang="en-US" sz="1230" dirty="0"/>
+          </a:p>
+          <a:p>
+            <a:pPr indent="0" marL="0">
+              <a:buNone/>
+            </a:pPr>
+            <a:r>
+              <a:rPr lang="en-US" sz="1230" dirty="0">
+                <a:solidFill>
+                  <a:srgbClr val="111827"/>
+                </a:solidFill>
+                <a:latin typeface="Noto Sans Mono CJK JP" pitchFamily="34" charset="0"/>
+                <a:ea typeface="Noto Sans Mono CJK JP" pitchFamily="34" charset="-122"/>
+                <a:cs typeface="Noto Sans Mono CJK JP" pitchFamily="34" charset="-120"/>
+              </a:rPr>
+              <a:t>异常小图：0</a:t>
+            </a:r>
+            <a:endParaRPr lang="en-US" sz="1230" dirty="0"/>
+          </a:p>
+          <a:p>
+            <a:pPr indent="0" marL="0">
+              <a:buNone/>
+            </a:pPr>
+            <a:r>
+              <a:rPr lang="en-US" sz="1230" dirty="0">
+                <a:solidFill>
+                  <a:srgbClr val="111827"/>
+                </a:solidFill>
+                <a:latin typeface="Noto Sans Mono CJK JP" pitchFamily="34" charset="0"/>
+                <a:ea typeface="Noto Sans Mono CJK JP" pitchFamily="34" charset="-122"/>
+                <a:cs typeface="Noto Sans Mono CJK JP" pitchFamily="34" charset="-120"/>
+              </a:rPr>
+              <a:t>统一分辨率：256×256</a:t>
+            </a:r>
+            <a:endParaRPr lang="en-US" sz="1230" dirty="0"/>
+          </a:p>
+          <a:p>
+            <a:pPr indent="0" marL="0">
+              <a:buNone/>
+            </a:pPr>
+            <a:r>
+              <a:rPr lang="en-US" sz="1230" dirty="0">
+                <a:solidFill>
+                  <a:srgbClr val="111827"/>
+                </a:solidFill>
+                <a:latin typeface="Noto Sans Mono CJK JP" pitchFamily="34" charset="0"/>
+                <a:ea typeface="Noto Sans Mono CJK JP" pitchFamily="34" charset="-122"/>
+                <a:cs typeface="Noto Sans Mono CJK JP" pitchFamily="34" charset="-120"/>
+              </a:rPr>
+              <a:t>frame 命名比例：100%</a:t>
+            </a:r>
+            <a:endParaRPr lang="en-US" sz="1230" dirty="0"/>
+          </a:p>
+          <a:p>
+            <a:pPr indent="0" marL="0">
+              <a:buNone/>
+            </a:pPr>
+            <a:r>
+              <a:rPr lang="en-US" sz="1230" dirty="0">
+                <a:solidFill>
+                  <a:srgbClr val="111827"/>
+                </a:solidFill>
+                <a:latin typeface="Noto Sans Mono CJK JP" pitchFamily="34" charset="0"/>
+                <a:ea typeface="Noto Sans Mono CJK JP" pitchFamily="34" charset="-122"/>
+                <a:cs typeface="Noto Sans Mono CJK JP" pitchFamily="34" charset="-120"/>
+              </a:rPr>
+              <a:t>Group 数：55 / 50 / 35 / 50</a:t>
+            </a:r>
+            <a:endParaRPr lang="en-US" sz="1230" dirty="0"/>
+          </a:p>
+        </p:txBody>
+      </p:sp>
+      <p:sp>
+        <p:nvSpPr>
+          <p:cNvPr id="6" name="Text 3"/>
+          <p:cNvSpPr/>
+          <p:nvPr/>
+        </p:nvSpPr>
+        <p:spPr>
+          <a:xfrm>
+            <a:off x="822960" y="4617720"/>
+            <a:ext cx="10561320" cy="685800"/>
           </a:xfrm>
           <a:prstGeom prst="rect">
             <a:avLst/>
@@ -5948,142 +6426,34 @@
           </a:bodyPr>
           <a:lstStyle/>
           <a:p>
-            <a:r>
-              <a:rPr lang="en-US" sz="1400" dirty="0">
-                <a:solidFill>
-                  <a:srgbClr val="111827"/>
-                </a:solidFill>
-                <a:latin typeface="Noto Sans CJK SC" pitchFamily="34" charset="0"/>
-                <a:ea typeface="Noto Sans CJK SC" pitchFamily="34" charset="-122"/>
-                <a:cs typeface="Noto Sans CJK SC" pitchFamily="34" charset="-120"/>
-              </a:rPr>
-              <a:t>不做帧级随机划分，避免相邻帧同时进入训练和测试。
-</a:t>
-            </a:r>
-            <a:endParaRPr lang="en-US" sz="1400" dirty="0"/>
-          </a:p>
-          <a:p>
-            <a:r>
-              <a:rPr lang="en-US" sz="1400" dirty="0">
-                <a:solidFill>
-                  <a:srgbClr val="111827"/>
-                </a:solidFill>
-                <a:latin typeface="Noto Sans CJK SC" pitchFamily="34" charset="0"/>
-                <a:ea typeface="Noto Sans CJK SC" pitchFamily="34" charset="-122"/>
-                <a:cs typeface="Noto Sans CJK SC" pitchFamily="34" charset="-120"/>
-              </a:rPr>
-              <a:t>同一 Subject 的所有视频和帧只能属于一个集合。
-</a:t>
-            </a:r>
-            <a:endParaRPr lang="en-US" sz="1400" dirty="0"/>
-          </a:p>
-          <a:p>
-            <a:r>
-              <a:rPr lang="en-US" sz="1400" dirty="0">
-                <a:solidFill>
-                  <a:srgbClr val="111827"/>
-                </a:solidFill>
-                <a:latin typeface="Noto Sans CJK SC" pitchFamily="34" charset="0"/>
-                <a:ea typeface="Noto Sans CJK SC" pitchFamily="34" charset="-122"/>
-                <a:cs typeface="Noto Sans CJK SC" pitchFamily="34" charset="-120"/>
-              </a:rPr>
-              <a:t>自定义 Subject-disjoint 70/15/15，不声称遵循官方 Protocol。</a:t>
-            </a:r>
-            <a:endParaRPr lang="en-US" sz="1400" dirty="0"/>
-          </a:p>
-        </p:txBody>
-      </p:sp>
-      <p:sp>
-        <p:nvSpPr>
-          <p:cNvPr id="7" name="Text 5"/>
-          <p:cNvSpPr/>
-          <p:nvPr/>
-        </p:nvSpPr>
-        <p:spPr>
-          <a:xfrm>
-            <a:off x="6492240" y="3886200"/>
-            <a:ext cx="4572000" cy="960120"/>
-          </a:xfrm>
-          <a:prstGeom prst="rect">
-            <a:avLst/>
-          </a:prstGeom>
-          <a:solidFill>
-            <a:srgbClr val="FFFFFF"/>
-          </a:solidFill>
-          <a:ln w="6350">
-            <a:solidFill>
-              <a:srgbClr val="C9D6E3"/>
-            </a:solidFill>
-          </a:ln>
-        </p:spPr>
-        <p:txBody>
-          <a:bodyPr wrap="square" lIns="1270" tIns="1270" rIns="1270" bIns="1270" rtlCol="0" anchor="ctr">
-            <a:normAutofit/>
-          </a:bodyPr>
-          <a:lstStyle/>
-          <a:p>
-            <a:pPr indent="0" marL="0">
-              <a:buNone/>
-            </a:pPr>
-            <a:r>
-              <a:rPr lang="en-US" sz="1250" dirty="0">
-                <a:solidFill>
-                  <a:srgbClr val="111827"/>
-                </a:solidFill>
-                <a:latin typeface="Noto Sans Mono CJK SC" pitchFamily="34" charset="0"/>
-                <a:ea typeface="Noto Sans Mono CJK SC" pitchFamily="34" charset="-122"/>
-                <a:cs typeface="Noto Sans Mono CJK SC" pitchFamily="34" charset="-120"/>
-              </a:rPr>
-              <a:t>Train Subjects ∩ Val Subjects  = ∅</a:t>
-            </a:r>
-            <a:endParaRPr lang="en-US" sz="1250" dirty="0"/>
-          </a:p>
-          <a:p>
-            <a:pPr indent="0" marL="0">
-              <a:buNone/>
-            </a:pPr>
-            <a:r>
-              <a:rPr lang="en-US" sz="1250" dirty="0">
-                <a:solidFill>
-                  <a:srgbClr val="111827"/>
-                </a:solidFill>
-                <a:latin typeface="Noto Sans Mono CJK SC" pitchFamily="34" charset="0"/>
-                <a:ea typeface="Noto Sans Mono CJK SC" pitchFamily="34" charset="-122"/>
-                <a:cs typeface="Noto Sans Mono CJK SC" pitchFamily="34" charset="-120"/>
-              </a:rPr>
-              <a:t>Train Subjects ∩ Test Subjects = ∅</a:t>
-            </a:r>
-            <a:endParaRPr lang="en-US" sz="1250" dirty="0"/>
-          </a:p>
-          <a:p>
-            <a:pPr indent="0" marL="0">
-              <a:buNone/>
-            </a:pPr>
-            <a:r>
-              <a:rPr lang="en-US" sz="1250" dirty="0">
-                <a:solidFill>
-                  <a:srgbClr val="111827"/>
-                </a:solidFill>
-                <a:latin typeface="Noto Sans Mono CJK SC" pitchFamily="34" charset="0"/>
-                <a:ea typeface="Noto Sans Mono CJK SC" pitchFamily="34" charset="-122"/>
-                <a:cs typeface="Noto Sans Mono CJK SC" pitchFamily="34" charset="-120"/>
-              </a:rPr>
-              <a:t>Val Subjects   ∩ Test Subjects = ∅</a:t>
-            </a:r>
-            <a:endParaRPr lang="en-US" sz="1250" dirty="0"/>
-          </a:p>
-        </p:txBody>
-      </p:sp>
-      <p:sp>
-        <p:nvSpPr>
-          <p:cNvPr id="8" name="Text 6"/>
+            <a:pPr algn="ctr" indent="0" marL="0">
+              <a:buNone/>
+            </a:pPr>
+            <a:r>
+              <a:rPr lang="en-US" sz="1360" b="1" dirty="0">
+                <a:solidFill>
+                  <a:srgbClr val="111827"/>
+                </a:solidFill>
+                <a:latin typeface="Noto Sans CJK JP" pitchFamily="34" charset="0"/>
+                <a:ea typeface="Noto Sans CJK JP" pitchFamily="34" charset="-122"/>
+                <a:cs typeface="Noto Sans CJK JP" pitchFamily="34" charset="-120"/>
+              </a:rPr>
+              <a:t>边界说明：当前仓库从已完成抽帧和人脸区域预处理的 ProcessedData 开始；原始抽帧 FPS、Face Detector 型号和 bbox 扩展比例未保留，因此报告不作推断性描述。</a:t>
+            </a:r>
+            <a:endParaRPr lang="en-US" sz="1360" dirty="0"/>
+          </a:p>
+        </p:txBody>
+      </p:sp>
+      <p:sp>
+        <p:nvSpPr>
+          <p:cNvPr id="7" name="Text 4"/>
           <p:cNvSpPr/>
           <p:nvPr/>
         </p:nvSpPr>
         <p:spPr>
           <a:xfrm>
             <a:off x="10424160" y="6565392"/>
-            <a:ext cx="1280160" cy="137160"/>
+            <a:ext cx="1325880" cy="155448"/>
           </a:xfrm>
           <a:prstGeom prst="rect">
             <a:avLst/>
@@ -6105,11 +6475,11 @@
                 <a:solidFill>
                   <a:srgbClr val="4B5563"/>
                 </a:solidFill>
-                <a:latin typeface="Noto Sans CJK SC" pitchFamily="34" charset="0"/>
-                <a:ea typeface="Noto Sans CJK SC" pitchFamily="34" charset="-122"/>
-                <a:cs typeface="Noto Sans CJK SC" pitchFamily="34" charset="-120"/>
-              </a:rPr>
-              <a:t>FAS 实验答辩  ·  3</a:t>
+                <a:latin typeface="Noto Sans CJK JP" pitchFamily="34" charset="0"/>
+                <a:ea typeface="Noto Sans CJK JP" pitchFamily="34" charset="-122"/>
+                <a:cs typeface="Noto Sans CJK JP" pitchFamily="34" charset="-120"/>
+              </a:rPr>
+              <a:t>FAS 最终答辩 · 3</a:t>
             </a:r>
             <a:endParaRPr lang="en-US" sz="750" dirty="0"/>
           </a:p>
@@ -6155,8 +6525,8 @@
         </p:nvSpPr>
         <p:spPr>
           <a:xfrm>
-            <a:off x="502920" y="310896"/>
-            <a:ext cx="11064240" cy="384048"/>
+            <a:off x="502920" y="274320"/>
+            <a:ext cx="11155680" cy="438912"/>
           </a:xfrm>
           <a:prstGeom prst="rect">
             <a:avLst/>
@@ -6165,24 +6535,26 @@
           <a:ln/>
         </p:spPr>
         <p:txBody>
-          <a:bodyPr wrap="square" lIns="0" tIns="0" rIns="0" bIns="0" rtlCol="0" anchor="ctr"/>
-          <a:lstStyle/>
-          <a:p>
-            <a:pPr indent="0" marL="0">
-              <a:buNone/>
-            </a:pPr>
-            <a:r>
-              <a:rPr lang="en-US" sz="2300" b="1" dirty="0">
+          <a:bodyPr wrap="square" lIns="0" tIns="0" rIns="0" bIns="0" rtlCol="0" anchor="ctr">
+            <a:normAutofit/>
+          </a:bodyPr>
+          <a:lstStyle/>
+          <a:p>
+            <a:pPr indent="0" marL="0">
+              <a:buNone/>
+            </a:pPr>
+            <a:r>
+              <a:rPr lang="en-US" sz="2400" b="1" dirty="0">
                 <a:solidFill>
                   <a:srgbClr val="1F4E79"/>
                 </a:solidFill>
-                <a:latin typeface="Noto Sans CJK SC" pitchFamily="34" charset="0"/>
-                <a:ea typeface="Noto Sans CJK SC" pitchFamily="34" charset="-122"/>
-                <a:cs typeface="Noto Sans CJK SC" pitchFamily="34" charset="-120"/>
-              </a:rPr>
-              <a:t>第一周：同域 Baseline 跑通</a:t>
-            </a:r>
-            <a:endParaRPr lang="en-US" sz="2300" dirty="0"/>
+                <a:latin typeface="Noto Sans CJK JP" pitchFamily="34" charset="0"/>
+                <a:ea typeface="Noto Sans CJK JP" pitchFamily="34" charset="-122"/>
+                <a:cs typeface="Noto Sans CJK JP" pitchFamily="34" charset="-120"/>
+              </a:rPr>
+              <a:t>数据划分与防泄漏协议</a:t>
+            </a:r>
+            <a:endParaRPr lang="en-US" sz="2400" dirty="0"/>
           </a:p>
         </p:txBody>
       </p:sp>
@@ -6204,24 +6576,26 @@
           <a:ln/>
         </p:spPr>
         <p:txBody>
-          <a:bodyPr wrap="square" lIns="0" tIns="0" rIns="0" bIns="0" rtlCol="0" anchor="ctr"/>
-          <a:lstStyle/>
-          <a:p>
-            <a:pPr indent="0" marL="0">
-              <a:buNone/>
-            </a:pPr>
-            <a:r>
-              <a:rPr lang="en-US" sz="950" dirty="0">
+          <a:bodyPr wrap="square" lIns="0" tIns="0" rIns="0" bIns="0" rtlCol="0" anchor="ctr">
+            <a:normAutofit/>
+          </a:bodyPr>
+          <a:lstStyle/>
+          <a:p>
+            <a:pPr indent="0" marL="0">
+              <a:buNone/>
+            </a:pPr>
+            <a:r>
+              <a:rPr lang="en-US" sz="1000" dirty="0">
                 <a:solidFill>
                   <a:srgbClr val="4B5563"/>
                 </a:solidFill>
-                <a:latin typeface="Noto Sans CJK SC" pitchFamily="34" charset="0"/>
-                <a:ea typeface="Noto Sans CJK SC" pitchFamily="34" charset="-122"/>
-                <a:cs typeface="Noto Sans CJK SC" pitchFamily="34" charset="-120"/>
-              </a:rPr>
-              <a:t>OULU-NPU → ResNet18 → OULU-NPU Test</a:t>
-            </a:r>
-            <a:endParaRPr lang="en-US" sz="950" dirty="0"/>
+                <a:latin typeface="Noto Sans CJK JP" pitchFamily="34" charset="0"/>
+                <a:ea typeface="Noto Sans CJK JP" pitchFamily="34" charset="-122"/>
+                <a:cs typeface="Noto Sans CJK JP" pitchFamily="34" charset="-120"/>
+              </a:rPr>
+              <a:t>Subject-disjoint 是实验可信性的前提</a:t>
+            </a:r>
+            <a:endParaRPr lang="en-US" sz="1000" dirty="0"/>
           </a:p>
         </p:txBody>
       </p:sp>
@@ -6233,336 +6607,8 @@
         </p:nvSpPr>
         <p:spPr>
           <a:xfrm>
-            <a:off x="822960" y="1325880"/>
-            <a:ext cx="2286000" cy="201168"/>
-          </a:xfrm>
-          <a:prstGeom prst="rect">
-            <a:avLst/>
-          </a:prstGeom>
-          <a:noFill/>
-          <a:ln/>
-        </p:spPr>
-        <p:txBody>
-          <a:bodyPr wrap="square" lIns="635" tIns="635" rIns="635" bIns="635" rtlCol="0" anchor="ctr">
-            <a:normAutofit/>
-          </a:bodyPr>
-          <a:lstStyle/>
-          <a:p>
-            <a:pPr algn="ctr" indent="0" marL="0">
-              <a:buNone/>
-            </a:pPr>
-            <a:r>
-              <a:rPr lang="en-US" sz="880" dirty="0">
-                <a:solidFill>
-                  <a:srgbClr val="4B5563"/>
-                </a:solidFill>
-                <a:latin typeface="Noto Sans CJK SC" pitchFamily="34" charset="0"/>
-                <a:ea typeface="Noto Sans CJK SC" pitchFamily="34" charset="-122"/>
-                <a:cs typeface="Noto Sans CJK SC" pitchFamily="34" charset="-120"/>
-              </a:rPr>
-              <a:t>Accuracy</a:t>
-            </a:r>
-            <a:endParaRPr lang="en-US" sz="880" dirty="0"/>
-          </a:p>
-        </p:txBody>
-      </p:sp>
-      <p:sp>
-        <p:nvSpPr>
-          <p:cNvPr id="5" name="Text 3"/>
-          <p:cNvSpPr/>
-          <p:nvPr/>
-        </p:nvSpPr>
-        <p:spPr>
-          <a:xfrm>
-            <a:off x="822960" y="1545336"/>
-            <a:ext cx="2286000" cy="384048"/>
-          </a:xfrm>
-          <a:prstGeom prst="rect">
-            <a:avLst/>
-          </a:prstGeom>
-          <a:noFill/>
-          <a:ln/>
-        </p:spPr>
-        <p:txBody>
-          <a:bodyPr wrap="square" lIns="635" tIns="635" rIns="635" bIns="635" rtlCol="0" anchor="ctr">
-            <a:normAutofit/>
-          </a:bodyPr>
-          <a:lstStyle/>
-          <a:p>
-            <a:pPr algn="ctr" indent="0" marL="0">
-              <a:buNone/>
-            </a:pPr>
-            <a:r>
-              <a:rPr lang="en-US" sz="1900" b="1" dirty="0">
-                <a:solidFill>
-                  <a:srgbClr val="1F4E79"/>
-                </a:solidFill>
-                <a:latin typeface="Noto Sans CJK SC" pitchFamily="34" charset="0"/>
-                <a:ea typeface="Noto Sans CJK SC" pitchFamily="34" charset="-122"/>
-                <a:cs typeface="Noto Sans CJK SC" pitchFamily="34" charset="-120"/>
-              </a:rPr>
-              <a:t>99.8161%</a:t>
-            </a:r>
-            <a:endParaRPr lang="en-US" sz="1900" dirty="0"/>
-          </a:p>
-        </p:txBody>
-      </p:sp>
-      <p:sp>
-        <p:nvSpPr>
-          <p:cNvPr id="6" name="Text 4"/>
-          <p:cNvSpPr/>
-          <p:nvPr/>
-        </p:nvSpPr>
-        <p:spPr>
-          <a:xfrm>
-            <a:off x="3337560" y="1325880"/>
-            <a:ext cx="2286000" cy="201168"/>
-          </a:xfrm>
-          <a:prstGeom prst="rect">
-            <a:avLst/>
-          </a:prstGeom>
-          <a:noFill/>
-          <a:ln/>
-        </p:spPr>
-        <p:txBody>
-          <a:bodyPr wrap="square" lIns="635" tIns="635" rIns="635" bIns="635" rtlCol="0" anchor="ctr">
-            <a:normAutofit/>
-          </a:bodyPr>
-          <a:lstStyle/>
-          <a:p>
-            <a:pPr algn="ctr" indent="0" marL="0">
-              <a:buNone/>
-            </a:pPr>
-            <a:r>
-              <a:rPr lang="en-US" sz="880" dirty="0">
-                <a:solidFill>
-                  <a:srgbClr val="4B5563"/>
-                </a:solidFill>
-                <a:latin typeface="Noto Sans CJK SC" pitchFamily="34" charset="0"/>
-                <a:ea typeface="Noto Sans CJK SC" pitchFamily="34" charset="-122"/>
-                <a:cs typeface="Noto Sans CJK SC" pitchFamily="34" charset="-120"/>
-              </a:rPr>
-              <a:t>AUC</a:t>
-            </a:r>
-            <a:endParaRPr lang="en-US" sz="880" dirty="0"/>
-          </a:p>
-        </p:txBody>
-      </p:sp>
-      <p:sp>
-        <p:nvSpPr>
-          <p:cNvPr id="7" name="Text 5"/>
-          <p:cNvSpPr/>
-          <p:nvPr/>
-        </p:nvSpPr>
-        <p:spPr>
-          <a:xfrm>
-            <a:off x="3337560" y="1545336"/>
-            <a:ext cx="2286000" cy="384048"/>
-          </a:xfrm>
-          <a:prstGeom prst="rect">
-            <a:avLst/>
-          </a:prstGeom>
-          <a:noFill/>
-          <a:ln/>
-        </p:spPr>
-        <p:txBody>
-          <a:bodyPr wrap="square" lIns="635" tIns="635" rIns="635" bIns="635" rtlCol="0" anchor="ctr">
-            <a:normAutofit/>
-          </a:bodyPr>
-          <a:lstStyle/>
-          <a:p>
-            <a:pPr algn="ctr" indent="0" marL="0">
-              <a:buNone/>
-            </a:pPr>
-            <a:r>
-              <a:rPr lang="en-US" sz="1900" b="1" dirty="0">
-                <a:solidFill>
-                  <a:srgbClr val="078080"/>
-                </a:solidFill>
-                <a:latin typeface="Noto Sans CJK SC" pitchFamily="34" charset="0"/>
-                <a:ea typeface="Noto Sans CJK SC" pitchFamily="34" charset="-122"/>
-                <a:cs typeface="Noto Sans CJK SC" pitchFamily="34" charset="-120"/>
-              </a:rPr>
-              <a:t>99.9999%</a:t>
-            </a:r>
-            <a:endParaRPr lang="en-US" sz="1900" dirty="0"/>
-          </a:p>
-        </p:txBody>
-      </p:sp>
-      <p:sp>
-        <p:nvSpPr>
-          <p:cNvPr id="8" name="Text 6"/>
-          <p:cNvSpPr/>
-          <p:nvPr/>
-        </p:nvSpPr>
-        <p:spPr>
-          <a:xfrm>
-            <a:off x="5852160" y="1325880"/>
-            <a:ext cx="2103120" cy="201168"/>
-          </a:xfrm>
-          <a:prstGeom prst="rect">
-            <a:avLst/>
-          </a:prstGeom>
-          <a:noFill/>
-          <a:ln/>
-        </p:spPr>
-        <p:txBody>
-          <a:bodyPr wrap="square" lIns="635" tIns="635" rIns="635" bIns="635" rtlCol="0" anchor="ctr">
-            <a:normAutofit/>
-          </a:bodyPr>
-          <a:lstStyle/>
-          <a:p>
-            <a:pPr algn="ctr" indent="0" marL="0">
-              <a:buNone/>
-            </a:pPr>
-            <a:r>
-              <a:rPr lang="en-US" sz="880" dirty="0">
-                <a:solidFill>
-                  <a:srgbClr val="4B5563"/>
-                </a:solidFill>
-                <a:latin typeface="Noto Sans CJK SC" pitchFamily="34" charset="0"/>
-                <a:ea typeface="Noto Sans CJK SC" pitchFamily="34" charset="-122"/>
-                <a:cs typeface="Noto Sans CJK SC" pitchFamily="34" charset="-120"/>
-              </a:rPr>
-              <a:t>EER</a:t>
-            </a:r>
-            <a:endParaRPr lang="en-US" sz="880" dirty="0"/>
-          </a:p>
-        </p:txBody>
-      </p:sp>
-      <p:sp>
-        <p:nvSpPr>
-          <p:cNvPr id="9" name="Text 7"/>
-          <p:cNvSpPr/>
-          <p:nvPr/>
-        </p:nvSpPr>
-        <p:spPr>
-          <a:xfrm>
-            <a:off x="5852160" y="1545336"/>
-            <a:ext cx="2103120" cy="384048"/>
-          </a:xfrm>
-          <a:prstGeom prst="rect">
-            <a:avLst/>
-          </a:prstGeom>
-          <a:noFill/>
-          <a:ln/>
-        </p:spPr>
-        <p:txBody>
-          <a:bodyPr wrap="square" lIns="635" tIns="635" rIns="635" bIns="635" rtlCol="0" anchor="ctr">
-            <a:normAutofit/>
-          </a:bodyPr>
-          <a:lstStyle/>
-          <a:p>
-            <a:pPr algn="ctr" indent="0" marL="0">
-              <a:buNone/>
-            </a:pPr>
-            <a:r>
-              <a:rPr lang="en-US" sz="1900" b="1" dirty="0">
-                <a:solidFill>
-                  <a:srgbClr val="B86B00"/>
-                </a:solidFill>
-                <a:latin typeface="Noto Sans CJK SC" pitchFamily="34" charset="0"/>
-                <a:ea typeface="Noto Sans CJK SC" pitchFamily="34" charset="-122"/>
-                <a:cs typeface="Noto Sans CJK SC" pitchFamily="34" charset="-120"/>
-              </a:rPr>
-              <a:t>0.0526%</a:t>
-            </a:r>
-            <a:endParaRPr lang="en-US" sz="1900" dirty="0"/>
-          </a:p>
-        </p:txBody>
-      </p:sp>
-      <p:sp>
-        <p:nvSpPr>
-          <p:cNvPr id="10" name="Text 8"/>
-          <p:cNvSpPr/>
-          <p:nvPr/>
-        </p:nvSpPr>
-        <p:spPr>
-          <a:xfrm>
-            <a:off x="8229600" y="1325880"/>
-            <a:ext cx="1645920" cy="201168"/>
-          </a:xfrm>
-          <a:prstGeom prst="rect">
-            <a:avLst/>
-          </a:prstGeom>
-          <a:noFill/>
-          <a:ln/>
-        </p:spPr>
-        <p:txBody>
-          <a:bodyPr wrap="square" lIns="635" tIns="635" rIns="635" bIns="635" rtlCol="0" anchor="ctr">
-            <a:normAutofit/>
-          </a:bodyPr>
-          <a:lstStyle/>
-          <a:p>
-            <a:pPr algn="ctr" indent="0" marL="0">
-              <a:buNone/>
-            </a:pPr>
-            <a:r>
-              <a:rPr lang="en-US" sz="880" dirty="0">
-                <a:solidFill>
-                  <a:srgbClr val="4B5563"/>
-                </a:solidFill>
-                <a:latin typeface="Noto Sans CJK SC" pitchFamily="34" charset="0"/>
-                <a:ea typeface="Noto Sans CJK SC" pitchFamily="34" charset="-122"/>
-                <a:cs typeface="Noto Sans CJK SC" pitchFamily="34" charset="-120"/>
-              </a:rPr>
-              <a:t>错误样本</a:t>
-            </a:r>
-            <a:endParaRPr lang="en-US" sz="880" dirty="0"/>
-          </a:p>
-        </p:txBody>
-      </p:sp>
-      <p:sp>
-        <p:nvSpPr>
-          <p:cNvPr id="11" name="Text 9"/>
-          <p:cNvSpPr/>
-          <p:nvPr/>
-        </p:nvSpPr>
-        <p:spPr>
-          <a:xfrm>
-            <a:off x="8229600" y="1545336"/>
-            <a:ext cx="1645920" cy="384048"/>
-          </a:xfrm>
-          <a:prstGeom prst="rect">
-            <a:avLst/>
-          </a:prstGeom>
-          <a:noFill/>
-          <a:ln/>
-        </p:spPr>
-        <p:txBody>
-          <a:bodyPr wrap="square" lIns="635" tIns="635" rIns="635" bIns="635" rtlCol="0" anchor="ctr">
-            <a:normAutofit/>
-          </a:bodyPr>
-          <a:lstStyle/>
-          <a:p>
-            <a:pPr algn="ctr" indent="0" marL="0">
-              <a:buNone/>
-            </a:pPr>
-            <a:r>
-              <a:rPr lang="en-US" sz="1900" b="1" dirty="0">
-                <a:solidFill>
-                  <a:srgbClr val="1F4E79"/>
-                </a:solidFill>
-                <a:latin typeface="Noto Sans CJK SC" pitchFamily="34" charset="0"/>
-                <a:ea typeface="Noto Sans CJK SC" pitchFamily="34" charset="-122"/>
-                <a:cs typeface="Noto Sans CJK SC" pitchFamily="34" charset="-120"/>
-              </a:rPr>
-              <a:t>21</a:t>
-            </a:r>
-            <a:endParaRPr lang="en-US" sz="1900" dirty="0"/>
-          </a:p>
-        </p:txBody>
-      </p:sp>
-      <p:sp>
-        <p:nvSpPr>
-          <p:cNvPr id="12" name="Text 10"/>
-          <p:cNvSpPr/>
-          <p:nvPr/>
-        </p:nvSpPr>
-        <p:spPr>
-          <a:xfrm>
-            <a:off x="1051560" y="2788920"/>
-            <a:ext cx="4937760" cy="1554480"/>
+            <a:off x="685800" y="1143000"/>
+            <a:ext cx="5394960" cy="2240280"/>
           </a:xfrm>
           <a:prstGeom prst="rect">
             <a:avLst/>
@@ -6577,90 +6623,245 @@
           </a:ln>
         </p:spPr>
         <p:txBody>
-          <a:bodyPr wrap="square" lIns="1270" tIns="1270" rIns="1270" bIns="1270" rtlCol="0" anchor="ctr">
-            <a:normAutofit/>
-          </a:bodyPr>
-          <a:lstStyle/>
-          <a:p>
-            <a:pPr indent="0" marL="0">
-              <a:buNone/>
-            </a:pPr>
-            <a:r>
-              <a:rPr lang="en-US" sz="1350" dirty="0">
-                <a:solidFill>
-                  <a:srgbClr val="111827"/>
-                </a:solidFill>
-                <a:latin typeface="Noto Sans Mono CJK SC" pitchFamily="34" charset="0"/>
-                <a:ea typeface="Noto Sans Mono CJK SC" pitchFamily="34" charset="-122"/>
-                <a:cs typeface="Noto Sans Mono CJK SC" pitchFamily="34" charset="-120"/>
-              </a:rPr>
-              <a:t>混淆矩阵</a:t>
-            </a:r>
-            <a:endParaRPr lang="en-US" sz="1350" dirty="0"/>
-          </a:p>
-          <a:p>
-            <a:pPr indent="0" marL="0">
-              <a:buNone/>
-            </a:pPr>
-            <a:r>
-              <a:rPr lang="en-US" sz="1350" dirty="0">
-                <a:solidFill>
-                  <a:srgbClr val="111827"/>
-                </a:solidFill>
-                <a:latin typeface="Noto Sans Mono CJK SC" pitchFamily="34" charset="0"/>
-                <a:ea typeface="Noto Sans Mono CJK SC" pitchFamily="34" charset="-122"/>
-                <a:cs typeface="Noto Sans Mono CJK SC" pitchFamily="34" charset="-120"/>
-              </a:rPr>
-              <a:t>             Pred Spoof   Pred Live</a:t>
-            </a:r>
-            <a:endParaRPr lang="en-US" sz="1350" dirty="0"/>
-          </a:p>
-          <a:p>
-            <a:pPr indent="0" marL="0">
-              <a:buNone/>
-            </a:pPr>
-            <a:r>
-              <a:rPr lang="en-US" sz="1350" dirty="0">
-                <a:solidFill>
-                  <a:srgbClr val="111827"/>
-                </a:solidFill>
-                <a:latin typeface="Noto Sans Mono CJK SC" pitchFamily="34" charset="0"/>
-                <a:ea typeface="Noto Sans Mono CJK SC" pitchFamily="34" charset="-122"/>
-                <a:cs typeface="Noto Sans Mono CJK SC" pitchFamily="34" charset="-120"/>
-              </a:rPr>
-              <a:t>True Spoof      7609          21</a:t>
-            </a:r>
-            <a:endParaRPr lang="en-US" sz="1350" dirty="0"/>
-          </a:p>
-          <a:p>
-            <a:pPr indent="0" marL="0">
-              <a:buNone/>
-            </a:pPr>
-            <a:r>
-              <a:rPr lang="en-US" sz="1350" dirty="0">
-                <a:solidFill>
-                  <a:srgbClr val="111827"/>
-                </a:solidFill>
-                <a:latin typeface="Noto Sans Mono CJK SC" pitchFamily="34" charset="0"/>
-                <a:ea typeface="Noto Sans Mono CJK SC" pitchFamily="34" charset="-122"/>
-                <a:cs typeface="Noto Sans Mono CJK SC" pitchFamily="34" charset="-120"/>
-              </a:rPr>
-              <a:t>True Live          0        3787</a:t>
-            </a:r>
-            <a:endParaRPr lang="en-US" sz="1350" dirty="0"/>
-          </a:p>
-        </p:txBody>
-      </p:sp>
-      <p:sp>
-        <p:nvSpPr>
-          <p:cNvPr id="13" name="Text 11"/>
-          <p:cNvSpPr/>
-          <p:nvPr/>
-        </p:nvSpPr>
-        <p:spPr>
-          <a:xfrm>
-            <a:off x="6400800" y="2788920"/>
-            <a:ext cx="4937760" cy="1737360"/>
+          <a:bodyPr wrap="square" lIns="1397" tIns="1397" rIns="1397" bIns="1397" rtlCol="0" anchor="ctr">
+            <a:normAutofit/>
+          </a:bodyPr>
+          <a:lstStyle/>
+          <a:p>
+            <a:pPr indent="0" marL="0">
+              <a:buNone/>
+            </a:pPr>
+            <a:r>
+              <a:rPr lang="en-US" sz="1150" dirty="0">
+                <a:solidFill>
+                  <a:srgbClr val="111827"/>
+                </a:solidFill>
+                <a:latin typeface="Noto Sans Mono CJK JP" pitchFamily="34" charset="0"/>
+                <a:ea typeface="Noto Sans Mono CJK JP" pitchFamily="34" charset="-122"/>
+                <a:cs typeface="Noto Sans Mono CJK JP" pitchFamily="34" charset="-120"/>
+              </a:rPr>
+              <a:t>Subject 提取规则</a:t>
+            </a:r>
+            <a:endParaRPr lang="en-US" sz="1150" dirty="0"/>
+          </a:p>
+          <a:p>
+            <a:pPr indent="0" marL="0">
+              <a:buNone/>
+            </a:pPr>
+            <a:r>
+              <a:rPr lang="en-US" sz="1150" dirty="0">
+                <a:solidFill>
+                  <a:srgbClr val="111827"/>
+                </a:solidFill>
+                <a:latin typeface="Noto Sans Mono CJK JP" pitchFamily="34" charset="0"/>
+                <a:ea typeface="Noto Sans Mono CJK JP" pitchFamily="34" charset="-122"/>
+                <a:cs typeface="Noto Sans Mono CJK JP" pitchFamily="34" charset="-120"/>
+              </a:rPr>
+              <a:t>OULU-NPU: 1_1_01_1_frame00000 → 01</a:t>
+            </a:r>
+            <a:endParaRPr lang="en-US" sz="1150" dirty="0"/>
+          </a:p>
+          <a:p>
+            <a:pPr indent="0" marL="0">
+              <a:buNone/>
+            </a:pPr>
+            <a:r>
+              <a:rPr lang="en-US" sz="1150" dirty="0">
+                <a:solidFill>
+                  <a:srgbClr val="111827"/>
+                </a:solidFill>
+                <a:latin typeface="Noto Sans Mono CJK JP" pitchFamily="34" charset="0"/>
+                <a:ea typeface="Noto Sans Mono CJK JP" pitchFamily="34" charset="-122"/>
+                <a:cs typeface="Noto Sans Mono CJK JP" pitchFamily="34" charset="-120"/>
+              </a:rPr>
+              <a:t>MSU-MFSD: real_client026_... → client026</a:t>
+            </a:r>
+            <a:endParaRPr lang="en-US" sz="1150" dirty="0"/>
+          </a:p>
+          <a:p>
+            <a:pPr indent="0" marL="0">
+              <a:buNone/>
+            </a:pPr>
+            <a:r>
+              <a:rPr lang="en-US" sz="1150" dirty="0">
+                <a:solidFill>
+                  <a:srgbClr val="111827"/>
+                </a:solidFill>
+                <a:latin typeface="Noto Sans Mono CJK JP" pitchFamily="34" charset="0"/>
+                <a:ea typeface="Noto Sans Mono CJK JP" pitchFamily="34" charset="-122"/>
+                <a:cs typeface="Noto Sans Mono CJK JP" pitchFamily="34" charset="-120"/>
+              </a:rPr>
+              <a:t>Replay:   client030_session... → client030</a:t>
+            </a:r>
+            <a:endParaRPr lang="en-US" sz="1150" dirty="0"/>
+          </a:p>
+          <a:p>
+            <a:pPr indent="0" marL="0">
+              <a:buNone/>
+            </a:pPr>
+            <a:r>
+              <a:rPr lang="en-US" sz="1150" dirty="0">
+                <a:solidFill>
+                  <a:srgbClr val="111827"/>
+                </a:solidFill>
+                <a:latin typeface="Noto Sans Mono CJK JP" pitchFamily="34" charset="0"/>
+                <a:ea typeface="Noto Sans Mono CJK JP" pitchFamily="34" charset="-122"/>
+                <a:cs typeface="Noto Sans Mono CJK JP" pitchFamily="34" charset="-120"/>
+              </a:rPr>
+              <a:t>CASIA:    train/test 前缀 + 人物编号</a:t>
+            </a:r>
+            <a:endParaRPr lang="en-US" sz="1150" dirty="0"/>
+          </a:p>
+        </p:txBody>
+      </p:sp>
+      <p:sp>
+        <p:nvSpPr>
+          <p:cNvPr id="5" name="Text 3"/>
+          <p:cNvSpPr/>
+          <p:nvPr/>
+        </p:nvSpPr>
+        <p:spPr>
+          <a:xfrm>
+            <a:off x="685800" y="3840480"/>
+            <a:ext cx="5394960" cy="1600200"/>
+          </a:xfrm>
+          <a:prstGeom prst="rect">
+            <a:avLst/>
+          </a:prstGeom>
+          <a:solidFill>
+            <a:srgbClr val="FFFFFF"/>
+          </a:solidFill>
+          <a:ln w="6350">
+            <a:solidFill>
+              <a:srgbClr val="C9D6E3"/>
+            </a:solidFill>
+          </a:ln>
+        </p:spPr>
+        <p:txBody>
+          <a:bodyPr wrap="square" lIns="1397" tIns="1397" rIns="1397" bIns="1397" rtlCol="0" anchor="ctr">
+            <a:normAutofit/>
+          </a:bodyPr>
+          <a:lstStyle/>
+          <a:p>
+            <a:pPr indent="0" marL="0">
+              <a:buNone/>
+            </a:pPr>
+            <a:r>
+              <a:rPr lang="en-US" sz="1200" dirty="0">
+                <a:solidFill>
+                  <a:srgbClr val="111827"/>
+                </a:solidFill>
+                <a:latin typeface="Noto Sans Mono CJK JP" pitchFamily="34" charset="0"/>
+                <a:ea typeface="Noto Sans Mono CJK JP" pitchFamily="34" charset="-122"/>
+                <a:cs typeface="Noto Sans Mono CJK JP" pitchFamily="34" charset="-120"/>
+              </a:rPr>
+              <a:t>严格约束</a:t>
+            </a:r>
+            <a:endParaRPr lang="en-US" sz="1200" dirty="0"/>
+          </a:p>
+          <a:p>
+            <a:pPr indent="0" marL="0">
+              <a:buNone/>
+            </a:pPr>
+            <a:r>
+              <a:rPr lang="en-US" sz="1200" dirty="0">
+                <a:solidFill>
+                  <a:srgbClr val="111827"/>
+                </a:solidFill>
+                <a:latin typeface="Noto Sans Mono CJK JP" pitchFamily="34" charset="0"/>
+                <a:ea typeface="Noto Sans Mono CJK JP" pitchFamily="34" charset="-122"/>
+                <a:cs typeface="Noto Sans Mono CJK JP" pitchFamily="34" charset="-120"/>
+              </a:rPr>
+              <a:t>Train Subjects ∩ Val Subjects  = ∅</a:t>
+            </a:r>
+            <a:endParaRPr lang="en-US" sz="1200" dirty="0"/>
+          </a:p>
+          <a:p>
+            <a:pPr indent="0" marL="0">
+              <a:buNone/>
+            </a:pPr>
+            <a:r>
+              <a:rPr lang="en-US" sz="1200" dirty="0">
+                <a:solidFill>
+                  <a:srgbClr val="111827"/>
+                </a:solidFill>
+                <a:latin typeface="Noto Sans Mono CJK JP" pitchFamily="34" charset="0"/>
+                <a:ea typeface="Noto Sans Mono CJK JP" pitchFamily="34" charset="-122"/>
+                <a:cs typeface="Noto Sans Mono CJK JP" pitchFamily="34" charset="-120"/>
+              </a:rPr>
+              <a:t>Train Subjects ∩ Test Subjects = ∅</a:t>
+            </a:r>
+            <a:endParaRPr lang="en-US" sz="1200" dirty="0"/>
+          </a:p>
+          <a:p>
+            <a:pPr indent="0" marL="0">
+              <a:buNone/>
+            </a:pPr>
+            <a:r>
+              <a:rPr lang="en-US" sz="1200" dirty="0">
+                <a:solidFill>
+                  <a:srgbClr val="111827"/>
+                </a:solidFill>
+                <a:latin typeface="Noto Sans Mono CJK JP" pitchFamily="34" charset="0"/>
+                <a:ea typeface="Noto Sans Mono CJK JP" pitchFamily="34" charset="-122"/>
+                <a:cs typeface="Noto Sans Mono CJK JP" pitchFamily="34" charset="-120"/>
+              </a:rPr>
+              <a:t>Val Subjects   ∩ Test Subjects = ∅</a:t>
+            </a:r>
+            <a:endParaRPr lang="en-US" sz="1200" dirty="0"/>
+          </a:p>
+          <a:p>
+            <a:pPr indent="0" marL="0">
+              <a:buNone/>
+            </a:pPr>
+            <a:endParaRPr lang="en-US" sz="1200" dirty="0"/>
+          </a:p>
+          <a:p>
+            <a:pPr indent="0" marL="0">
+              <a:buNone/>
+            </a:pPr>
+            <a:r>
+              <a:rPr lang="en-US" sz="1200" dirty="0">
+                <a:solidFill>
+                  <a:srgbClr val="111827"/>
+                </a:solidFill>
+                <a:latin typeface="Noto Sans Mono CJK JP" pitchFamily="34" charset="0"/>
+                <a:ea typeface="Noto Sans Mono CJK JP" pitchFamily="34" charset="-122"/>
+                <a:cs typeface="Noto Sans Mono CJK JP" pitchFamily="34" charset="-120"/>
+              </a:rPr>
+              <a:t>自定义划分：70 / 15 / 15</a:t>
+            </a:r>
+            <a:endParaRPr lang="en-US" sz="1200" dirty="0"/>
+          </a:p>
+          <a:p>
+            <a:pPr indent="0" marL="0">
+              <a:buNone/>
+            </a:pPr>
+            <a:r>
+              <a:rPr lang="en-US" sz="1200" dirty="0">
+                <a:solidFill>
+                  <a:srgbClr val="111827"/>
+                </a:solidFill>
+                <a:latin typeface="Noto Sans Mono CJK JP" pitchFamily="34" charset="0"/>
+                <a:ea typeface="Noto Sans Mono CJK JP" pitchFamily="34" charset="-122"/>
+                <a:cs typeface="Noto Sans Mono CJK JP" pitchFamily="34" charset="-120"/>
+              </a:rPr>
+              <a:t>不声称官方 Protocol</a:t>
+            </a:r>
+            <a:endParaRPr lang="en-US" sz="1200" dirty="0"/>
+          </a:p>
+        </p:txBody>
+      </p:sp>
+      <p:sp>
+        <p:nvSpPr>
+          <p:cNvPr id="6" name="Text 4"/>
+          <p:cNvSpPr/>
+          <p:nvPr/>
+        </p:nvSpPr>
+        <p:spPr>
+          <a:xfrm>
+            <a:off x="6629400" y="1417320"/>
+            <a:ext cx="4800600" cy="2194560"/>
           </a:xfrm>
           <a:prstGeom prst="rect">
             <a:avLst/>
@@ -6675,60 +6876,60 @@
           <a:lstStyle/>
           <a:p>
             <a:r>
-              <a:rPr lang="en-US" sz="1400" dirty="0">
-                <a:solidFill>
-                  <a:srgbClr val="111827"/>
-                </a:solidFill>
-                <a:latin typeface="Noto Sans CJK SC" pitchFamily="34" charset="0"/>
-                <a:ea typeface="Noto Sans CJK SC" pitchFamily="34" charset="-122"/>
-                <a:cs typeface="Noto Sans CJK SC" pitchFamily="34" charset="-120"/>
-              </a:rPr>
-              <a:t>第一周目标是建立可靠 Baseline，不是方法创新。
+              <a:rPr lang="en-US" sz="1450" dirty="0">
+                <a:solidFill>
+                  <a:srgbClr val="111827"/>
+                </a:solidFill>
+                <a:latin typeface="Noto Sans CJK JP" pitchFamily="34" charset="0"/>
+                <a:ea typeface="Noto Sans CJK JP" pitchFamily="34" charset="-122"/>
+                <a:cs typeface="Noto Sans CJK JP" pitchFamily="34" charset="-120"/>
+              </a:rPr>
+              <a:t>避免“先抽帧后按图片随机划分”导致相邻帧泄漏。
 </a:t>
             </a:r>
-            <a:endParaRPr lang="en-US" sz="1400" dirty="0"/>
-          </a:p>
-          <a:p>
-            <a:r>
-              <a:rPr lang="en-US" sz="1400" dirty="0">
-                <a:solidFill>
-                  <a:srgbClr val="111827"/>
-                </a:solidFill>
-                <a:latin typeface="Noto Sans CJK SC" pitchFamily="34" charset="0"/>
-                <a:ea typeface="Noto Sans CJK SC" pitchFamily="34" charset="-122"/>
-                <a:cs typeface="Noto Sans CJK SC" pitchFamily="34" charset="-120"/>
-              </a:rPr>
-              <a:t>Subject-disjoint 后仍取得极高同域性能。
+            <a:endParaRPr lang="en-US" sz="1450" dirty="0"/>
+          </a:p>
+          <a:p>
+            <a:r>
+              <a:rPr lang="en-US" sz="1450" dirty="0">
+                <a:solidFill>
+                  <a:srgbClr val="111827"/>
+                </a:solidFill>
+                <a:latin typeface="Noto Sans CJK JP" pitchFamily="34" charset="0"/>
+                <a:ea typeface="Noto Sans CJK JP" pitchFamily="34" charset="-122"/>
+                <a:cs typeface="Noto Sans CJK JP" pitchFamily="34" charset="-120"/>
+              </a:rPr>
+              <a:t>同一 Subject 的所有视频和帧只能属于一个集合。
 </a:t>
             </a:r>
-            <a:endParaRPr lang="en-US" sz="1400" dirty="0"/>
-          </a:p>
-          <a:p>
-            <a:r>
-              <a:rPr lang="en-US" sz="1400" dirty="0">
-                <a:solidFill>
-                  <a:srgbClr val="111827"/>
-                </a:solidFill>
-                <a:latin typeface="Noto Sans CJK SC" pitchFamily="34" charset="0"/>
-                <a:ea typeface="Noto Sans CJK SC" pitchFamily="34" charset="-122"/>
-                <a:cs typeface="Noto Sans CJK SC" pitchFamily="34" charset="-120"/>
-              </a:rPr>
-              <a:t>该结果不能直接说明模型具备跨数据集泛化能力。</a:t>
-            </a:r>
-            <a:endParaRPr lang="en-US" sz="1400" dirty="0"/>
-          </a:p>
-        </p:txBody>
-      </p:sp>
-      <p:sp>
-        <p:nvSpPr>
-          <p:cNvPr id="14" name="Text 12"/>
+            <a:endParaRPr lang="en-US" sz="1450" dirty="0"/>
+          </a:p>
+          <a:p>
+            <a:r>
+              <a:rPr lang="en-US" sz="1450" dirty="0">
+                <a:solidFill>
+                  <a:srgbClr val="111827"/>
+                </a:solidFill>
+                <a:latin typeface="Noto Sans CJK JP" pitchFamily="34" charset="0"/>
+                <a:ea typeface="Noto Sans CJK JP" pitchFamily="34" charset="-122"/>
+                <a:cs typeface="Noto Sans CJK JP" pitchFamily="34" charset="-120"/>
+              </a:rPr>
+              <a:t>该协议比单纯 Video-disjoint 更严格，适合当前课程实验。</a:t>
+            </a:r>
+            <a:endParaRPr lang="en-US" sz="1450" dirty="0"/>
+          </a:p>
+        </p:txBody>
+      </p:sp>
+      <p:sp>
+        <p:nvSpPr>
+          <p:cNvPr id="7" name="Text 5"/>
           <p:cNvSpPr/>
           <p:nvPr/>
         </p:nvSpPr>
         <p:spPr>
           <a:xfrm>
             <a:off x="10424160" y="6565392"/>
-            <a:ext cx="1280160" cy="137160"/>
+            <a:ext cx="1325880" cy="155448"/>
           </a:xfrm>
           <a:prstGeom prst="rect">
             <a:avLst/>
@@ -6750,11 +6951,11 @@
                 <a:solidFill>
                   <a:srgbClr val="4B5563"/>
                 </a:solidFill>
-                <a:latin typeface="Noto Sans CJK SC" pitchFamily="34" charset="0"/>
-                <a:ea typeface="Noto Sans CJK SC" pitchFamily="34" charset="-122"/>
-                <a:cs typeface="Noto Sans CJK SC" pitchFamily="34" charset="-120"/>
-              </a:rPr>
-              <a:t>FAS 实验答辩  ·  4</a:t>
+                <a:latin typeface="Noto Sans CJK JP" pitchFamily="34" charset="0"/>
+                <a:ea typeface="Noto Sans CJK JP" pitchFamily="34" charset="-122"/>
+                <a:cs typeface="Noto Sans CJK JP" pitchFamily="34" charset="-120"/>
+              </a:rPr>
+              <a:t>FAS 最终答辩 · 4</a:t>
             </a:r>
             <a:endParaRPr lang="en-US" sz="750" dirty="0"/>
           </a:p>
@@ -6800,8 +7001,8 @@
         </p:nvSpPr>
         <p:spPr>
           <a:xfrm>
-            <a:off x="502920" y="310896"/>
-            <a:ext cx="11064240" cy="384048"/>
+            <a:off x="502920" y="274320"/>
+            <a:ext cx="11155680" cy="438912"/>
           </a:xfrm>
           <a:prstGeom prst="rect">
             <a:avLst/>
@@ -6810,24 +7011,26 @@
           <a:ln/>
         </p:spPr>
         <p:txBody>
-          <a:bodyPr wrap="square" lIns="0" tIns="0" rIns="0" bIns="0" rtlCol="0" anchor="ctr"/>
-          <a:lstStyle/>
-          <a:p>
-            <a:pPr indent="0" marL="0">
-              <a:buNone/>
-            </a:pPr>
-            <a:r>
-              <a:rPr lang="en-US" sz="2300" b="1" dirty="0">
+          <a:bodyPr wrap="square" lIns="0" tIns="0" rIns="0" bIns="0" rtlCol="0" anchor="ctr">
+            <a:normAutofit/>
+          </a:bodyPr>
+          <a:lstStyle/>
+          <a:p>
+            <a:pPr indent="0" marL="0">
+              <a:buNone/>
+            </a:pPr>
+            <a:r>
+              <a:rPr lang="en-US" sz="2400" b="1" dirty="0">
                 <a:solidFill>
                   <a:srgbClr val="1F4E79"/>
                 </a:solidFill>
-                <a:latin typeface="Noto Sans CJK SC" pitchFamily="34" charset="0"/>
-                <a:ea typeface="Noto Sans CJK SC" pitchFamily="34" charset="-122"/>
-                <a:cs typeface="Noto Sans CJK SC" pitchFamily="34" charset="-120"/>
-              </a:rPr>
-              <a:t>第二周：跨数据集性能显著下降</a:t>
-            </a:r>
-            <a:endParaRPr lang="en-US" sz="2300" dirty="0"/>
+                <a:latin typeface="Noto Sans CJK JP" pitchFamily="34" charset="0"/>
+                <a:ea typeface="Noto Sans CJK JP" pitchFamily="34" charset="-122"/>
+                <a:cs typeface="Noto Sans CJK JP" pitchFamily="34" charset="-120"/>
+              </a:rPr>
+              <a:t>第一周：OULU-NPU 同域 Baseline</a:t>
+            </a:r>
+            <a:endParaRPr lang="en-US" sz="2400" dirty="0"/>
           </a:p>
         </p:txBody>
       </p:sp>
@@ -6849,61 +7052,367 @@
           <a:ln/>
         </p:spPr>
         <p:txBody>
-          <a:bodyPr wrap="square" lIns="0" tIns="0" rIns="0" bIns="0" rtlCol="0" anchor="ctr"/>
-          <a:lstStyle/>
-          <a:p>
-            <a:pPr indent="0" marL="0">
-              <a:buNone/>
-            </a:pPr>
-            <a:r>
-              <a:rPr lang="en-US" sz="950" dirty="0">
+          <a:bodyPr wrap="square" lIns="0" tIns="0" rIns="0" bIns="0" rtlCol="0" anchor="ctr">
+            <a:normAutofit/>
+          </a:bodyPr>
+          <a:lstStyle/>
+          <a:p>
+            <a:pPr indent="0" marL="0">
+              <a:buNone/>
+            </a:pPr>
+            <a:r>
+              <a:rPr lang="en-US" sz="1000" dirty="0">
                 <a:solidFill>
                   <a:srgbClr val="4B5563"/>
                 </a:solidFill>
-                <a:latin typeface="Noto Sans CJK SC" pitchFamily="34" charset="0"/>
-                <a:ea typeface="Noto Sans CJK SC" pitchFamily="34" charset="-122"/>
-                <a:cs typeface="Noto Sans CJK SC" pitchFamily="34" charset="-120"/>
-              </a:rPr>
-              <a:t>固定 OULU 模型，目标域仅测试</a:t>
-            </a:r>
-            <a:endParaRPr lang="en-US" sz="950" dirty="0"/>
-          </a:p>
-        </p:txBody>
-      </p:sp>
-      <p:pic>
-        <p:nvPicPr>
-          <p:cNvPr id="4" name="Image 0" descr="/mnt/data/fas_artifacts/charts/week2_domain_shift.png">    </p:cNvPr>
-          <p:cNvPicPr>
-            <a:picLocks noChangeAspect="1"/>
-          </p:cNvPicPr>
-          <p:nvPr/>
-        </p:nvPicPr>
-        <p:blipFill>
-          <a:blip r:embed="rId1"/>
-          <a:stretch>
-            <a:fillRect/>
-          </a:stretch>
-        </p:blipFill>
-        <p:spPr>
-          <a:xfrm>
-            <a:off x="594360" y="1143000"/>
-            <a:ext cx="5486400" cy="3017520"/>
-          </a:xfrm>
-          <a:prstGeom prst="rect">
-            <a:avLst/>
-          </a:prstGeom>
-        </p:spPr>
-      </p:pic>
-      <p:sp>
-        <p:nvSpPr>
-          <p:cNvPr id="5" name="Text 2"/>
-          <p:cNvSpPr/>
-          <p:nvPr/>
-        </p:nvSpPr>
-        <p:spPr>
-          <a:xfrm>
-            <a:off x="6400800" y="1234440"/>
-            <a:ext cx="5257800" cy="2148840"/>
+                <a:latin typeface="Noto Sans CJK JP" pitchFamily="34" charset="0"/>
+                <a:ea typeface="Noto Sans CJK JP" pitchFamily="34" charset="-122"/>
+                <a:cs typeface="Noto Sans CJK JP" pitchFamily="34" charset="-120"/>
+              </a:rPr>
+              <a:t>ResNet18 + Subject-disjoint 测试</a:t>
+            </a:r>
+            <a:endParaRPr lang="en-US" sz="1000" dirty="0"/>
+          </a:p>
+        </p:txBody>
+      </p:sp>
+      <p:sp>
+        <p:nvSpPr>
+          <p:cNvPr id="4" name="Text 2"/>
+          <p:cNvSpPr/>
+          <p:nvPr/>
+        </p:nvSpPr>
+        <p:spPr>
+          <a:xfrm>
+            <a:off x="777240" y="1234440"/>
+            <a:ext cx="2194560" cy="201168"/>
+          </a:xfrm>
+          <a:prstGeom prst="rect">
+            <a:avLst/>
+          </a:prstGeom>
+          <a:noFill/>
+          <a:ln/>
+        </p:spPr>
+        <p:txBody>
+          <a:bodyPr wrap="square" lIns="635" tIns="635" rIns="635" bIns="635" rtlCol="0" anchor="ctr">
+            <a:normAutofit/>
+          </a:bodyPr>
+          <a:lstStyle/>
+          <a:p>
+            <a:pPr algn="ctr" indent="0" marL="0">
+              <a:buNone/>
+            </a:pPr>
+            <a:r>
+              <a:rPr lang="en-US" sz="850" dirty="0">
+                <a:solidFill>
+                  <a:srgbClr val="4B5563"/>
+                </a:solidFill>
+                <a:latin typeface="Noto Sans CJK JP" pitchFamily="34" charset="0"/>
+                <a:ea typeface="Noto Sans CJK JP" pitchFamily="34" charset="-122"/>
+                <a:cs typeface="Noto Sans CJK JP" pitchFamily="34" charset="-120"/>
+              </a:rPr>
+              <a:t>Accuracy</a:t>
+            </a:r>
+            <a:endParaRPr lang="en-US" sz="850" dirty="0"/>
+          </a:p>
+        </p:txBody>
+      </p:sp>
+      <p:sp>
+        <p:nvSpPr>
+          <p:cNvPr id="5" name="Text 3"/>
+          <p:cNvSpPr/>
+          <p:nvPr/>
+        </p:nvSpPr>
+        <p:spPr>
+          <a:xfrm>
+            <a:off x="777240" y="1444752"/>
+            <a:ext cx="2194560" cy="420624"/>
+          </a:xfrm>
+          <a:prstGeom prst="rect">
+            <a:avLst/>
+          </a:prstGeom>
+          <a:noFill/>
+          <a:ln/>
+        </p:spPr>
+        <p:txBody>
+          <a:bodyPr wrap="square" lIns="635" tIns="635" rIns="635" bIns="635" rtlCol="0" anchor="ctr">
+            <a:normAutofit/>
+          </a:bodyPr>
+          <a:lstStyle/>
+          <a:p>
+            <a:pPr algn="ctr" indent="0" marL="0">
+              <a:buNone/>
+            </a:pPr>
+            <a:r>
+              <a:rPr lang="en-US" sz="1900" b="1" dirty="0">
+                <a:solidFill>
+                  <a:srgbClr val="1F4E79"/>
+                </a:solidFill>
+                <a:latin typeface="Noto Sans CJK JP" pitchFamily="34" charset="0"/>
+                <a:ea typeface="Noto Sans CJK JP" pitchFamily="34" charset="-122"/>
+                <a:cs typeface="Noto Sans CJK JP" pitchFamily="34" charset="-120"/>
+              </a:rPr>
+              <a:t>99.8161%</a:t>
+            </a:r>
+            <a:endParaRPr lang="en-US" sz="1900" dirty="0"/>
+          </a:p>
+        </p:txBody>
+      </p:sp>
+      <p:sp>
+        <p:nvSpPr>
+          <p:cNvPr id="6" name="Text 4"/>
+          <p:cNvSpPr/>
+          <p:nvPr/>
+        </p:nvSpPr>
+        <p:spPr>
+          <a:xfrm>
+            <a:off x="3200400" y="1234440"/>
+            <a:ext cx="2103120" cy="201168"/>
+          </a:xfrm>
+          <a:prstGeom prst="rect">
+            <a:avLst/>
+          </a:prstGeom>
+          <a:noFill/>
+          <a:ln/>
+        </p:spPr>
+        <p:txBody>
+          <a:bodyPr wrap="square" lIns="635" tIns="635" rIns="635" bIns="635" rtlCol="0" anchor="ctr">
+            <a:normAutofit/>
+          </a:bodyPr>
+          <a:lstStyle/>
+          <a:p>
+            <a:pPr algn="ctr" indent="0" marL="0">
+              <a:buNone/>
+            </a:pPr>
+            <a:r>
+              <a:rPr lang="en-US" sz="850" dirty="0">
+                <a:solidFill>
+                  <a:srgbClr val="4B5563"/>
+                </a:solidFill>
+                <a:latin typeface="Noto Sans CJK JP" pitchFamily="34" charset="0"/>
+                <a:ea typeface="Noto Sans CJK JP" pitchFamily="34" charset="-122"/>
+                <a:cs typeface="Noto Sans CJK JP" pitchFamily="34" charset="-120"/>
+              </a:rPr>
+              <a:t>AUC</a:t>
+            </a:r>
+            <a:endParaRPr lang="en-US" sz="850" dirty="0"/>
+          </a:p>
+        </p:txBody>
+      </p:sp>
+      <p:sp>
+        <p:nvSpPr>
+          <p:cNvPr id="7" name="Text 5"/>
+          <p:cNvSpPr/>
+          <p:nvPr/>
+        </p:nvSpPr>
+        <p:spPr>
+          <a:xfrm>
+            <a:off x="3200400" y="1444752"/>
+            <a:ext cx="2103120" cy="420624"/>
+          </a:xfrm>
+          <a:prstGeom prst="rect">
+            <a:avLst/>
+          </a:prstGeom>
+          <a:noFill/>
+          <a:ln/>
+        </p:spPr>
+        <p:txBody>
+          <a:bodyPr wrap="square" lIns="635" tIns="635" rIns="635" bIns="635" rtlCol="0" anchor="ctr">
+            <a:normAutofit/>
+          </a:bodyPr>
+          <a:lstStyle/>
+          <a:p>
+            <a:pPr algn="ctr" indent="0" marL="0">
+              <a:buNone/>
+            </a:pPr>
+            <a:r>
+              <a:rPr lang="en-US" sz="1900" b="1" dirty="0">
+                <a:solidFill>
+                  <a:srgbClr val="078080"/>
+                </a:solidFill>
+                <a:latin typeface="Noto Sans CJK JP" pitchFamily="34" charset="0"/>
+                <a:ea typeface="Noto Sans CJK JP" pitchFamily="34" charset="-122"/>
+                <a:cs typeface="Noto Sans CJK JP" pitchFamily="34" charset="-120"/>
+              </a:rPr>
+              <a:t>99.9999%</a:t>
+            </a:r>
+            <a:endParaRPr lang="en-US" sz="1900" dirty="0"/>
+          </a:p>
+        </p:txBody>
+      </p:sp>
+      <p:sp>
+        <p:nvSpPr>
+          <p:cNvPr id="8" name="Text 6"/>
+          <p:cNvSpPr/>
+          <p:nvPr/>
+        </p:nvSpPr>
+        <p:spPr>
+          <a:xfrm>
+            <a:off x="5532120" y="1234440"/>
+            <a:ext cx="2011680" cy="201168"/>
+          </a:xfrm>
+          <a:prstGeom prst="rect">
+            <a:avLst/>
+          </a:prstGeom>
+          <a:noFill/>
+          <a:ln/>
+        </p:spPr>
+        <p:txBody>
+          <a:bodyPr wrap="square" lIns="635" tIns="635" rIns="635" bIns="635" rtlCol="0" anchor="ctr">
+            <a:normAutofit/>
+          </a:bodyPr>
+          <a:lstStyle/>
+          <a:p>
+            <a:pPr algn="ctr" indent="0" marL="0">
+              <a:buNone/>
+            </a:pPr>
+            <a:r>
+              <a:rPr lang="en-US" sz="850" dirty="0">
+                <a:solidFill>
+                  <a:srgbClr val="4B5563"/>
+                </a:solidFill>
+                <a:latin typeface="Noto Sans CJK JP" pitchFamily="34" charset="0"/>
+                <a:ea typeface="Noto Sans CJK JP" pitchFamily="34" charset="-122"/>
+                <a:cs typeface="Noto Sans CJK JP" pitchFamily="34" charset="-120"/>
+              </a:rPr>
+              <a:t>EER</a:t>
+            </a:r>
+            <a:endParaRPr lang="en-US" sz="850" dirty="0"/>
+          </a:p>
+        </p:txBody>
+      </p:sp>
+      <p:sp>
+        <p:nvSpPr>
+          <p:cNvPr id="9" name="Text 7"/>
+          <p:cNvSpPr/>
+          <p:nvPr/>
+        </p:nvSpPr>
+        <p:spPr>
+          <a:xfrm>
+            <a:off x="5532120" y="1444752"/>
+            <a:ext cx="2011680" cy="420624"/>
+          </a:xfrm>
+          <a:prstGeom prst="rect">
+            <a:avLst/>
+          </a:prstGeom>
+          <a:noFill/>
+          <a:ln/>
+        </p:spPr>
+        <p:txBody>
+          <a:bodyPr wrap="square" lIns="635" tIns="635" rIns="635" bIns="635" rtlCol="0" anchor="ctr">
+            <a:normAutofit/>
+          </a:bodyPr>
+          <a:lstStyle/>
+          <a:p>
+            <a:pPr algn="ctr" indent="0" marL="0">
+              <a:buNone/>
+            </a:pPr>
+            <a:r>
+              <a:rPr lang="en-US" sz="1900" b="1" dirty="0">
+                <a:solidFill>
+                  <a:srgbClr val="B86B00"/>
+                </a:solidFill>
+                <a:latin typeface="Noto Sans CJK JP" pitchFamily="34" charset="0"/>
+                <a:ea typeface="Noto Sans CJK JP" pitchFamily="34" charset="-122"/>
+                <a:cs typeface="Noto Sans CJK JP" pitchFamily="34" charset="-120"/>
+              </a:rPr>
+              <a:t>0.0526%</a:t>
+            </a:r>
+            <a:endParaRPr lang="en-US" sz="1900" dirty="0"/>
+          </a:p>
+        </p:txBody>
+      </p:sp>
+      <p:sp>
+        <p:nvSpPr>
+          <p:cNvPr id="10" name="Text 8"/>
+          <p:cNvSpPr/>
+          <p:nvPr/>
+        </p:nvSpPr>
+        <p:spPr>
+          <a:xfrm>
+            <a:off x="7772400" y="1234440"/>
+            <a:ext cx="1554480" cy="201168"/>
+          </a:xfrm>
+          <a:prstGeom prst="rect">
+            <a:avLst/>
+          </a:prstGeom>
+          <a:noFill/>
+          <a:ln/>
+        </p:spPr>
+        <p:txBody>
+          <a:bodyPr wrap="square" lIns="635" tIns="635" rIns="635" bIns="635" rtlCol="0" anchor="ctr">
+            <a:normAutofit/>
+          </a:bodyPr>
+          <a:lstStyle/>
+          <a:p>
+            <a:pPr algn="ctr" indent="0" marL="0">
+              <a:buNone/>
+            </a:pPr>
+            <a:r>
+              <a:rPr lang="en-US" sz="850" dirty="0">
+                <a:solidFill>
+                  <a:srgbClr val="4B5563"/>
+                </a:solidFill>
+                <a:latin typeface="Noto Sans CJK JP" pitchFamily="34" charset="0"/>
+                <a:ea typeface="Noto Sans CJK JP" pitchFamily="34" charset="-122"/>
+                <a:cs typeface="Noto Sans CJK JP" pitchFamily="34" charset="-120"/>
+              </a:rPr>
+              <a:t>错误样本</a:t>
+            </a:r>
+            <a:endParaRPr lang="en-US" sz="850" dirty="0"/>
+          </a:p>
+        </p:txBody>
+      </p:sp>
+      <p:sp>
+        <p:nvSpPr>
+          <p:cNvPr id="11" name="Text 9"/>
+          <p:cNvSpPr/>
+          <p:nvPr/>
+        </p:nvSpPr>
+        <p:spPr>
+          <a:xfrm>
+            <a:off x="7772400" y="1444752"/>
+            <a:ext cx="1554480" cy="420624"/>
+          </a:xfrm>
+          <a:prstGeom prst="rect">
+            <a:avLst/>
+          </a:prstGeom>
+          <a:noFill/>
+          <a:ln/>
+        </p:spPr>
+        <p:txBody>
+          <a:bodyPr wrap="square" lIns="635" tIns="635" rIns="635" bIns="635" rtlCol="0" anchor="ctr">
+            <a:normAutofit/>
+          </a:bodyPr>
+          <a:lstStyle/>
+          <a:p>
+            <a:pPr algn="ctr" indent="0" marL="0">
+              <a:buNone/>
+            </a:pPr>
+            <a:r>
+              <a:rPr lang="en-US" sz="1900" b="1" dirty="0">
+                <a:solidFill>
+                  <a:srgbClr val="1F4E79"/>
+                </a:solidFill>
+                <a:latin typeface="Noto Sans CJK JP" pitchFamily="34" charset="0"/>
+                <a:ea typeface="Noto Sans CJK JP" pitchFamily="34" charset="-122"/>
+                <a:cs typeface="Noto Sans CJK JP" pitchFamily="34" charset="-120"/>
+              </a:rPr>
+              <a:t>21</a:t>
+            </a:r>
+            <a:endParaRPr lang="en-US" sz="1900" dirty="0"/>
+          </a:p>
+        </p:txBody>
+      </p:sp>
+      <p:sp>
+        <p:nvSpPr>
+          <p:cNvPr id="12" name="Text 10"/>
+          <p:cNvSpPr/>
+          <p:nvPr/>
+        </p:nvSpPr>
+        <p:spPr>
+          <a:xfrm>
+            <a:off x="1005840" y="2743200"/>
+            <a:ext cx="4754880" cy="1234440"/>
           </a:xfrm>
           <a:prstGeom prst="rect">
             <a:avLst/>
@@ -6918,107 +7427,90 @@
           </a:ln>
         </p:spPr>
         <p:txBody>
-          <a:bodyPr wrap="square" lIns="1270" tIns="1270" rIns="1270" bIns="1270" rtlCol="0" anchor="ctr">
-            <a:normAutofit/>
-          </a:bodyPr>
-          <a:lstStyle/>
-          <a:p>
-            <a:pPr indent="0" marL="0">
-              <a:buNone/>
-            </a:pPr>
-            <a:r>
-              <a:rPr lang="en-US" sz="1070" dirty="0">
-                <a:solidFill>
-                  <a:srgbClr val="111827"/>
-                </a:solidFill>
-                <a:latin typeface="Noto Sans Mono CJK SC" pitchFamily="34" charset="0"/>
-                <a:ea typeface="Noto Sans Mono CJK SC" pitchFamily="34" charset="-122"/>
-                <a:cs typeface="Noto Sans Mono CJK SC" pitchFamily="34" charset="-120"/>
-              </a:rPr>
-              <a:t>跨域结果</a:t>
-            </a:r>
-            <a:endParaRPr lang="en-US" sz="1070" dirty="0"/>
-          </a:p>
-          <a:p>
-            <a:pPr indent="0" marL="0">
-              <a:buNone/>
-            </a:pPr>
-            <a:r>
-              <a:rPr lang="en-US" sz="1070" dirty="0">
-                <a:solidFill>
-                  <a:srgbClr val="111827"/>
-                </a:solidFill>
-                <a:latin typeface="Noto Sans Mono CJK SC" pitchFamily="34" charset="0"/>
-                <a:ea typeface="Noto Sans Mono CJK SC" pitchFamily="34" charset="-122"/>
-                <a:cs typeface="Noto Sans Mono CJK SC" pitchFamily="34" charset="-120"/>
-              </a:rPr>
-              <a:t>目标域          Accuracy   AUC       EER</a:t>
-            </a:r>
-            <a:endParaRPr lang="en-US" sz="1070" dirty="0"/>
-          </a:p>
-          <a:p>
-            <a:pPr indent="0" marL="0">
-              <a:buNone/>
-            </a:pPr>
-            <a:r>
-              <a:rPr lang="en-US" sz="1070" dirty="0">
-                <a:solidFill>
-                  <a:srgbClr val="111827"/>
-                </a:solidFill>
-                <a:latin typeface="Noto Sans Mono CJK SC" pitchFamily="34" charset="0"/>
-                <a:ea typeface="Noto Sans Mono CJK SC" pitchFamily="34" charset="-122"/>
-                <a:cs typeface="Noto Sans Mono CJK SC" pitchFamily="34" charset="-120"/>
-              </a:rPr>
-              <a:t>CASIA          28.0648%   23.4007%  69.8964%</a:t>
-            </a:r>
-            <a:endParaRPr lang="en-US" sz="1070" dirty="0"/>
-          </a:p>
-          <a:p>
-            <a:pPr indent="0" marL="0">
-              <a:buNone/>
-            </a:pPr>
-            <a:r>
-              <a:rPr lang="en-US" sz="1070" dirty="0">
-                <a:solidFill>
-                  <a:srgbClr val="111827"/>
-                </a:solidFill>
-                <a:latin typeface="Noto Sans Mono CJK SC" pitchFamily="34" charset="0"/>
-                <a:ea typeface="Noto Sans Mono CJK SC" pitchFamily="34" charset="-122"/>
-                <a:cs typeface="Noto Sans Mono CJK SC" pitchFamily="34" charset="-120"/>
-              </a:rPr>
-              <a:t>MSU-MFSD       60.9356%   64.0805%  41.6813%</a:t>
-            </a:r>
-            <a:endParaRPr lang="en-US" sz="1070" dirty="0"/>
-          </a:p>
-          <a:p>
-            <a:pPr indent="0" marL="0">
-              <a:buNone/>
-            </a:pPr>
-            <a:r>
-              <a:rPr lang="en-US" sz="1070" dirty="0">
-                <a:solidFill>
-                  <a:srgbClr val="111827"/>
-                </a:solidFill>
-                <a:latin typeface="Noto Sans Mono CJK SC" pitchFamily="34" charset="0"/>
-                <a:ea typeface="Noto Sans Mono CJK SC" pitchFamily="34" charset="-122"/>
-                <a:cs typeface="Noto Sans Mono CJK SC" pitchFamily="34" charset="-120"/>
-              </a:rPr>
-              <a:t>Replay-Attack  48.2725%   39.1893%  54.5629%</a:t>
-            </a:r>
-            <a:endParaRPr lang="en-US" sz="1070" dirty="0"/>
-          </a:p>
-        </p:txBody>
-      </p:sp>
-      <p:sp>
-        <p:nvSpPr>
-          <p:cNvPr id="6" name="Text 3"/>
-          <p:cNvSpPr/>
-          <p:nvPr/>
-        </p:nvSpPr>
-        <p:spPr>
-          <a:xfrm>
-            <a:off x="6400800" y="3886200"/>
-            <a:ext cx="5166360" cy="1005840"/>
+          <a:bodyPr wrap="square" lIns="1397" tIns="1397" rIns="1397" bIns="1397" rtlCol="0" anchor="ctr">
+            <a:normAutofit/>
+          </a:bodyPr>
+          <a:lstStyle/>
+          <a:p>
+            <a:pPr indent="0" marL="0">
+              <a:buNone/>
+            </a:pPr>
+            <a:r>
+              <a:rPr lang="en-US" sz="1250" dirty="0">
+                <a:solidFill>
+                  <a:srgbClr val="111827"/>
+                </a:solidFill>
+                <a:latin typeface="Noto Sans Mono CJK JP" pitchFamily="34" charset="0"/>
+                <a:ea typeface="Noto Sans Mono CJK JP" pitchFamily="34" charset="-122"/>
+                <a:cs typeface="Noto Sans Mono CJK JP" pitchFamily="34" charset="-120"/>
+              </a:rPr>
+              <a:t>混淆矩阵</a:t>
+            </a:r>
+            <a:endParaRPr lang="en-US" sz="1250" dirty="0"/>
+          </a:p>
+          <a:p>
+            <a:pPr indent="0" marL="0">
+              <a:buNone/>
+            </a:pPr>
+            <a:r>
+              <a:rPr lang="en-US" sz="1250" dirty="0">
+                <a:solidFill>
+                  <a:srgbClr val="111827"/>
+                </a:solidFill>
+                <a:latin typeface="Noto Sans Mono CJK JP" pitchFamily="34" charset="0"/>
+                <a:ea typeface="Noto Sans Mono CJK JP" pitchFamily="34" charset="-122"/>
+                <a:cs typeface="Noto Sans Mono CJK JP" pitchFamily="34" charset="-120"/>
+              </a:rPr>
+              <a:t>真实类别      预测 Spoof   预测 Live</a:t>
+            </a:r>
+            <a:endParaRPr lang="en-US" sz="1250" dirty="0"/>
+          </a:p>
+          <a:p>
+            <a:pPr indent="0" marL="0">
+              <a:buNone/>
+            </a:pPr>
+            <a:r>
+              <a:rPr lang="en-US" sz="1250" dirty="0">
+                <a:solidFill>
+                  <a:srgbClr val="111827"/>
+                </a:solidFill>
+                <a:latin typeface="Noto Sans Mono CJK JP" pitchFamily="34" charset="0"/>
+                <a:ea typeface="Noto Sans Mono CJK JP" pitchFamily="34" charset="-122"/>
+                <a:cs typeface="Noto Sans Mono CJK JP" pitchFamily="34" charset="-120"/>
+              </a:rPr>
+              <a:t>Spoof          7609          21</a:t>
+            </a:r>
+            <a:endParaRPr lang="en-US" sz="1250" dirty="0"/>
+          </a:p>
+          <a:p>
+            <a:pPr indent="0" marL="0">
+              <a:buNone/>
+            </a:pPr>
+            <a:r>
+              <a:rPr lang="en-US" sz="1250" dirty="0">
+                <a:solidFill>
+                  <a:srgbClr val="111827"/>
+                </a:solidFill>
+                <a:latin typeface="Noto Sans Mono CJK JP" pitchFamily="34" charset="0"/>
+                <a:ea typeface="Noto Sans Mono CJK JP" pitchFamily="34" charset="-122"/>
+                <a:cs typeface="Noto Sans Mono CJK JP" pitchFamily="34" charset="-120"/>
+              </a:rPr>
+              <a:t>Live              0        3787</a:t>
+            </a:r>
+            <a:endParaRPr lang="en-US" sz="1250" dirty="0"/>
+          </a:p>
+        </p:txBody>
+      </p:sp>
+      <p:sp>
+        <p:nvSpPr>
+          <p:cNvPr id="13" name="Text 11"/>
+          <p:cNvSpPr/>
+          <p:nvPr/>
+        </p:nvSpPr>
+        <p:spPr>
+          <a:xfrm>
+            <a:off x="6400800" y="2560320"/>
+            <a:ext cx="5074920" cy="2103120"/>
           </a:xfrm>
           <a:prstGeom prst="rect">
             <a:avLst/>
@@ -7032,34 +7524,61 @@
           </a:bodyPr>
           <a:lstStyle/>
           <a:p>
-            <a:pPr indent="0" marL="0">
-              <a:buNone/>
-            </a:pPr>
-            <a:r>
-              <a:rPr lang="en-US" sz="1350" b="1" dirty="0">
-                <a:solidFill>
-                  <a:srgbClr val="111827"/>
-                </a:solidFill>
-                <a:latin typeface="Noto Sans CJK SC" pitchFamily="34" charset="0"/>
-                <a:ea typeface="Noto Sans CJK SC" pitchFamily="34" charset="-122"/>
-                <a:cs typeface="Noto Sans CJK SC" pitchFamily="34" charset="-120"/>
-              </a:rPr>
-              <a:t>诊断结论：源域内几乎满分，但迁移到未见数据集后 AUC 大幅下降、EER 明显升高，说明模型学习到较强的数据集相关 shortcut。</a:t>
-            </a:r>
-            <a:endParaRPr lang="en-US" sz="1350" dirty="0"/>
-          </a:p>
-        </p:txBody>
-      </p:sp>
-      <p:sp>
-        <p:nvSpPr>
-          <p:cNvPr id="7" name="Text 4"/>
+            <a:r>
+              <a:rPr lang="en-US" sz="1400" dirty="0">
+                <a:solidFill>
+                  <a:srgbClr val="111827"/>
+                </a:solidFill>
+                <a:latin typeface="Noto Sans CJK JP" pitchFamily="34" charset="0"/>
+                <a:ea typeface="Noto Sans CJK JP" pitchFamily="34" charset="-122"/>
+                <a:cs typeface="Noto Sans CJK JP" pitchFamily="34" charset="-120"/>
+              </a:rPr>
+              <a:t>第一周目标：跑通可复现 Baseline，并输出 Accuracy、AUC、EER、ROC 和混淆矩阵。
+</a:t>
+            </a:r>
+            <a:endParaRPr lang="en-US" sz="1400" dirty="0"/>
+          </a:p>
+          <a:p>
+            <a:r>
+              <a:rPr lang="en-US" sz="1400" dirty="0">
+                <a:solidFill>
+                  <a:srgbClr val="111827"/>
+                </a:solidFill>
+                <a:latin typeface="Noto Sans CJK JP" pitchFamily="34" charset="0"/>
+                <a:ea typeface="Noto Sans CJK JP" pitchFamily="34" charset="-122"/>
+                <a:cs typeface="Noto Sans CJK JP" pitchFamily="34" charset="-120"/>
+              </a:rPr>
+              <a:t>同域性能极高，但不能直接证明跨数据集泛化能力。
+</a:t>
+            </a:r>
+            <a:endParaRPr lang="en-US" sz="1400" dirty="0"/>
+          </a:p>
+          <a:p>
+            <a:r>
+              <a:rPr lang="en-US" sz="1400" dirty="0">
+                <a:solidFill>
+                  <a:srgbClr val="111827"/>
+                </a:solidFill>
+                <a:latin typeface="Noto Sans CJK JP" pitchFamily="34" charset="0"/>
+                <a:ea typeface="Noto Sans CJK JP" pitchFamily="34" charset="-122"/>
+                <a:cs typeface="Noto Sans CJK JP" pitchFamily="34" charset="-120"/>
+              </a:rPr>
+              <a:t>该结果为第二周跨域退化分析提供基准。</a:t>
+            </a:r>
+            <a:endParaRPr lang="en-US" sz="1400" dirty="0"/>
+          </a:p>
+        </p:txBody>
+      </p:sp>
+      <p:sp>
+        <p:nvSpPr>
+          <p:cNvPr id="14" name="Text 12"/>
           <p:cNvSpPr/>
           <p:nvPr/>
         </p:nvSpPr>
         <p:spPr>
           <a:xfrm>
             <a:off x="10424160" y="6565392"/>
-            <a:ext cx="1280160" cy="137160"/>
+            <a:ext cx="1325880" cy="155448"/>
           </a:xfrm>
           <a:prstGeom prst="rect">
             <a:avLst/>
@@ -7081,11 +7600,11 @@
                 <a:solidFill>
                   <a:srgbClr val="4B5563"/>
                 </a:solidFill>
-                <a:latin typeface="Noto Sans CJK SC" pitchFamily="34" charset="0"/>
-                <a:ea typeface="Noto Sans CJK SC" pitchFamily="34" charset="-122"/>
-                <a:cs typeface="Noto Sans CJK SC" pitchFamily="34" charset="-120"/>
-              </a:rPr>
-              <a:t>FAS 实验答辩  ·  5</a:t>
+                <a:latin typeface="Noto Sans CJK JP" pitchFamily="34" charset="0"/>
+                <a:ea typeface="Noto Sans CJK JP" pitchFamily="34" charset="-122"/>
+                <a:cs typeface="Noto Sans CJK JP" pitchFamily="34" charset="-120"/>
+              </a:rPr>
+              <a:t>FAS 最终答辩 · 5</a:t>
             </a:r>
             <a:endParaRPr lang="en-US" sz="750" dirty="0"/>
           </a:p>
@@ -7131,8 +7650,8 @@
         </p:nvSpPr>
         <p:spPr>
           <a:xfrm>
-            <a:off x="502920" y="310896"/>
-            <a:ext cx="11064240" cy="384048"/>
+            <a:off x="502920" y="274320"/>
+            <a:ext cx="11155680" cy="438912"/>
           </a:xfrm>
           <a:prstGeom prst="rect">
             <a:avLst/>
@@ -7141,24 +7660,26 @@
           <a:ln/>
         </p:spPr>
         <p:txBody>
-          <a:bodyPr wrap="square" lIns="0" tIns="0" rIns="0" bIns="0" rtlCol="0" anchor="ctr"/>
-          <a:lstStyle/>
-          <a:p>
-            <a:pPr indent="0" marL="0">
-              <a:buNone/>
-            </a:pPr>
-            <a:r>
-              <a:rPr lang="en-US" sz="2300" b="1" dirty="0">
+          <a:bodyPr wrap="square" lIns="0" tIns="0" rIns="0" bIns="0" rtlCol="0" anchor="ctr">
+            <a:normAutofit/>
+          </a:bodyPr>
+          <a:lstStyle/>
+          <a:p>
+            <a:pPr indent="0" marL="0">
+              <a:buNone/>
+            </a:pPr>
+            <a:r>
+              <a:rPr lang="en-US" sz="2400" b="1" dirty="0">
                 <a:solidFill>
                   <a:srgbClr val="1F4E79"/>
                 </a:solidFill>
-                <a:latin typeface="Noto Sans CJK SC" pitchFamily="34" charset="0"/>
-                <a:ea typeface="Noto Sans CJK SC" pitchFamily="34" charset="-122"/>
-                <a:cs typeface="Noto Sans CJK SC" pitchFamily="34" charset="-120"/>
-              </a:rPr>
-              <a:t>第二周分析：域偏移是核心问题</a:t>
-            </a:r>
-            <a:endParaRPr lang="en-US" sz="2300" dirty="0"/>
+                <a:latin typeface="Noto Sans CJK JP" pitchFamily="34" charset="0"/>
+                <a:ea typeface="Noto Sans CJK JP" pitchFamily="34" charset="-122"/>
+                <a:cs typeface="Noto Sans CJK JP" pitchFamily="34" charset="-120"/>
+              </a:rPr>
+              <a:t>第二周：跨数据集 Baseline 明显退化</a:t>
+            </a:r>
+            <a:endParaRPr lang="en-US" sz="2400" dirty="0"/>
           </a:p>
         </p:txBody>
       </p:sp>
@@ -7180,37 +7701,178 @@
           <a:ln/>
         </p:spPr>
         <p:txBody>
-          <a:bodyPr wrap="square" lIns="0" tIns="0" rIns="0" bIns="0" rtlCol="0" anchor="ctr"/>
-          <a:lstStyle/>
-          <a:p>
-            <a:pPr indent="0" marL="0">
-              <a:buNone/>
-            </a:pPr>
-            <a:r>
-              <a:rPr lang="en-US" sz="950" dirty="0">
+          <a:bodyPr wrap="square" lIns="0" tIns="0" rIns="0" bIns="0" rtlCol="0" anchor="ctr">
+            <a:normAutofit/>
+          </a:bodyPr>
+          <a:lstStyle/>
+          <a:p>
+            <a:pPr indent="0" marL="0">
+              <a:buNone/>
+            </a:pPr>
+            <a:r>
+              <a:rPr lang="en-US" sz="1000" dirty="0">
                 <a:solidFill>
                   <a:srgbClr val="4B5563"/>
                 </a:solidFill>
-                <a:latin typeface="Noto Sans CJK SC" pitchFamily="34" charset="0"/>
-                <a:ea typeface="Noto Sans CJK SC" pitchFamily="34" charset="-122"/>
-                <a:cs typeface="Noto Sans CJK SC" pitchFamily="34" charset="-120"/>
-              </a:rPr>
-              <a:t>跨域失败为后续泛化增强提供动机</a:t>
-            </a:r>
-            <a:endParaRPr lang="en-US" sz="950" dirty="0"/>
-          </a:p>
-        </p:txBody>
-      </p:sp>
-      <p:sp>
-        <p:nvSpPr>
-          <p:cNvPr id="4" name="Text 2"/>
-          <p:cNvSpPr/>
-          <p:nvPr/>
-        </p:nvSpPr>
-        <p:spPr>
-          <a:xfrm>
-            <a:off x="822960" y="1234440"/>
-            <a:ext cx="5303520" cy="3108960"/>
+                <a:latin typeface="Noto Sans CJK JP" pitchFamily="34" charset="0"/>
+                <a:ea typeface="Noto Sans CJK JP" pitchFamily="34" charset="-122"/>
+                <a:cs typeface="Noto Sans CJK JP" pitchFamily="34" charset="-120"/>
+              </a:rPr>
+              <a:t>固定 OULU 模型，目标域仅测试</a:t>
+            </a:r>
+            <a:endParaRPr lang="en-US" sz="1000" dirty="0"/>
+          </a:p>
+        </p:txBody>
+      </p:sp>
+      <p:pic>
+        <p:nvPicPr>
+          <p:cNvPr id="4" name="Image 0" descr="/mnt/data/fas_artifacts/charts/week2_domain_shift.png">    </p:cNvPr>
+          <p:cNvPicPr>
+            <a:picLocks noChangeAspect="1"/>
+          </p:cNvPicPr>
+          <p:nvPr/>
+        </p:nvPicPr>
+        <p:blipFill>
+          <a:blip r:embed="rId1"/>
+          <a:stretch>
+            <a:fillRect/>
+          </a:stretch>
+        </p:blipFill>
+        <p:spPr>
+          <a:xfrm>
+            <a:off x="594360" y="1097280"/>
+            <a:ext cx="5486400" cy="3063240"/>
+          </a:xfrm>
+          <a:prstGeom prst="rect">
+            <a:avLst/>
+          </a:prstGeom>
+        </p:spPr>
+      </p:pic>
+      <p:sp>
+        <p:nvSpPr>
+          <p:cNvPr id="5" name="Text 2"/>
+          <p:cNvSpPr/>
+          <p:nvPr/>
+        </p:nvSpPr>
+        <p:spPr>
+          <a:xfrm>
+            <a:off x="6400800" y="1234440"/>
+            <a:ext cx="5257800" cy="2148840"/>
+          </a:xfrm>
+          <a:prstGeom prst="rect">
+            <a:avLst/>
+          </a:prstGeom>
+          <a:solidFill>
+            <a:srgbClr val="FFFFFF"/>
+          </a:solidFill>
+          <a:ln w="6350">
+            <a:solidFill>
+              <a:srgbClr val="C9D6E3"/>
+            </a:solidFill>
+          </a:ln>
+        </p:spPr>
+        <p:txBody>
+          <a:bodyPr wrap="square" lIns="1397" tIns="1397" rIns="1397" bIns="1397" rtlCol="0" anchor="ctr">
+            <a:normAutofit/>
+          </a:bodyPr>
+          <a:lstStyle/>
+          <a:p>
+            <a:pPr indent="0" marL="0">
+              <a:buNone/>
+            </a:pPr>
+            <a:r>
+              <a:rPr lang="en-US" sz="1060" dirty="0">
+                <a:solidFill>
+                  <a:srgbClr val="111827"/>
+                </a:solidFill>
+                <a:latin typeface="Noto Sans Mono CJK JP" pitchFamily="34" charset="0"/>
+                <a:ea typeface="Noto Sans Mono CJK JP" pitchFamily="34" charset="-122"/>
+                <a:cs typeface="Noto Sans Mono CJK JP" pitchFamily="34" charset="-120"/>
+              </a:rPr>
+              <a:t>跨域结果</a:t>
+            </a:r>
+            <a:endParaRPr lang="en-US" sz="1060" dirty="0"/>
+          </a:p>
+          <a:p>
+            <a:pPr indent="0" marL="0">
+              <a:buNone/>
+            </a:pPr>
+            <a:r>
+              <a:rPr lang="en-US" sz="1060" dirty="0">
+                <a:solidFill>
+                  <a:srgbClr val="111827"/>
+                </a:solidFill>
+                <a:latin typeface="Noto Sans Mono CJK JP" pitchFamily="34" charset="0"/>
+                <a:ea typeface="Noto Sans Mono CJK JP" pitchFamily="34" charset="-122"/>
+                <a:cs typeface="Noto Sans Mono CJK JP" pitchFamily="34" charset="-120"/>
+              </a:rPr>
+              <a:t>目标域          Accuracy   AUC       EER</a:t>
+            </a:r>
+            <a:endParaRPr lang="en-US" sz="1060" dirty="0"/>
+          </a:p>
+          <a:p>
+            <a:pPr indent="0" marL="0">
+              <a:buNone/>
+            </a:pPr>
+            <a:r>
+              <a:rPr lang="en-US" sz="1060" dirty="0">
+                <a:solidFill>
+                  <a:srgbClr val="111827"/>
+                </a:solidFill>
+                <a:latin typeface="Noto Sans Mono CJK JP" pitchFamily="34" charset="0"/>
+                <a:ea typeface="Noto Sans Mono CJK JP" pitchFamily="34" charset="-122"/>
+                <a:cs typeface="Noto Sans Mono CJK JP" pitchFamily="34" charset="-120"/>
+              </a:rPr>
+              <a:t>CASIA          28.0648%   23.4007%  69.8964%</a:t>
+            </a:r>
+            <a:endParaRPr lang="en-US" sz="1060" dirty="0"/>
+          </a:p>
+          <a:p>
+            <a:pPr indent="0" marL="0">
+              <a:buNone/>
+            </a:pPr>
+            <a:r>
+              <a:rPr lang="en-US" sz="1060" dirty="0">
+                <a:solidFill>
+                  <a:srgbClr val="111827"/>
+                </a:solidFill>
+                <a:latin typeface="Noto Sans Mono CJK JP" pitchFamily="34" charset="0"/>
+                <a:ea typeface="Noto Sans Mono CJK JP" pitchFamily="34" charset="-122"/>
+                <a:cs typeface="Noto Sans Mono CJK JP" pitchFamily="34" charset="-120"/>
+              </a:rPr>
+              <a:t>MSU-MFSD       60.9356%   64.0805%  41.6813%</a:t>
+            </a:r>
+            <a:endParaRPr lang="en-US" sz="1060" dirty="0"/>
+          </a:p>
+          <a:p>
+            <a:pPr indent="0" marL="0">
+              <a:buNone/>
+            </a:pPr>
+            <a:r>
+              <a:rPr lang="en-US" sz="1060" dirty="0">
+                <a:solidFill>
+                  <a:srgbClr val="111827"/>
+                </a:solidFill>
+                <a:latin typeface="Noto Sans Mono CJK JP" pitchFamily="34" charset="0"/>
+                <a:ea typeface="Noto Sans Mono CJK JP" pitchFamily="34" charset="-122"/>
+                <a:cs typeface="Noto Sans Mono CJK JP" pitchFamily="34" charset="-120"/>
+              </a:rPr>
+              <a:t>Replay-Attack  48.2725%   39.1893%  54.5629%</a:t>
+            </a:r>
+            <a:endParaRPr lang="en-US" sz="1060" dirty="0"/>
+          </a:p>
+        </p:txBody>
+      </p:sp>
+      <p:sp>
+        <p:nvSpPr>
+          <p:cNvPr id="6" name="Text 3"/>
+          <p:cNvSpPr/>
+          <p:nvPr/>
+        </p:nvSpPr>
+        <p:spPr>
+          <a:xfrm>
+            <a:off x="6400800" y="3886200"/>
+            <a:ext cx="5166360" cy="868680"/>
           </a:xfrm>
           <a:prstGeom prst="rect">
             <a:avLst/>
@@ -7224,76 +7886,34 @@
           </a:bodyPr>
           <a:lstStyle/>
           <a:p>
-            <a:r>
-              <a:rPr lang="en-US" sz="1450" dirty="0">
-                <a:solidFill>
-                  <a:srgbClr val="111827"/>
-                </a:solidFill>
-                <a:latin typeface="Noto Sans CJK SC" pitchFamily="34" charset="0"/>
-                <a:ea typeface="Noto Sans CJK SC" pitchFamily="34" charset="-122"/>
-                <a:cs typeface="Noto Sans CJK SC" pitchFamily="34" charset="-120"/>
-              </a:rPr>
-              <a:t>摄像设备、光照环境、图像质量与压缩方式不同。
-</a:t>
-            </a:r>
-            <a:endParaRPr lang="en-US" sz="1450" dirty="0"/>
-          </a:p>
-          <a:p>
-            <a:r>
-              <a:rPr lang="en-US" sz="1450" dirty="0">
-                <a:solidFill>
-                  <a:srgbClr val="111827"/>
-                </a:solidFill>
-                <a:latin typeface="Noto Sans CJK SC" pitchFamily="34" charset="0"/>
-                <a:ea typeface="Noto Sans CJK SC" pitchFamily="34" charset="-122"/>
-                <a:cs typeface="Noto Sans CJK SC" pitchFamily="34" charset="-120"/>
-              </a:rPr>
-              <a:t>攻击介质差异导致 spoof 纹理、反光、摩尔纹等线索不一致。
-</a:t>
-            </a:r>
-            <a:endParaRPr lang="en-US" sz="1450" dirty="0"/>
-          </a:p>
-          <a:p>
-            <a:r>
-              <a:rPr lang="en-US" sz="1450" dirty="0">
-                <a:solidFill>
-                  <a:srgbClr val="111827"/>
-                </a:solidFill>
-                <a:latin typeface="Noto Sans CJK SC" pitchFamily="34" charset="0"/>
-                <a:ea typeface="Noto Sans CJK SC" pitchFamily="34" charset="-122"/>
-                <a:cs typeface="Noto Sans CJK SC" pitchFamily="34" charset="-120"/>
-              </a:rPr>
-              <a:t>预处理和人脸裁切可能引入数据集特有统计模式。
-</a:t>
-            </a:r>
-            <a:endParaRPr lang="en-US" sz="1450" dirty="0"/>
-          </a:p>
-          <a:p>
-            <a:r>
-              <a:rPr lang="en-US" sz="1450" dirty="0">
-                <a:solidFill>
-                  <a:srgbClr val="111827"/>
-                </a:solidFill>
-                <a:latin typeface="Noto Sans CJK SC" pitchFamily="34" charset="0"/>
-                <a:ea typeface="Noto Sans CJK SC" pitchFamily="34" charset="-122"/>
-                <a:cs typeface="Noto Sans CJK SC" pitchFamily="34" charset="-120"/>
-              </a:rPr>
-              <a:t>CASIA 与 Replay-Attack 的 AUC 低于 0.5，提示预测分数排序可能出现反向倾向。</a:t>
-            </a:r>
-            <a:endParaRPr lang="en-US" sz="1450" dirty="0"/>
-          </a:p>
-        </p:txBody>
-      </p:sp>
-      <p:sp>
-        <p:nvSpPr>
-          <p:cNvPr id="5" name="Text 3"/>
-          <p:cNvSpPr/>
-          <p:nvPr/>
-        </p:nvSpPr>
-        <p:spPr>
-          <a:xfrm>
-            <a:off x="6583680" y="1280160"/>
-            <a:ext cx="4389120" cy="320040"/>
+            <a:pPr indent="0" marL="0">
+              <a:buNone/>
+            </a:pPr>
+            <a:r>
+              <a:rPr lang="en-US" sz="1380" b="1" dirty="0">
+                <a:solidFill>
+                  <a:srgbClr val="111827"/>
+                </a:solidFill>
+                <a:latin typeface="Noto Sans CJK JP" pitchFamily="34" charset="0"/>
+                <a:ea typeface="Noto Sans CJK JP" pitchFamily="34" charset="-122"/>
+                <a:cs typeface="Noto Sans CJK JP" pitchFamily="34" charset="-120"/>
+              </a:rPr>
+              <a:t>结论：源域内几乎满分，但迁移到未见数据集后 AUC 大幅下降、EER 升高，说明模型存在明显域依赖。</a:t>
+            </a:r>
+            <a:endParaRPr lang="en-US" sz="1380" dirty="0"/>
+          </a:p>
+        </p:txBody>
+      </p:sp>
+      <p:sp>
+        <p:nvSpPr>
+          <p:cNvPr id="7" name="Text 4"/>
+          <p:cNvSpPr/>
+          <p:nvPr/>
+        </p:nvSpPr>
+        <p:spPr>
+          <a:xfrm>
+            <a:off x="10424160" y="6565392"/>
+            <a:ext cx="1325880" cy="155448"/>
           </a:xfrm>
           <a:prstGeom prst="rect">
             <a:avLst/>
@@ -7307,142 +7927,19 @@
           </a:bodyPr>
           <a:lstStyle/>
           <a:p>
-            <a:pPr indent="0" marL="0">
-              <a:buNone/>
-            </a:pPr>
-            <a:r>
-              <a:rPr lang="en-US" sz="1800" b="1" dirty="0">
-                <a:solidFill>
-                  <a:srgbClr val="1F4E79"/>
-                </a:solidFill>
-                <a:latin typeface="Noto Sans CJK SC" pitchFamily="34" charset="0"/>
-                <a:ea typeface="Noto Sans CJK SC" pitchFamily="34" charset="-122"/>
-                <a:cs typeface="Noto Sans CJK SC" pitchFamily="34" charset="-120"/>
-              </a:rPr>
-              <a:t>实验问题转化</a:t>
-            </a:r>
-            <a:endParaRPr lang="en-US" sz="1800" dirty="0"/>
-          </a:p>
-        </p:txBody>
-      </p:sp>
-      <p:sp>
-        <p:nvSpPr>
-          <p:cNvPr id="6" name="Text 4"/>
-          <p:cNvSpPr/>
-          <p:nvPr/>
-        </p:nvSpPr>
-        <p:spPr>
-          <a:xfrm>
-            <a:off x="6583680" y="1874520"/>
-            <a:ext cx="4572000" cy="1645920"/>
-          </a:xfrm>
-          <a:prstGeom prst="rect">
-            <a:avLst/>
-          </a:prstGeom>
-          <a:noFill/>
-          <a:ln/>
-        </p:spPr>
-        <p:txBody>
-          <a:bodyPr wrap="square" lIns="635" tIns="635" rIns="635" bIns="635" rtlCol="0" anchor="ctr">
-            <a:normAutofit/>
-          </a:bodyPr>
-          <a:lstStyle/>
-          <a:p>
-            <a:pPr indent="0" marL="0">
-              <a:buNone/>
-            </a:pPr>
-            <a:r>
-              <a:rPr lang="en-US" sz="1600" b="1" dirty="0">
-                <a:solidFill>
-                  <a:srgbClr val="111827"/>
-                </a:solidFill>
-                <a:latin typeface="Noto Sans CJK SC" pitchFamily="34" charset="0"/>
-                <a:ea typeface="Noto Sans CJK SC" pitchFamily="34" charset="-122"/>
-                <a:cs typeface="Noto Sans CJK SC" pitchFamily="34" charset="-120"/>
-              </a:rPr>
-              <a:t>如何在不使用目标域训练数据的前提下，削弱模型对 OULU-NPU 外观统计的依赖，并提升 CASIA / MSU-MFSD / Replay-Attack 上的 AUC 与 EER？</a:t>
-            </a:r>
-            <a:endParaRPr lang="en-US" sz="1600" dirty="0"/>
-          </a:p>
-        </p:txBody>
-      </p:sp>
-      <p:sp>
-        <p:nvSpPr>
-          <p:cNvPr id="7" name="Text 5"/>
-          <p:cNvSpPr/>
-          <p:nvPr/>
-        </p:nvSpPr>
-        <p:spPr>
-          <a:xfrm>
-            <a:off x="6583680" y="4160520"/>
-            <a:ext cx="4572000" cy="685800"/>
-          </a:xfrm>
-          <a:prstGeom prst="rect">
-            <a:avLst/>
-          </a:prstGeom>
-          <a:noFill/>
-          <a:ln/>
-        </p:spPr>
-        <p:txBody>
-          <a:bodyPr wrap="square" lIns="635" tIns="635" rIns="635" bIns="635" rtlCol="0" anchor="ctr">
-            <a:normAutofit/>
-          </a:bodyPr>
-          <a:lstStyle/>
-          <a:p>
-            <a:pPr indent="0" marL="0">
-              <a:buNone/>
-            </a:pPr>
-            <a:r>
-              <a:rPr lang="en-US" sz="1350" dirty="0">
+            <a:pPr algn="r" indent="0" marL="0">
+              <a:buNone/>
+            </a:pPr>
+            <a:r>
+              <a:rPr lang="en-US" sz="750" dirty="0">
                 <a:solidFill>
                   <a:srgbClr val="4B5563"/>
                 </a:solidFill>
-                <a:latin typeface="Noto Sans CJK SC" pitchFamily="34" charset="0"/>
-                <a:ea typeface="Noto Sans CJK SC" pitchFamily="34" charset="-122"/>
-                <a:cs typeface="Noto Sans CJK SC" pitchFamily="34" charset="-120"/>
-              </a:rPr>
-              <a:t>第三周目标：保持模型骨干与评价协议不变，只改变训练阶段泛化机制。</a:t>
-            </a:r>
-            <a:endParaRPr lang="en-US" sz="1350" dirty="0"/>
-          </a:p>
-        </p:txBody>
-      </p:sp>
-      <p:sp>
-        <p:nvSpPr>
-          <p:cNvPr id="8" name="Text 6"/>
-          <p:cNvSpPr/>
-          <p:nvPr/>
-        </p:nvSpPr>
-        <p:spPr>
-          <a:xfrm>
-            <a:off x="10424160" y="6565392"/>
-            <a:ext cx="1280160" cy="137160"/>
-          </a:xfrm>
-          <a:prstGeom prst="rect">
-            <a:avLst/>
-          </a:prstGeom>
-          <a:noFill/>
-          <a:ln/>
-        </p:spPr>
-        <p:txBody>
-          <a:bodyPr wrap="square" lIns="635" tIns="635" rIns="635" bIns="635" rtlCol="0" anchor="ctr">
-            <a:normAutofit/>
-          </a:bodyPr>
-          <a:lstStyle/>
-          <a:p>
-            <a:pPr algn="r" indent="0" marL="0">
-              <a:buNone/>
-            </a:pPr>
-            <a:r>
-              <a:rPr lang="en-US" sz="750" dirty="0">
-                <a:solidFill>
-                  <a:srgbClr val="4B5563"/>
-                </a:solidFill>
-                <a:latin typeface="Noto Sans CJK SC" pitchFamily="34" charset="0"/>
-                <a:ea typeface="Noto Sans CJK SC" pitchFamily="34" charset="-122"/>
-                <a:cs typeface="Noto Sans CJK SC" pitchFamily="34" charset="-120"/>
-              </a:rPr>
-              <a:t>FAS 实验答辩  ·  6</a:t>
+                <a:latin typeface="Noto Sans CJK JP" pitchFamily="34" charset="0"/>
+                <a:ea typeface="Noto Sans CJK JP" pitchFamily="34" charset="-122"/>
+                <a:cs typeface="Noto Sans CJK JP" pitchFamily="34" charset="-120"/>
+              </a:rPr>
+              <a:t>FAS 最终答辩 · 6</a:t>
             </a:r>
             <a:endParaRPr lang="en-US" sz="750" dirty="0"/>
           </a:p>
@@ -7488,8 +7985,8 @@
         </p:nvSpPr>
         <p:spPr>
           <a:xfrm>
-            <a:off x="502920" y="310896"/>
-            <a:ext cx="11064240" cy="384048"/>
+            <a:off x="502920" y="274320"/>
+            <a:ext cx="11155680" cy="438912"/>
           </a:xfrm>
           <a:prstGeom prst="rect">
             <a:avLst/>
@@ -7498,24 +7995,26 @@
           <a:ln/>
         </p:spPr>
         <p:txBody>
-          <a:bodyPr wrap="square" lIns="0" tIns="0" rIns="0" bIns="0" rtlCol="0" anchor="ctr"/>
-          <a:lstStyle/>
-          <a:p>
-            <a:pPr indent="0" marL="0">
-              <a:buNone/>
-            </a:pPr>
-            <a:r>
-              <a:rPr lang="en-US" sz="2300" b="1" dirty="0">
+          <a:bodyPr wrap="square" lIns="0" tIns="0" rIns="0" bIns="0" rtlCol="0" anchor="ctr">
+            <a:normAutofit/>
+          </a:bodyPr>
+          <a:lstStyle/>
+          <a:p>
+            <a:pPr indent="0" marL="0">
+              <a:buNone/>
+            </a:pPr>
+            <a:r>
+              <a:rPr lang="en-US" sz="2400" b="1" dirty="0">
                 <a:solidFill>
                   <a:srgbClr val="1F4E79"/>
                 </a:solidFill>
-                <a:latin typeface="Noto Sans CJK SC" pitchFamily="34" charset="0"/>
-                <a:ea typeface="Noto Sans CJK SC" pitchFamily="34" charset="-122"/>
-                <a:cs typeface="Noto Sans CJK SC" pitchFamily="34" charset="-120"/>
-              </a:rPr>
-              <a:t>第三周方法命名必须严谨</a:t>
-            </a:r>
-            <a:endParaRPr lang="en-US" sz="2300" dirty="0"/>
+                <a:latin typeface="Noto Sans CJK JP" pitchFamily="34" charset="0"/>
+                <a:ea typeface="Noto Sans CJK JP" pitchFamily="34" charset="-122"/>
+                <a:cs typeface="Noto Sans CJK JP" pitchFamily="34" charset="-120"/>
+              </a:rPr>
+              <a:t>第二周分析：域偏移是核心矛盾</a:t>
+            </a:r>
+            <a:endParaRPr lang="en-US" sz="2400" dirty="0"/>
           </a:p>
         </p:txBody>
       </p:sp>
@@ -7537,24 +8036,26 @@
           <a:ln/>
         </p:spPr>
         <p:txBody>
-          <a:bodyPr wrap="square" lIns="0" tIns="0" rIns="0" bIns="0" rtlCol="0" anchor="ctr"/>
-          <a:lstStyle/>
-          <a:p>
-            <a:pPr indent="0" marL="0">
-              <a:buNone/>
-            </a:pPr>
-            <a:r>
-              <a:rPr lang="en-US" sz="950" dirty="0">
+          <a:bodyPr wrap="square" lIns="0" tIns="0" rIns="0" bIns="0" rtlCol="0" anchor="ctr">
+            <a:normAutofit/>
+          </a:bodyPr>
+          <a:lstStyle/>
+          <a:p>
+            <a:pPr indent="0" marL="0">
+              <a:buNone/>
+            </a:pPr>
+            <a:r>
+              <a:rPr lang="en-US" sz="1000" dirty="0">
                 <a:solidFill>
                   <a:srgbClr val="4B5563"/>
                 </a:solidFill>
-                <a:latin typeface="Noto Sans CJK SC" pitchFamily="34" charset="0"/>
-                <a:ea typeface="Noto Sans CJK SC" pitchFamily="34" charset="-122"/>
-                <a:cs typeface="Noto Sans CJK SC" pitchFamily="34" charset="-120"/>
-              </a:rPr>
-              <a:t>区分项目自定义配置与正式方法名</a:t>
-            </a:r>
-            <a:endParaRPr lang="en-US" sz="950" dirty="0"/>
+                <a:latin typeface="Noto Sans CJK JP" pitchFamily="34" charset="0"/>
+                <a:ea typeface="Noto Sans CJK JP" pitchFamily="34" charset="-122"/>
+                <a:cs typeface="Noto Sans CJK JP" pitchFamily="34" charset="-120"/>
+              </a:rPr>
+              <a:t>跨域失败为第三周泛化增强提供动机</a:t>
+            </a:r>
+            <a:endParaRPr lang="en-US" sz="1000" dirty="0"/>
           </a:p>
         </p:txBody>
       </p:sp>
@@ -7566,123 +8067,8 @@
         </p:nvSpPr>
         <p:spPr>
           <a:xfrm>
-            <a:off x="685800" y="1143000"/>
-            <a:ext cx="10698480" cy="2103120"/>
-          </a:xfrm>
-          <a:prstGeom prst="rect">
-            <a:avLst/>
-          </a:prstGeom>
-          <a:solidFill>
-            <a:srgbClr val="FFFFFF"/>
-          </a:solidFill>
-          <a:ln w="6350">
-            <a:solidFill>
-              <a:srgbClr val="C9D6E3"/>
-            </a:solidFill>
-          </a:ln>
-        </p:spPr>
-        <p:txBody>
-          <a:bodyPr wrap="square" lIns="1270" tIns="1270" rIns="1270" bIns="1270" rtlCol="0" anchor="ctr">
-            <a:normAutofit/>
-          </a:bodyPr>
-          <a:lstStyle/>
-          <a:p>
-            <a:pPr indent="0" marL="0">
-              <a:buNone/>
-            </a:pPr>
-            <a:r>
-              <a:rPr lang="en-US" sz="1080" dirty="0">
-                <a:solidFill>
-                  <a:srgbClr val="111827"/>
-                </a:solidFill>
-                <a:latin typeface="Noto Sans Mono CJK SC" pitchFamily="34" charset="0"/>
-                <a:ea typeface="Noto Sans Mono CJK SC" pitchFamily="34" charset="-122"/>
-                <a:cs typeface="Noto Sans Mono CJK SC" pitchFamily="34" charset="-120"/>
-              </a:rPr>
-              <a:t>报告名称                          性质 / 代码参数</a:t>
-            </a:r>
-            <a:endParaRPr lang="en-US" sz="1080" dirty="0"/>
-          </a:p>
-          <a:p>
-            <a:pPr indent="0" marL="0">
-              <a:buNone/>
-            </a:pPr>
-            <a:r>
-              <a:rPr lang="en-US" sz="1080" dirty="0">
-                <a:solidFill>
-                  <a:srgbClr val="111827"/>
-                </a:solidFill>
-                <a:latin typeface="Noto Sans Mono CJK SC" pitchFamily="34" charset="0"/>
-                <a:ea typeface="Noto Sans Mono CJK SC" pitchFamily="34" charset="-122"/>
-                <a:cs typeface="Noto Sans Mono CJK SC" pitchFamily="34" charset="-120"/>
-              </a:rPr>
-              <a:t>Strong Data Augmentation          项目自定义强增强配置；augmentation=strong</a:t>
-            </a:r>
-            <a:endParaRPr lang="en-US" sz="1080" dirty="0"/>
-          </a:p>
-          <a:p>
-            <a:pPr indent="0" marL="0">
-              <a:buNone/>
-            </a:pPr>
-            <a:r>
-              <a:rPr lang="en-US" sz="1080" dirty="0">
-                <a:solidFill>
-                  <a:srgbClr val="111827"/>
-                </a:solidFill>
-                <a:latin typeface="Noto Sans Mono CJK SC" pitchFamily="34" charset="0"/>
-                <a:ea typeface="Noto Sans Mono CJK SC" pitchFamily="34" charset="-122"/>
-                <a:cs typeface="Noto Sans Mono CJK SC" pitchFamily="34" charset="-120"/>
-              </a:rPr>
-              <a:t>Appearance Randomization          项目自定义外观随机化；augmentation=appearance</a:t>
-            </a:r>
-            <a:endParaRPr lang="en-US" sz="1080" dirty="0"/>
-          </a:p>
-          <a:p>
-            <a:pPr indent="0" marL="0">
-              <a:buNone/>
-            </a:pPr>
-            <a:r>
-              <a:rPr lang="en-US" sz="1080" dirty="0">
-                <a:solidFill>
-                  <a:srgbClr val="111827"/>
-                </a:solidFill>
-                <a:latin typeface="Noto Sans Mono CJK SC" pitchFamily="34" charset="0"/>
-                <a:ea typeface="Noto Sans Mono CJK SC" pitchFamily="34" charset="-122"/>
-                <a:cs typeface="Noto Sans Mono CJK SC" pitchFamily="34" charset="-120"/>
-              </a:rPr>
-              <a:t>MixStyle                          已有正式方法名；method=mixstyle</a:t>
-            </a:r>
-            <a:endParaRPr lang="en-US" sz="1080" dirty="0"/>
-          </a:p>
-          <a:p>
-            <a:pPr indent="0" marL="0">
-              <a:buNone/>
-            </a:pPr>
-            <a:r>
-              <a:rPr lang="en-US" sz="1080" dirty="0">
-                <a:solidFill>
-                  <a:srgbClr val="111827"/>
-                </a:solidFill>
-                <a:latin typeface="Noto Sans Mono CJK SC" pitchFamily="34" charset="0"/>
-                <a:ea typeface="Noto Sans Mono CJK SC" pitchFamily="34" charset="-122"/>
-                <a:cs typeface="Noto Sans Mono CJK SC" pitchFamily="34" charset="-120"/>
-              </a:rPr>
-              <a:t>Fourier Amplitude Augmentation    项目轻量频域实现；method=fourier</a:t>
-            </a:r>
-            <a:endParaRPr lang="en-US" sz="1080" dirty="0"/>
-          </a:p>
-        </p:txBody>
-      </p:sp>
-      <p:sp>
-        <p:nvSpPr>
-          <p:cNvPr id="5" name="Text 3"/>
-          <p:cNvSpPr/>
-          <p:nvPr/>
-        </p:nvSpPr>
-        <p:spPr>
-          <a:xfrm>
-            <a:off x="914400" y="3749040"/>
-            <a:ext cx="10332720" cy="1234440"/>
+            <a:off x="822960" y="1234440"/>
+            <a:ext cx="5486400" cy="3200400"/>
           </a:xfrm>
           <a:prstGeom prst="rect">
             <a:avLst/>
@@ -7697,60 +8083,75 @@
           <a:lstStyle/>
           <a:p>
             <a:r>
-              <a:rPr lang="en-US" sz="1400" dirty="0">
-                <a:solidFill>
-                  <a:srgbClr val="111827"/>
-                </a:solidFill>
-                <a:latin typeface="Noto Sans CJK SC" pitchFamily="34" charset="0"/>
-                <a:ea typeface="Noto Sans CJK SC" pitchFamily="34" charset="-122"/>
-                <a:cs typeface="Noto Sans CJK SC" pitchFamily="34" charset="-120"/>
-              </a:rPr>
-              <a:t>Strong 与 Appearance 不是论文算法名，而是项目自定义实验策略。
+              <a:rPr lang="en-US" sz="1440" dirty="0">
+                <a:solidFill>
+                  <a:srgbClr val="111827"/>
+                </a:solidFill>
+                <a:latin typeface="Noto Sans CJK JP" pitchFamily="34" charset="0"/>
+                <a:ea typeface="Noto Sans CJK JP" pitchFamily="34" charset="-122"/>
+                <a:cs typeface="Noto Sans CJK JP" pitchFamily="34" charset="-120"/>
+              </a:rPr>
+              <a:t>不同数据集存在摄像设备、光照、图像质量和压缩差异。
 </a:t>
             </a:r>
-            <a:endParaRPr lang="en-US" sz="1400" dirty="0"/>
-          </a:p>
-          <a:p>
-            <a:r>
-              <a:rPr lang="en-US" sz="1400" dirty="0">
-                <a:solidFill>
-                  <a:srgbClr val="111827"/>
-                </a:solidFill>
-                <a:latin typeface="Noto Sans CJK SC" pitchFamily="34" charset="0"/>
-                <a:ea typeface="Noto Sans CJK SC" pitchFamily="34" charset="-122"/>
-                <a:cs typeface="Noto Sans CJK SC" pitchFamily="34" charset="-120"/>
-              </a:rPr>
-              <a:t>Appearance Randomization 早期写作 Appearance Augmentation，二者对应同一代码配置。
+            <a:endParaRPr lang="en-US" sz="1440" dirty="0"/>
+          </a:p>
+          <a:p>
+            <a:r>
+              <a:rPr lang="en-US" sz="1440" dirty="0">
+                <a:solidFill>
+                  <a:srgbClr val="111827"/>
+                </a:solidFill>
+                <a:latin typeface="Noto Sans CJK JP" pitchFamily="34" charset="0"/>
+                <a:ea typeface="Noto Sans CJK JP" pitchFamily="34" charset="-122"/>
+                <a:cs typeface="Noto Sans CJK JP" pitchFamily="34" charset="-120"/>
+              </a:rPr>
+              <a:t>不同攻击介质会改变打印纹理、屏幕摩尔纹、反射和重采样痕迹。
 </a:t>
             </a:r>
-            <a:endParaRPr lang="en-US" sz="1400" dirty="0"/>
-          </a:p>
-          <a:p>
-            <a:r>
-              <a:rPr lang="en-US" sz="1400" dirty="0">
-                <a:solidFill>
-                  <a:srgbClr val="111827"/>
-                </a:solidFill>
-                <a:latin typeface="Noto Sans CJK SC" pitchFamily="34" charset="0"/>
-                <a:ea typeface="Noto Sans CJK SC" pitchFamily="34" charset="-122"/>
-                <a:cs typeface="Noto Sans CJK SC" pitchFamily="34" charset="-120"/>
-              </a:rPr>
-              <a:t>Fourier 需要说明是轻量 amplitude augmentation，不包含完整频域 FAS 网络或额外损失。</a:t>
-            </a:r>
-            <a:endParaRPr lang="en-US" sz="1400" dirty="0"/>
-          </a:p>
-        </p:txBody>
-      </p:sp>
-      <p:sp>
-        <p:nvSpPr>
-          <p:cNvPr id="6" name="Text 4"/>
-          <p:cNvSpPr/>
-          <p:nvPr/>
-        </p:nvSpPr>
-        <p:spPr>
-          <a:xfrm>
-            <a:off x="10424160" y="6565392"/>
-            <a:ext cx="1280160" cy="137160"/>
+            <a:endParaRPr lang="en-US" sz="1440" dirty="0"/>
+          </a:p>
+          <a:p>
+            <a:r>
+              <a:rPr lang="en-US" sz="1440" dirty="0">
+                <a:solidFill>
+                  <a:srgbClr val="111827"/>
+                </a:solidFill>
+                <a:latin typeface="Noto Sans CJK JP" pitchFamily="34" charset="0"/>
+                <a:ea typeface="Noto Sans CJK JP" pitchFamily="34" charset="-122"/>
+                <a:cs typeface="Noto Sans CJK JP" pitchFamily="34" charset="-120"/>
+              </a:rPr>
+              <a:t>预处理流程与人脸裁切方式也可能引入数据集特有统计。
+</a:t>
+            </a:r>
+            <a:endParaRPr lang="en-US" sz="1440" dirty="0"/>
+          </a:p>
+          <a:p>
+            <a:r>
+              <a:rPr lang="en-US" sz="1440" dirty="0">
+                <a:solidFill>
+                  <a:srgbClr val="111827"/>
+                </a:solidFill>
+                <a:latin typeface="Noto Sans CJK JP" pitchFamily="34" charset="0"/>
+                <a:ea typeface="Noto Sans CJK JP" pitchFamily="34" charset="-122"/>
+                <a:cs typeface="Noto Sans CJK JP" pitchFamily="34" charset="-120"/>
+              </a:rPr>
+              <a:t>CASIA 与 Replay-Attack 的 AUC 低于 0.5，提示目标域分数排序出现明显偏移。</a:t>
+            </a:r>
+            <a:endParaRPr lang="en-US" sz="1440" dirty="0"/>
+          </a:p>
+        </p:txBody>
+      </p:sp>
+      <p:sp>
+        <p:nvSpPr>
+          <p:cNvPr id="5" name="Text 3"/>
+          <p:cNvSpPr/>
+          <p:nvPr/>
+        </p:nvSpPr>
+        <p:spPr>
+          <a:xfrm>
+            <a:off x="6720840" y="1280160"/>
+            <a:ext cx="4023360" cy="329184"/>
           </a:xfrm>
           <a:prstGeom prst="rect">
             <a:avLst/>
@@ -7764,6 +8165,88 @@
           </a:bodyPr>
           <a:lstStyle/>
           <a:p>
+            <a:pPr indent="0" marL="0">
+              <a:buNone/>
+            </a:pPr>
+            <a:r>
+              <a:rPr lang="en-US" sz="1800" b="1" dirty="0">
+                <a:solidFill>
+                  <a:srgbClr val="1F4E79"/>
+                </a:solidFill>
+                <a:latin typeface="Noto Sans CJK JP" pitchFamily="34" charset="0"/>
+                <a:ea typeface="Noto Sans CJK JP" pitchFamily="34" charset="-122"/>
+                <a:cs typeface="Noto Sans CJK JP" pitchFamily="34" charset="-120"/>
+              </a:rPr>
+              <a:t>第三周问题</a:t>
+            </a:r>
+            <a:endParaRPr lang="en-US" sz="1800" dirty="0"/>
+          </a:p>
+        </p:txBody>
+      </p:sp>
+      <p:sp>
+        <p:nvSpPr>
+          <p:cNvPr id="6" name="Text 4"/>
+          <p:cNvSpPr/>
+          <p:nvPr/>
+        </p:nvSpPr>
+        <p:spPr>
+          <a:xfrm>
+            <a:off x="6720840" y="1874520"/>
+            <a:ext cx="4572000" cy="1691640"/>
+          </a:xfrm>
+          <a:prstGeom prst="rect">
+            <a:avLst/>
+          </a:prstGeom>
+          <a:noFill/>
+          <a:ln/>
+        </p:spPr>
+        <p:txBody>
+          <a:bodyPr wrap="square" lIns="635" tIns="635" rIns="635" bIns="635" rtlCol="0" anchor="ctr">
+            <a:normAutofit/>
+          </a:bodyPr>
+          <a:lstStyle/>
+          <a:p>
+            <a:pPr indent="0" marL="0">
+              <a:buNone/>
+            </a:pPr>
+            <a:r>
+              <a:rPr lang="en-US" sz="1550" b="1" dirty="0">
+                <a:solidFill>
+                  <a:srgbClr val="111827"/>
+                </a:solidFill>
+                <a:latin typeface="Noto Sans CJK JP" pitchFamily="34" charset="0"/>
+                <a:ea typeface="Noto Sans CJK JP" pitchFamily="34" charset="-122"/>
+                <a:cs typeface="Noto Sans CJK JP" pitchFamily="34" charset="-120"/>
+              </a:rPr>
+              <a:t>在不使用目标域训练数据的前提下，如何削弱模型对 OULU-NPU 外观统计的依赖，并提升 CASIA / MSU-MFSD / Replay-Attack 上的 AUC 与 EER？</a:t>
+            </a:r>
+            <a:endParaRPr lang="en-US" sz="1550" dirty="0"/>
+          </a:p>
+        </p:txBody>
+      </p:sp>
+      <p:sp>
+        <p:nvSpPr>
+          <p:cNvPr id="7" name="Text 5"/>
+          <p:cNvSpPr/>
+          <p:nvPr/>
+        </p:nvSpPr>
+        <p:spPr>
+          <a:xfrm>
+            <a:off x="10424160" y="6565392"/>
+            <a:ext cx="1325880" cy="155448"/>
+          </a:xfrm>
+          <a:prstGeom prst="rect">
+            <a:avLst/>
+          </a:prstGeom>
+          <a:noFill/>
+          <a:ln/>
+        </p:spPr>
+        <p:txBody>
+          <a:bodyPr wrap="square" lIns="635" tIns="635" rIns="635" bIns="635" rtlCol="0" anchor="ctr">
+            <a:normAutofit/>
+          </a:bodyPr>
+          <a:lstStyle/>
+          <a:p>
             <a:pPr algn="r" indent="0" marL="0">
               <a:buNone/>
             </a:pPr>
@@ -7772,11 +8255,11 @@
                 <a:solidFill>
                   <a:srgbClr val="4B5563"/>
                 </a:solidFill>
-                <a:latin typeface="Noto Sans CJK SC" pitchFamily="34" charset="0"/>
-                <a:ea typeface="Noto Sans CJK SC" pitchFamily="34" charset="-122"/>
-                <a:cs typeface="Noto Sans CJK SC" pitchFamily="34" charset="-120"/>
-              </a:rPr>
-              <a:t>FAS 实验答辩  ·  7</a:t>
+                <a:latin typeface="Noto Sans CJK JP" pitchFamily="34" charset="0"/>
+                <a:ea typeface="Noto Sans CJK JP" pitchFamily="34" charset="-122"/>
+                <a:cs typeface="Noto Sans CJK JP" pitchFamily="34" charset="-120"/>
+              </a:rPr>
+              <a:t>FAS 最终答辩 · 7</a:t>
             </a:r>
             <a:endParaRPr lang="en-US" sz="750" dirty="0"/>
           </a:p>
@@ -7822,8 +8305,8 @@
         </p:nvSpPr>
         <p:spPr>
           <a:xfrm>
-            <a:off x="502920" y="310896"/>
-            <a:ext cx="11064240" cy="384048"/>
+            <a:off x="502920" y="274320"/>
+            <a:ext cx="11155680" cy="438912"/>
           </a:xfrm>
           <a:prstGeom prst="rect">
             <a:avLst/>
@@ -7832,24 +8315,26 @@
           <a:ln/>
         </p:spPr>
         <p:txBody>
-          <a:bodyPr wrap="square" lIns="0" tIns="0" rIns="0" bIns="0" rtlCol="0" anchor="ctr"/>
-          <a:lstStyle/>
-          <a:p>
-            <a:pPr indent="0" marL="0">
-              <a:buNone/>
-            </a:pPr>
-            <a:r>
-              <a:rPr lang="en-US" sz="2300" b="1" dirty="0">
+          <a:bodyPr wrap="square" lIns="0" tIns="0" rIns="0" bIns="0" rtlCol="0" anchor="ctr">
+            <a:normAutofit/>
+          </a:bodyPr>
+          <a:lstStyle/>
+          <a:p>
+            <a:pPr indent="0" marL="0">
+              <a:buNone/>
+            </a:pPr>
+            <a:r>
+              <a:rPr lang="en-US" sz="2400" b="1" dirty="0">
                 <a:solidFill>
                   <a:srgbClr val="1F4E79"/>
                 </a:solidFill>
-                <a:latin typeface="Noto Sans CJK SC" pitchFamily="34" charset="0"/>
-                <a:ea typeface="Noto Sans CJK SC" pitchFamily="34" charset="-122"/>
-                <a:cs typeface="Noto Sans CJK SC" pitchFamily="34" charset="-120"/>
-              </a:rPr>
-              <a:t>Strong Data Augmentation</a:t>
-            </a:r>
-            <a:endParaRPr lang="en-US" sz="2300" dirty="0"/>
+                <a:latin typeface="Noto Sans CJK JP" pitchFamily="34" charset="0"/>
+                <a:ea typeface="Noto Sans CJK JP" pitchFamily="34" charset="-122"/>
+                <a:cs typeface="Noto Sans CJK JP" pitchFamily="34" charset="-120"/>
+              </a:rPr>
+              <a:t>第三周方法命名必须严谨</a:t>
+            </a:r>
+            <a:endParaRPr lang="en-US" sz="2400" dirty="0"/>
           </a:p>
         </p:txBody>
       </p:sp>
@@ -7871,24 +8356,26 @@
           <a:ln/>
         </p:spPr>
         <p:txBody>
-          <a:bodyPr wrap="square" lIns="0" tIns="0" rIns="0" bIns="0" rtlCol="0" anchor="ctr"/>
-          <a:lstStyle/>
-          <a:p>
-            <a:pPr indent="0" marL="0">
-              <a:buNone/>
-            </a:pPr>
-            <a:r>
-              <a:rPr lang="en-US" sz="950" dirty="0">
+          <a:bodyPr wrap="square" lIns="0" tIns="0" rIns="0" bIns="0" rtlCol="0" anchor="ctr">
+            <a:normAutofit/>
+          </a:bodyPr>
+          <a:lstStyle/>
+          <a:p>
+            <a:pPr indent="0" marL="0">
+              <a:buNone/>
+            </a:pPr>
+            <a:r>
+              <a:rPr lang="en-US" sz="1000" dirty="0">
                 <a:solidFill>
                   <a:srgbClr val="4B5563"/>
                 </a:solidFill>
-                <a:latin typeface="Noto Sans CJK SC" pitchFamily="34" charset="0"/>
-                <a:ea typeface="Noto Sans CJK SC" pitchFamily="34" charset="-122"/>
-                <a:cs typeface="Noto Sans CJK SC" pitchFamily="34" charset="-120"/>
-              </a:rPr>
-              <a:t>项目自定义强空间域/外观增强配置</a:t>
-            </a:r>
-            <a:endParaRPr lang="en-US" sz="950" dirty="0"/>
+                <a:latin typeface="Noto Sans CJK JP" pitchFamily="34" charset="0"/>
+                <a:ea typeface="Noto Sans CJK JP" pitchFamily="34" charset="-122"/>
+                <a:cs typeface="Noto Sans CJK JP" pitchFamily="34" charset="-120"/>
+              </a:rPr>
+              <a:t>区分项目自定义配置与已有正式方法名</a:t>
+            </a:r>
+            <a:endParaRPr lang="en-US" sz="1000" dirty="0"/>
           </a:p>
         </p:txBody>
       </p:sp>
@@ -7900,8 +8387,8 @@
         </p:nvSpPr>
         <p:spPr>
           <a:xfrm>
-            <a:off x="731520" y="1143000"/>
-            <a:ext cx="5943600" cy="2468880"/>
+            <a:off x="685800" y="1143000"/>
+            <a:ext cx="10744200" cy="2240280"/>
           </a:xfrm>
           <a:prstGeom prst="rect">
             <a:avLst/>
@@ -7916,111 +8403,94 @@
           </a:ln>
         </p:spPr>
         <p:txBody>
-          <a:bodyPr wrap="square" lIns="1270" tIns="1270" rIns="1270" bIns="1270" rtlCol="0" anchor="ctr">
-            <a:normAutofit/>
-          </a:bodyPr>
-          <a:lstStyle/>
-          <a:p>
-            <a:pPr indent="0" marL="0">
-              <a:buNone/>
-            </a:pPr>
-            <a:r>
-              <a:rPr lang="en-US" sz="1060" dirty="0">
-                <a:solidFill>
-                  <a:srgbClr val="111827"/>
-                </a:solidFill>
-                <a:latin typeface="Noto Sans Mono CJK SC" pitchFamily="34" charset="0"/>
-                <a:ea typeface="Noto Sans Mono CJK SC" pitchFamily="34" charset="-122"/>
-                <a:cs typeface="Noto Sans Mono CJK SC" pitchFamily="34" charset="-120"/>
-              </a:rPr>
-              <a:t>主要算子与参数</a:t>
-            </a:r>
-            <a:endParaRPr lang="en-US" sz="1060" dirty="0"/>
-          </a:p>
-          <a:p>
-            <a:pPr indent="0" marL="0">
-              <a:buNone/>
-            </a:pPr>
-            <a:r>
-              <a:rPr lang="en-US" sz="1060" dirty="0">
-                <a:solidFill>
-                  <a:srgbClr val="111827"/>
-                </a:solidFill>
-                <a:latin typeface="Noto Sans Mono CJK SC" pitchFamily="34" charset="0"/>
-                <a:ea typeface="Noto Sans Mono CJK SC" pitchFamily="34" charset="-122"/>
-                <a:cs typeface="Noto Sans Mono CJK SC" pitchFamily="34" charset="-120"/>
-              </a:rPr>
-              <a:t>RandomResizedCrop: scale=(0.80,1.00), ratio=(0.90,1.10)</a:t>
-            </a:r>
-            <a:endParaRPr lang="en-US" sz="1060" dirty="0"/>
-          </a:p>
-          <a:p>
-            <a:pPr indent="0" marL="0">
-              <a:buNone/>
-            </a:pPr>
-            <a:r>
-              <a:rPr lang="en-US" sz="1060" dirty="0">
-                <a:solidFill>
-                  <a:srgbClr val="111827"/>
-                </a:solidFill>
-                <a:latin typeface="Noto Sans Mono CJK SC" pitchFamily="34" charset="0"/>
-                <a:ea typeface="Noto Sans Mono CJK SC" pitchFamily="34" charset="-122"/>
-                <a:cs typeface="Noto Sans Mono CJK SC" pitchFamily="34" charset="-120"/>
-              </a:rPr>
-              <a:t>ColorJitter: brightness/contrast/saturation=0.40, hue=0.10, p=0.80</a:t>
-            </a:r>
-            <a:endParaRPr lang="en-US" sz="1060" dirty="0"/>
-          </a:p>
-          <a:p>
-            <a:pPr indent="0" marL="0">
-              <a:buNone/>
-            </a:pPr>
-            <a:r>
-              <a:rPr lang="en-US" sz="1060" dirty="0">
-                <a:solidFill>
-                  <a:srgbClr val="111827"/>
-                </a:solidFill>
-                <a:latin typeface="Noto Sans Mono CJK SC" pitchFamily="34" charset="0"/>
-                <a:ea typeface="Noto Sans Mono CJK SC" pitchFamily="34" charset="-122"/>
-                <a:cs typeface="Noto Sans Mono CJK SC" pitchFamily="34" charset="-120"/>
-              </a:rPr>
-              <a:t>RandomGrayscale: p=0.15</a:t>
-            </a:r>
-            <a:endParaRPr lang="en-US" sz="1060" dirty="0"/>
-          </a:p>
-          <a:p>
-            <a:pPr indent="0" marL="0">
-              <a:buNone/>
-            </a:pPr>
-            <a:r>
-              <a:rPr lang="en-US" sz="1060" dirty="0">
-                <a:solidFill>
-                  <a:srgbClr val="111827"/>
-                </a:solidFill>
-                <a:latin typeface="Noto Sans Mono CJK SC" pitchFamily="34" charset="0"/>
-                <a:ea typeface="Noto Sans Mono CJK SC" pitchFamily="34" charset="-122"/>
-                <a:cs typeface="Noto Sans Mono CJK SC" pitchFamily="34" charset="-120"/>
-              </a:rPr>
-              <a:t>GaussianBlur: kernel_size=5, sigma=(0.1,2.0), p=0.30</a:t>
-            </a:r>
-            <a:endParaRPr lang="en-US" sz="1060" dirty="0"/>
-          </a:p>
-          <a:p>
-            <a:pPr indent="0" marL="0">
-              <a:buNone/>
-            </a:pPr>
-            <a:r>
-              <a:rPr lang="en-US" sz="1060" dirty="0">
-                <a:solidFill>
-                  <a:srgbClr val="111827"/>
-                </a:solidFill>
-                <a:latin typeface="Noto Sans Mono CJK SC" pitchFamily="34" charset="0"/>
-                <a:ea typeface="Noto Sans Mono CJK SC" pitchFamily="34" charset="-122"/>
-                <a:cs typeface="Noto Sans Mono CJK SC" pitchFamily="34" charset="-120"/>
-              </a:rPr>
-              <a:t>RandomErasing: p=0.25, scale=(0.02,0.15)</a:t>
-            </a:r>
-            <a:endParaRPr lang="en-US" sz="1060" dirty="0"/>
+          <a:bodyPr wrap="square" lIns="1397" tIns="1397" rIns="1397" bIns="1397" rtlCol="0" anchor="ctr">
+            <a:normAutofit/>
+          </a:bodyPr>
+          <a:lstStyle/>
+          <a:p>
+            <a:pPr indent="0" marL="0">
+              <a:buNone/>
+            </a:pPr>
+            <a:r>
+              <a:rPr lang="en-US" sz="1070" dirty="0">
+                <a:solidFill>
+                  <a:srgbClr val="111827"/>
+                </a:solidFill>
+                <a:latin typeface="Noto Sans Mono CJK JP" pitchFamily="34" charset="0"/>
+                <a:ea typeface="Noto Sans Mono CJK JP" pitchFamily="34" charset="-122"/>
+                <a:cs typeface="Noto Sans Mono CJK JP" pitchFamily="34" charset="-120"/>
+              </a:rPr>
+              <a:t>报告名称                          性质 / 代码参数</a:t>
+            </a:r>
+            <a:endParaRPr lang="en-US" sz="1070" dirty="0"/>
+          </a:p>
+          <a:p>
+            <a:pPr indent="0" marL="0">
+              <a:buNone/>
+            </a:pPr>
+            <a:r>
+              <a:rPr lang="en-US" sz="1070" dirty="0">
+                <a:solidFill>
+                  <a:srgbClr val="111827"/>
+                </a:solidFill>
+                <a:latin typeface="Noto Sans Mono CJK JP" pitchFamily="34" charset="0"/>
+                <a:ea typeface="Noto Sans Mono CJK JP" pitchFamily="34" charset="-122"/>
+                <a:cs typeface="Noto Sans Mono CJK JP" pitchFamily="34" charset="-120"/>
+              </a:rPr>
+              <a:t>Strong Data Augmentation          项目自定义强增强配置；augmentation=strong</a:t>
+            </a:r>
+            <a:endParaRPr lang="en-US" sz="1070" dirty="0"/>
+          </a:p>
+          <a:p>
+            <a:pPr indent="0" marL="0">
+              <a:buNone/>
+            </a:pPr>
+            <a:r>
+              <a:rPr lang="en-US" sz="1070" dirty="0">
+                <a:solidFill>
+                  <a:srgbClr val="111827"/>
+                </a:solidFill>
+                <a:latin typeface="Noto Sans Mono CJK JP" pitchFamily="34" charset="0"/>
+                <a:ea typeface="Noto Sans Mono CJK JP" pitchFamily="34" charset="-122"/>
+                <a:cs typeface="Noto Sans Mono CJK JP" pitchFamily="34" charset="-120"/>
+              </a:rPr>
+              <a:t>Appearance Randomization          项目自定义外观随机化；augmentation=appearance</a:t>
+            </a:r>
+            <a:endParaRPr lang="en-US" sz="1070" dirty="0"/>
+          </a:p>
+          <a:p>
+            <a:pPr indent="0" marL="0">
+              <a:buNone/>
+            </a:pPr>
+            <a:r>
+              <a:rPr lang="en-US" sz="1070" dirty="0">
+                <a:solidFill>
+                  <a:srgbClr val="111827"/>
+                </a:solidFill>
+                <a:latin typeface="Noto Sans Mono CJK JP" pitchFamily="34" charset="0"/>
+                <a:ea typeface="Noto Sans Mono CJK JP" pitchFamily="34" charset="-122"/>
+                <a:cs typeface="Noto Sans Mono CJK JP" pitchFamily="34" charset="-120"/>
+              </a:rPr>
+              <a:t>MixStyle                          已有正式方法名；method=mixstyle</a:t>
+            </a:r>
+            <a:endParaRPr lang="en-US" sz="1070" dirty="0"/>
+          </a:p>
+          <a:p>
+            <a:pPr indent="0" marL="0">
+              <a:buNone/>
+            </a:pPr>
+            <a:r>
+              <a:rPr lang="en-US" sz="1070" dirty="0">
+                <a:solidFill>
+                  <a:srgbClr val="111827"/>
+                </a:solidFill>
+                <a:latin typeface="Noto Sans Mono CJK JP" pitchFamily="34" charset="0"/>
+                <a:ea typeface="Noto Sans Mono CJK JP" pitchFamily="34" charset="-122"/>
+                <a:cs typeface="Noto Sans Mono CJK JP" pitchFamily="34" charset="-120"/>
+              </a:rPr>
+              <a:t>Fourier Amplitude Augmentation    项目轻量频域实现；method=fourier</a:t>
+            </a:r>
+            <a:endParaRPr lang="en-US" sz="1070" dirty="0"/>
           </a:p>
         </p:txBody>
       </p:sp>
@@ -8032,8 +8502,8 @@
         </p:nvSpPr>
         <p:spPr>
           <a:xfrm>
-            <a:off x="7040880" y="1234440"/>
-            <a:ext cx="4389120" cy="2011680"/>
+            <a:off x="914400" y="3886200"/>
+            <a:ext cx="10241280" cy="1188720"/>
           </a:xfrm>
           <a:prstGeom prst="rect">
             <a:avLst/>
@@ -8052,11 +8522,11 @@
                 <a:solidFill>
                   <a:srgbClr val="111827"/>
                 </a:solidFill>
-                <a:latin typeface="Noto Sans CJK SC" pitchFamily="34" charset="0"/>
-                <a:ea typeface="Noto Sans CJK SC" pitchFamily="34" charset="-122"/>
-                <a:cs typeface="Noto Sans CJK SC" pitchFamily="34" charset="-120"/>
-              </a:rPr>
-              <a:t>CASIA 三项指标明显改善。
+                <a:latin typeface="Noto Sans CJK JP" pitchFamily="34" charset="0"/>
+                <a:ea typeface="Noto Sans CJK JP" pitchFamily="34" charset="-122"/>
+                <a:cs typeface="Noto Sans CJK JP" pitchFamily="34" charset="-120"/>
+              </a:rPr>
+              <a:t>Strong 与 Appearance 不是论文算法名，而是项目自定义实验策略。
 </a:t>
             </a:r>
             <a:endParaRPr lang="en-US" sz="1400" dirty="0"/>
@@ -8067,11 +8537,11 @@
                 <a:solidFill>
                   <a:srgbClr val="111827"/>
                 </a:solidFill>
-                <a:latin typeface="Noto Sans CJK SC" pitchFamily="34" charset="0"/>
-                <a:ea typeface="Noto Sans CJK SC" pitchFamily="34" charset="-122"/>
-                <a:cs typeface="Noto Sans CJK SC" pitchFamily="34" charset="-120"/>
-              </a:rPr>
-              <a:t>MSU-MFSD 的 AUC/EER 未同步改善。
+                <a:latin typeface="Noto Sans CJK JP" pitchFamily="34" charset="0"/>
+                <a:ea typeface="Noto Sans CJK JP" pitchFamily="34" charset="-122"/>
+                <a:cs typeface="Noto Sans CJK JP" pitchFamily="34" charset="-120"/>
+              </a:rPr>
+              <a:t>Appearance Randomization 早期写作 Appearance Augmentation，二者对应同一代码配置。
 </a:t>
             </a:r>
             <a:endParaRPr lang="en-US" sz="1400" dirty="0"/>
@@ -8082,29 +8552,14 @@
                 <a:solidFill>
                   <a:srgbClr val="111827"/>
                 </a:solidFill>
-                <a:latin typeface="Noto Sans CJK SC" pitchFamily="34" charset="0"/>
-                <a:ea typeface="Noto Sans CJK SC" pitchFamily="34" charset="-122"/>
-                <a:cs typeface="Noto Sans CJK SC" pitchFamily="34" charset="-120"/>
-              </a:rPr>
-              <a:t>Replay-Attack 基本无改善。
-</a:t>
+                <a:latin typeface="Noto Sans CJK JP" pitchFamily="34" charset="0"/>
+                <a:ea typeface="Noto Sans CJK JP" pitchFamily="34" charset="-122"/>
+                <a:cs typeface="Noto Sans CJK JP" pitchFamily="34" charset="-120"/>
+              </a:rPr>
+              <a:t>Fourier 是轻量 amplitude augmentation，不包含完整频域 FAS 网络或额外损失。</a:t>
             </a:r>
             <a:endParaRPr lang="en-US" sz="1400" dirty="0"/>
           </a:p>
-          <a:p>
-            <a:r>
-              <a:rPr lang="en-US" sz="1400" dirty="0">
-                <a:solidFill>
-                  <a:srgbClr val="111827"/>
-                </a:solidFill>
-                <a:latin typeface="Noto Sans CJK SC" pitchFamily="34" charset="0"/>
-                <a:ea typeface="Noto Sans CJK SC" pitchFamily="34" charset="-122"/>
-                <a:cs typeface="Noto Sans CJK SC" pitchFamily="34" charset="-120"/>
-              </a:rPr>
-              <a:t>结论：强增强不是稳定域泛化的充分条件。</a:t>
-            </a:r>
-            <a:endParaRPr lang="en-US" sz="1400" dirty="0"/>
-          </a:p>
         </p:txBody>
       </p:sp>
       <p:sp>
@@ -8115,8 +8570,8 @@
         </p:nvSpPr>
         <p:spPr>
           <a:xfrm>
-            <a:off x="7040880" y="3886200"/>
-            <a:ext cx="2468880" cy="201168"/>
+            <a:off x="10424160" y="6565392"/>
+            <a:ext cx="1325880" cy="155448"/>
           </a:xfrm>
           <a:prstGeom prst="rect">
             <a:avLst/>
@@ -8130,183 +8585,19 @@
           </a:bodyPr>
           <a:lstStyle/>
           <a:p>
-            <a:pPr algn="ctr" indent="0" marL="0">
-              <a:buNone/>
-            </a:pPr>
-            <a:r>
-              <a:rPr lang="en-US" sz="880" dirty="0">
+            <a:pPr algn="r" indent="0" marL="0">
+              <a:buNone/>
+            </a:pPr>
+            <a:r>
+              <a:rPr lang="en-US" sz="750" dirty="0">
                 <a:solidFill>
                   <a:srgbClr val="4B5563"/>
                 </a:solidFill>
-                <a:latin typeface="Noto Sans CJK SC" pitchFamily="34" charset="0"/>
-                <a:ea typeface="Noto Sans CJK SC" pitchFamily="34" charset="-122"/>
-                <a:cs typeface="Noto Sans CJK SC" pitchFamily="34" charset="-120"/>
-              </a:rPr>
-              <a:t>CASIA AUC</a:t>
-            </a:r>
-            <a:endParaRPr lang="en-US" sz="880" dirty="0"/>
-          </a:p>
-        </p:txBody>
-      </p:sp>
-      <p:sp>
-        <p:nvSpPr>
-          <p:cNvPr id="7" name="Text 5"/>
-          <p:cNvSpPr/>
-          <p:nvPr/>
-        </p:nvSpPr>
-        <p:spPr>
-          <a:xfrm>
-            <a:off x="7040880" y="4105656"/>
-            <a:ext cx="2468880" cy="384048"/>
-          </a:xfrm>
-          <a:prstGeom prst="rect">
-            <a:avLst/>
-          </a:prstGeom>
-          <a:noFill/>
-          <a:ln/>
-        </p:spPr>
-        <p:txBody>
-          <a:bodyPr wrap="square" lIns="635" tIns="635" rIns="635" bIns="635" rtlCol="0" anchor="ctr">
-            <a:normAutofit/>
-          </a:bodyPr>
-          <a:lstStyle/>
-          <a:p>
-            <a:pPr algn="ctr" indent="0" marL="0">
-              <a:buNone/>
-            </a:pPr>
-            <a:r>
-              <a:rPr lang="en-US" sz="1900" b="1" dirty="0">
-                <a:solidFill>
-                  <a:srgbClr val="078080"/>
-                </a:solidFill>
-                <a:latin typeface="Noto Sans CJK SC" pitchFamily="34" charset="0"/>
-                <a:ea typeface="Noto Sans CJK SC" pitchFamily="34" charset="-122"/>
-                <a:cs typeface="Noto Sans CJK SC" pitchFamily="34" charset="-120"/>
-              </a:rPr>
-              <a:t>23.40 → 41.93</a:t>
-            </a:r>
-            <a:endParaRPr lang="en-US" sz="1900" dirty="0"/>
-          </a:p>
-        </p:txBody>
-      </p:sp>
-      <p:sp>
-        <p:nvSpPr>
-          <p:cNvPr id="8" name="Text 6"/>
-          <p:cNvSpPr/>
-          <p:nvPr/>
-        </p:nvSpPr>
-        <p:spPr>
-          <a:xfrm>
-            <a:off x="9601200" y="3886200"/>
-            <a:ext cx="1463040" cy="201168"/>
-          </a:xfrm>
-          <a:prstGeom prst="rect">
-            <a:avLst/>
-          </a:prstGeom>
-          <a:noFill/>
-          <a:ln/>
-        </p:spPr>
-        <p:txBody>
-          <a:bodyPr wrap="square" lIns="635" tIns="635" rIns="635" bIns="635" rtlCol="0" anchor="ctr">
-            <a:normAutofit/>
-          </a:bodyPr>
-          <a:lstStyle/>
-          <a:p>
-            <a:pPr algn="ctr" indent="0" marL="0">
-              <a:buNone/>
-            </a:pPr>
-            <a:r>
-              <a:rPr lang="en-US" sz="880" dirty="0">
-                <a:solidFill>
-                  <a:srgbClr val="4B5563"/>
-                </a:solidFill>
-                <a:latin typeface="Noto Sans CJK SC" pitchFamily="34" charset="0"/>
-                <a:ea typeface="Noto Sans CJK SC" pitchFamily="34" charset="-122"/>
-                <a:cs typeface="Noto Sans CJK SC" pitchFamily="34" charset="-120"/>
-              </a:rPr>
-              <a:t>完整改善</a:t>
-            </a:r>
-            <a:endParaRPr lang="en-US" sz="880" dirty="0"/>
-          </a:p>
-        </p:txBody>
-      </p:sp>
-      <p:sp>
-        <p:nvSpPr>
-          <p:cNvPr id="9" name="Text 7"/>
-          <p:cNvSpPr/>
-          <p:nvPr/>
-        </p:nvSpPr>
-        <p:spPr>
-          <a:xfrm>
-            <a:off x="9601200" y="4105656"/>
-            <a:ext cx="1463040" cy="384048"/>
-          </a:xfrm>
-          <a:prstGeom prst="rect">
-            <a:avLst/>
-          </a:prstGeom>
-          <a:noFill/>
-          <a:ln/>
-        </p:spPr>
-        <p:txBody>
-          <a:bodyPr wrap="square" lIns="635" tIns="635" rIns="635" bIns="635" rtlCol="0" anchor="ctr">
-            <a:normAutofit/>
-          </a:bodyPr>
-          <a:lstStyle/>
-          <a:p>
-            <a:pPr algn="ctr" indent="0" marL="0">
-              <a:buNone/>
-            </a:pPr>
-            <a:r>
-              <a:rPr lang="en-US" sz="1900" b="1" dirty="0">
-                <a:solidFill>
-                  <a:srgbClr val="B86B00"/>
-                </a:solidFill>
-                <a:latin typeface="Noto Sans CJK SC" pitchFamily="34" charset="0"/>
-                <a:ea typeface="Noto Sans CJK SC" pitchFamily="34" charset="-122"/>
-                <a:cs typeface="Noto Sans CJK SC" pitchFamily="34" charset="-120"/>
-              </a:rPr>
-              <a:t>1/3</a:t>
-            </a:r>
-            <a:endParaRPr lang="en-US" sz="1900" dirty="0"/>
-          </a:p>
-        </p:txBody>
-      </p:sp>
-      <p:sp>
-        <p:nvSpPr>
-          <p:cNvPr id="10" name="Text 8"/>
-          <p:cNvSpPr/>
-          <p:nvPr/>
-        </p:nvSpPr>
-        <p:spPr>
-          <a:xfrm>
-            <a:off x="10424160" y="6565392"/>
-            <a:ext cx="1280160" cy="137160"/>
-          </a:xfrm>
-          <a:prstGeom prst="rect">
-            <a:avLst/>
-          </a:prstGeom>
-          <a:noFill/>
-          <a:ln/>
-        </p:spPr>
-        <p:txBody>
-          <a:bodyPr wrap="square" lIns="635" tIns="635" rIns="635" bIns="635" rtlCol="0" anchor="ctr">
-            <a:normAutofit/>
-          </a:bodyPr>
-          <a:lstStyle/>
-          <a:p>
-            <a:pPr algn="r" indent="0" marL="0">
-              <a:buNone/>
-            </a:pPr>
-            <a:r>
-              <a:rPr lang="en-US" sz="750" dirty="0">
-                <a:solidFill>
-                  <a:srgbClr val="4B5563"/>
-                </a:solidFill>
-                <a:latin typeface="Noto Sans CJK SC" pitchFamily="34" charset="0"/>
-                <a:ea typeface="Noto Sans CJK SC" pitchFamily="34" charset="-122"/>
-                <a:cs typeface="Noto Sans CJK SC" pitchFamily="34" charset="-120"/>
-              </a:rPr>
-              <a:t>FAS 实验答辩  ·  8</a:t>
+                <a:latin typeface="Noto Sans CJK JP" pitchFamily="34" charset="0"/>
+                <a:ea typeface="Noto Sans CJK JP" pitchFamily="34" charset="-122"/>
+                <a:cs typeface="Noto Sans CJK JP" pitchFamily="34" charset="-120"/>
+              </a:rPr>
+              <a:t>FAS 最终答辩 · 8</a:t>
             </a:r>
             <a:endParaRPr lang="en-US" sz="750" dirty="0"/>
           </a:p>
@@ -8352,8 +8643,8 @@
         </p:nvSpPr>
         <p:spPr>
           <a:xfrm>
-            <a:off x="502920" y="310896"/>
-            <a:ext cx="11064240" cy="384048"/>
+            <a:off x="502920" y="274320"/>
+            <a:ext cx="11155680" cy="438912"/>
           </a:xfrm>
           <a:prstGeom prst="rect">
             <a:avLst/>
@@ -8362,24 +8653,26 @@
           <a:ln/>
         </p:spPr>
         <p:txBody>
-          <a:bodyPr wrap="square" lIns="0" tIns="0" rIns="0" bIns="0" rtlCol="0" anchor="ctr"/>
-          <a:lstStyle/>
-          <a:p>
-            <a:pPr indent="0" marL="0">
-              <a:buNone/>
-            </a:pPr>
-            <a:r>
-              <a:rPr lang="en-US" sz="2300" b="1" dirty="0">
+          <a:bodyPr wrap="square" lIns="0" tIns="0" rIns="0" bIns="0" rtlCol="0" anchor="ctr">
+            <a:normAutofit/>
+          </a:bodyPr>
+          <a:lstStyle/>
+          <a:p>
+            <a:pPr indent="0" marL="0">
+              <a:buNone/>
+            </a:pPr>
+            <a:r>
+              <a:rPr lang="en-US" sz="2400" b="1" dirty="0">
                 <a:solidFill>
                   <a:srgbClr val="1F4E79"/>
                 </a:solidFill>
-                <a:latin typeface="Noto Sans CJK SC" pitchFamily="34" charset="0"/>
-                <a:ea typeface="Noto Sans CJK SC" pitchFamily="34" charset="-122"/>
-                <a:cs typeface="Noto Sans CJK SC" pitchFamily="34" charset="-120"/>
-              </a:rPr>
-              <a:t>Appearance Randomization</a:t>
-            </a:r>
-            <a:endParaRPr lang="en-US" sz="2300" dirty="0"/>
+                <a:latin typeface="Noto Sans CJK JP" pitchFamily="34" charset="0"/>
+                <a:ea typeface="Noto Sans CJK JP" pitchFamily="34" charset="-122"/>
+                <a:cs typeface="Noto Sans CJK JP" pitchFamily="34" charset="-120"/>
+              </a:rPr>
+              <a:t>Strong 与 Appearance：两类像素空间策略</a:t>
+            </a:r>
+            <a:endParaRPr lang="en-US" sz="2400" dirty="0"/>
           </a:p>
         </p:txBody>
       </p:sp>
@@ -8401,24 +8694,26 @@
           <a:ln/>
         </p:spPr>
         <p:txBody>
-          <a:bodyPr wrap="square" lIns="0" tIns="0" rIns="0" bIns="0" rtlCol="0" anchor="ctr"/>
-          <a:lstStyle/>
-          <a:p>
-            <a:pPr indent="0" marL="0">
-              <a:buNone/>
-            </a:pPr>
-            <a:r>
-              <a:rPr lang="en-US" sz="950" dirty="0">
+          <a:bodyPr wrap="square" lIns="0" tIns="0" rIns="0" bIns="0" rtlCol="0" anchor="ctr">
+            <a:normAutofit/>
+          </a:bodyPr>
+          <a:lstStyle/>
+          <a:p>
+            <a:pPr indent="0" marL="0">
+              <a:buNone/>
+            </a:pPr>
+            <a:r>
+              <a:rPr lang="en-US" sz="1000" dirty="0">
                 <a:solidFill>
                   <a:srgbClr val="4B5563"/>
                 </a:solidFill>
-                <a:latin typeface="Noto Sans CJK SC" pitchFamily="34" charset="0"/>
-                <a:ea typeface="Noto Sans CJK SC" pitchFamily="34" charset="-122"/>
-                <a:cs typeface="Noto Sans CJK SC" pitchFamily="34" charset="-120"/>
-              </a:rPr>
-              <a:t>项目自定义外观/成像风格随机化</a:t>
-            </a:r>
-            <a:endParaRPr lang="en-US" sz="950" dirty="0"/>
+                <a:latin typeface="Noto Sans CJK JP" pitchFamily="34" charset="0"/>
+                <a:ea typeface="Noto Sans CJK JP" pitchFamily="34" charset="-122"/>
+                <a:cs typeface="Noto Sans CJK JP" pitchFamily="34" charset="-120"/>
+              </a:rPr>
+              <a:t>均为项目自定义训练配置</a:t>
+            </a:r>
+            <a:endParaRPr lang="en-US" sz="1000" dirty="0"/>
           </a:p>
         </p:txBody>
       </p:sp>
@@ -8430,8 +8725,8 @@
         </p:nvSpPr>
         <p:spPr>
           <a:xfrm>
-            <a:off x="777240" y="1143000"/>
-            <a:ext cx="5577840" cy="2240280"/>
+            <a:off x="685800" y="1143000"/>
+            <a:ext cx="5303520" cy="2377440"/>
           </a:xfrm>
           <a:prstGeom prst="rect">
             <a:avLst/>
@@ -8446,94 +8741,111 @@
           </a:ln>
         </p:spPr>
         <p:txBody>
-          <a:bodyPr wrap="square" lIns="1270" tIns="1270" rIns="1270" bIns="1270" rtlCol="0" anchor="ctr">
-            <a:normAutofit/>
-          </a:bodyPr>
-          <a:lstStyle/>
-          <a:p>
-            <a:pPr indent="0" marL="0">
-              <a:buNone/>
-            </a:pPr>
-            <a:r>
-              <a:rPr lang="en-US" sz="1100" dirty="0">
-                <a:solidFill>
-                  <a:srgbClr val="111827"/>
-                </a:solidFill>
-                <a:latin typeface="Noto Sans Mono CJK SC" pitchFamily="34" charset="0"/>
-                <a:ea typeface="Noto Sans Mono CJK SC" pitchFamily="34" charset="-122"/>
-                <a:cs typeface="Noto Sans Mono CJK SC" pitchFamily="34" charset="-120"/>
-              </a:rPr>
-              <a:t>相对 Strong 的关键差异</a:t>
-            </a:r>
-            <a:endParaRPr lang="en-US" sz="1100" dirty="0"/>
-          </a:p>
-          <a:p>
-            <a:pPr indent="0" marL="0">
-              <a:buNone/>
-            </a:pPr>
-            <a:r>
-              <a:rPr lang="en-US" sz="1100" dirty="0">
-                <a:solidFill>
-                  <a:srgbClr val="111827"/>
-                </a:solidFill>
-                <a:latin typeface="Noto Sans Mono CJK SC" pitchFamily="34" charset="0"/>
-                <a:ea typeface="Noto Sans Mono CJK SC" pitchFamily="34" charset="-122"/>
-                <a:cs typeface="Noto Sans Mono CJK SC" pitchFamily="34" charset="-120"/>
-              </a:rPr>
-              <a:t>删除 RandomResizedCrop：避免破坏完整人脸区域</a:t>
-            </a:r>
-            <a:endParaRPr lang="en-US" sz="1100" dirty="0"/>
-          </a:p>
-          <a:p>
-            <a:pPr indent="0" marL="0">
-              <a:buNone/>
-            </a:pPr>
-            <a:r>
-              <a:rPr lang="en-US" sz="1100" dirty="0">
-                <a:solidFill>
-                  <a:srgbClr val="111827"/>
-                </a:solidFill>
-                <a:latin typeface="Noto Sans Mono CJK SC" pitchFamily="34" charset="0"/>
-                <a:ea typeface="Noto Sans Mono CJK SC" pitchFamily="34" charset="-122"/>
-                <a:cs typeface="Noto Sans Mono CJK SC" pitchFamily="34" charset="-120"/>
-              </a:rPr>
-              <a:t>删除 RandomErasing：避免破坏 FAS 细粒度纹理</a:t>
-            </a:r>
-            <a:endParaRPr lang="en-US" sz="1100" dirty="0"/>
-          </a:p>
-          <a:p>
-            <a:pPr indent="0" marL="0">
-              <a:buNone/>
-            </a:pPr>
-            <a:r>
-              <a:rPr lang="en-US" sz="1100" dirty="0">
-                <a:solidFill>
-                  <a:srgbClr val="111827"/>
-                </a:solidFill>
-                <a:latin typeface="Noto Sans Mono CJK SC" pitchFamily="34" charset="0"/>
-                <a:ea typeface="Noto Sans Mono CJK SC" pitchFamily="34" charset="-122"/>
-                <a:cs typeface="Noto Sans Mono CJK SC" pitchFamily="34" charset="-120"/>
-              </a:rPr>
-              <a:t>保留 ColorJitter / Grayscale：随机化颜色与灰度统计</a:t>
-            </a:r>
-            <a:endParaRPr lang="en-US" sz="1100" dirty="0"/>
-          </a:p>
-          <a:p>
-            <a:pPr indent="0" marL="0">
-              <a:buNone/>
-            </a:pPr>
-            <a:r>
-              <a:rPr lang="en-US" sz="1100" dirty="0">
-                <a:solidFill>
-                  <a:srgbClr val="111827"/>
-                </a:solidFill>
-                <a:latin typeface="Noto Sans Mono CJK SC" pitchFamily="34" charset="0"/>
-                <a:ea typeface="Noto Sans Mono CJK SC" pitchFamily="34" charset="-122"/>
-                <a:cs typeface="Noto Sans Mono CJK SC" pitchFamily="34" charset="-120"/>
-              </a:rPr>
-              <a:t>加入 Autocontrast / Sharpness：模拟成像风格与清晰度差异</a:t>
-            </a:r>
-            <a:endParaRPr lang="en-US" sz="1100" dirty="0"/>
+          <a:bodyPr wrap="square" lIns="1397" tIns="1397" rIns="1397" bIns="1397" rtlCol="0" anchor="ctr">
+            <a:normAutofit/>
+          </a:bodyPr>
+          <a:lstStyle/>
+          <a:p>
+            <a:pPr indent="0" marL="0">
+              <a:buNone/>
+            </a:pPr>
+            <a:r>
+              <a:rPr lang="en-US" sz="1060" dirty="0">
+                <a:solidFill>
+                  <a:srgbClr val="111827"/>
+                </a:solidFill>
+                <a:latin typeface="Noto Sans Mono CJK JP" pitchFamily="34" charset="0"/>
+                <a:ea typeface="Noto Sans Mono CJK JP" pitchFamily="34" charset="-122"/>
+                <a:cs typeface="Noto Sans Mono CJK JP" pitchFamily="34" charset="-120"/>
+              </a:rPr>
+              <a:t>Strong Data Augmentation</a:t>
+            </a:r>
+            <a:endParaRPr lang="en-US" sz="1060" dirty="0"/>
+          </a:p>
+          <a:p>
+            <a:pPr indent="0" marL="0">
+              <a:buNone/>
+            </a:pPr>
+            <a:r>
+              <a:rPr lang="en-US" sz="1060" dirty="0">
+                <a:solidFill>
+                  <a:srgbClr val="111827"/>
+                </a:solidFill>
+                <a:latin typeface="Noto Sans Mono CJK JP" pitchFamily="34" charset="0"/>
+                <a:ea typeface="Noto Sans Mono CJK JP" pitchFamily="34" charset="-122"/>
+                <a:cs typeface="Noto Sans Mono CJK JP" pitchFamily="34" charset="-120"/>
+              </a:rPr>
+              <a:t>RandomResizedCrop scale=(0.80,1.00)</a:t>
+            </a:r>
+            <a:endParaRPr lang="en-US" sz="1060" dirty="0"/>
+          </a:p>
+          <a:p>
+            <a:pPr indent="0" marL="0">
+              <a:buNone/>
+            </a:pPr>
+            <a:r>
+              <a:rPr lang="en-US" sz="1060" dirty="0">
+                <a:solidFill>
+                  <a:srgbClr val="111827"/>
+                </a:solidFill>
+                <a:latin typeface="Noto Sans Mono CJK JP" pitchFamily="34" charset="0"/>
+                <a:ea typeface="Noto Sans Mono CJK JP" pitchFamily="34" charset="-122"/>
+                <a:cs typeface="Noto Sans Mono CJK JP" pitchFamily="34" charset="-120"/>
+              </a:rPr>
+              <a:t>ColorJitter 0.40/0.40/0.40/0.10, p=0.80</a:t>
+            </a:r>
+            <a:endParaRPr lang="en-US" sz="1060" dirty="0"/>
+          </a:p>
+          <a:p>
+            <a:pPr indent="0" marL="0">
+              <a:buNone/>
+            </a:pPr>
+            <a:r>
+              <a:rPr lang="en-US" sz="1060" dirty="0">
+                <a:solidFill>
+                  <a:srgbClr val="111827"/>
+                </a:solidFill>
+                <a:latin typeface="Noto Sans Mono CJK JP" pitchFamily="34" charset="0"/>
+                <a:ea typeface="Noto Sans Mono CJK JP" pitchFamily="34" charset="-122"/>
+                <a:cs typeface="Noto Sans Mono CJK JP" pitchFamily="34" charset="-120"/>
+              </a:rPr>
+              <a:t>RandomGrayscale p=0.15</a:t>
+            </a:r>
+            <a:endParaRPr lang="en-US" sz="1060" dirty="0"/>
+          </a:p>
+          <a:p>
+            <a:pPr indent="0" marL="0">
+              <a:buNone/>
+            </a:pPr>
+            <a:r>
+              <a:rPr lang="en-US" sz="1060" dirty="0">
+                <a:solidFill>
+                  <a:srgbClr val="111827"/>
+                </a:solidFill>
+                <a:latin typeface="Noto Sans Mono CJK JP" pitchFamily="34" charset="0"/>
+                <a:ea typeface="Noto Sans Mono CJK JP" pitchFamily="34" charset="-122"/>
+                <a:cs typeface="Noto Sans Mono CJK JP" pitchFamily="34" charset="-120"/>
+              </a:rPr>
+              <a:t>GaussianBlur k=5, p=0.30</a:t>
+            </a:r>
+            <a:endParaRPr lang="en-US" sz="1060" dirty="0"/>
+          </a:p>
+          <a:p>
+            <a:pPr indent="0" marL="0">
+              <a:buNone/>
+            </a:pPr>
+            <a:r>
+              <a:rPr lang="en-US" sz="1060" dirty="0">
+                <a:solidFill>
+                  <a:srgbClr val="111827"/>
+                </a:solidFill>
+                <a:latin typeface="Noto Sans Mono CJK JP" pitchFamily="34" charset="0"/>
+                <a:ea typeface="Noto Sans Mono CJK JP" pitchFamily="34" charset="-122"/>
+                <a:cs typeface="Noto Sans Mono CJK JP" pitchFamily="34" charset="-120"/>
+              </a:rPr>
+              <a:t>RandomErasing p=0.25</a:t>
+            </a:r>
+            <a:endParaRPr lang="en-US" sz="1060" dirty="0"/>
           </a:p>
         </p:txBody>
       </p:sp>
@@ -8545,8 +8857,157 @@
         </p:nvSpPr>
         <p:spPr>
           <a:xfrm>
-            <a:off x="6720840" y="1234440"/>
-            <a:ext cx="4663440" cy="2194560"/>
+            <a:off x="6355080" y="1143000"/>
+            <a:ext cx="5303520" cy="2377440"/>
+          </a:xfrm>
+          <a:prstGeom prst="rect">
+            <a:avLst/>
+          </a:prstGeom>
+          <a:solidFill>
+            <a:srgbClr val="FFFFFF"/>
+          </a:solidFill>
+          <a:ln w="6350">
+            <a:solidFill>
+              <a:srgbClr val="C9D6E3"/>
+            </a:solidFill>
+          </a:ln>
+        </p:spPr>
+        <p:txBody>
+          <a:bodyPr wrap="square" lIns="1397" tIns="1397" rIns="1397" bIns="1397" rtlCol="0" anchor="ctr">
+            <a:normAutofit/>
+          </a:bodyPr>
+          <a:lstStyle/>
+          <a:p>
+            <a:pPr indent="0" marL="0">
+              <a:buNone/>
+            </a:pPr>
+            <a:r>
+              <a:rPr lang="en-US" sz="1020" dirty="0">
+                <a:solidFill>
+                  <a:srgbClr val="111827"/>
+                </a:solidFill>
+                <a:latin typeface="Noto Sans Mono CJK JP" pitchFamily="34" charset="0"/>
+                <a:ea typeface="Noto Sans Mono CJK JP" pitchFamily="34" charset="-122"/>
+                <a:cs typeface="Noto Sans Mono CJK JP" pitchFamily="34" charset="-120"/>
+              </a:rPr>
+              <a:t>Appearance Randomization</a:t>
+            </a:r>
+            <a:endParaRPr lang="en-US" sz="1020" dirty="0"/>
+          </a:p>
+          <a:p>
+            <a:pPr indent="0" marL="0">
+              <a:buNone/>
+            </a:pPr>
+            <a:r>
+              <a:rPr lang="en-US" sz="1020" dirty="0">
+                <a:solidFill>
+                  <a:srgbClr val="111827"/>
+                </a:solidFill>
+                <a:latin typeface="Noto Sans Mono CJK JP" pitchFamily="34" charset="0"/>
+                <a:ea typeface="Noto Sans Mono CJK JP" pitchFamily="34" charset="-122"/>
+                <a:cs typeface="Noto Sans Mono CJK JP" pitchFamily="34" charset="-120"/>
+              </a:rPr>
+              <a:t>不使用 RandomResizedCrop / RandomErasing</a:t>
+            </a:r>
+            <a:endParaRPr lang="en-US" sz="1020" dirty="0"/>
+          </a:p>
+          <a:p>
+            <a:pPr indent="0" marL="0">
+              <a:buNone/>
+            </a:pPr>
+            <a:r>
+              <a:rPr lang="en-US" sz="1020" dirty="0">
+                <a:solidFill>
+                  <a:srgbClr val="111827"/>
+                </a:solidFill>
+                <a:latin typeface="Noto Sans Mono CJK JP" pitchFamily="34" charset="0"/>
+                <a:ea typeface="Noto Sans Mono CJK JP" pitchFamily="34" charset="-122"/>
+                <a:cs typeface="Noto Sans Mono CJK JP" pitchFamily="34" charset="-120"/>
+              </a:rPr>
+              <a:t>ColorJitter 0.35/0.35/0.30/0.05, p=0.80</a:t>
+            </a:r>
+            <a:endParaRPr lang="en-US" sz="1020" dirty="0"/>
+          </a:p>
+          <a:p>
+            <a:pPr indent="0" marL="0">
+              <a:buNone/>
+            </a:pPr>
+            <a:r>
+              <a:rPr lang="en-US" sz="1020" dirty="0">
+                <a:solidFill>
+                  <a:srgbClr val="111827"/>
+                </a:solidFill>
+                <a:latin typeface="Noto Sans Mono CJK JP" pitchFamily="34" charset="0"/>
+                <a:ea typeface="Noto Sans Mono CJK JP" pitchFamily="34" charset="-122"/>
+                <a:cs typeface="Noto Sans Mono CJK JP" pitchFamily="34" charset="-120"/>
+              </a:rPr>
+              <a:t>RandomGrayscale p=0.10</a:t>
+            </a:r>
+            <a:endParaRPr lang="en-US" sz="1020" dirty="0"/>
+          </a:p>
+          <a:p>
+            <a:pPr indent="0" marL="0">
+              <a:buNone/>
+            </a:pPr>
+            <a:r>
+              <a:rPr lang="en-US" sz="1020" dirty="0">
+                <a:solidFill>
+                  <a:srgbClr val="111827"/>
+                </a:solidFill>
+                <a:latin typeface="Noto Sans Mono CJK JP" pitchFamily="34" charset="0"/>
+                <a:ea typeface="Noto Sans Mono CJK JP" pitchFamily="34" charset="-122"/>
+                <a:cs typeface="Noto Sans Mono CJK JP" pitchFamily="34" charset="-120"/>
+              </a:rPr>
+              <a:t>RandomAutocontrast p=0.15</a:t>
+            </a:r>
+            <a:endParaRPr lang="en-US" sz="1020" dirty="0"/>
+          </a:p>
+          <a:p>
+            <a:pPr indent="0" marL="0">
+              <a:buNone/>
+            </a:pPr>
+            <a:r>
+              <a:rPr lang="en-US" sz="1020" dirty="0">
+                <a:solidFill>
+                  <a:srgbClr val="111827"/>
+                </a:solidFill>
+                <a:latin typeface="Noto Sans Mono CJK JP" pitchFamily="34" charset="0"/>
+                <a:ea typeface="Noto Sans Mono CJK JP" pitchFamily="34" charset="-122"/>
+                <a:cs typeface="Noto Sans Mono CJK JP" pitchFamily="34" charset="-120"/>
+              </a:rPr>
+              <a:t>GaussianBlur k=3, p=0.15</a:t>
+            </a:r>
+            <a:endParaRPr lang="en-US" sz="1020" dirty="0"/>
+          </a:p>
+          <a:p>
+            <a:pPr indent="0" marL="0">
+              <a:buNone/>
+            </a:pPr>
+            <a:r>
+              <a:rPr lang="en-US" sz="1020" dirty="0">
+                <a:solidFill>
+                  <a:srgbClr val="111827"/>
+                </a:solidFill>
+                <a:latin typeface="Noto Sans Mono CJK JP" pitchFamily="34" charset="0"/>
+                <a:ea typeface="Noto Sans Mono CJK JP" pitchFamily="34" charset="-122"/>
+                <a:cs typeface="Noto Sans Mono CJK JP" pitchFamily="34" charset="-120"/>
+              </a:rPr>
+              <a:t>RandomAdjustSharpness p=0.10</a:t>
+            </a:r>
+            <a:endParaRPr lang="en-US" sz="1020" dirty="0"/>
+          </a:p>
+        </p:txBody>
+      </p:sp>
+      <p:sp>
+        <p:nvSpPr>
+          <p:cNvPr id="6" name="Text 4"/>
+          <p:cNvSpPr/>
+          <p:nvPr/>
+        </p:nvSpPr>
+        <p:spPr>
+          <a:xfrm>
+            <a:off x="1005840" y="4297680"/>
+            <a:ext cx="10241280" cy="640080"/>
           </a:xfrm>
           <a:prstGeom prst="rect">
             <a:avLst/>
@@ -8560,76 +9021,34 @@
           </a:bodyPr>
           <a:lstStyle/>
           <a:p>
-            <a:r>
-              <a:rPr lang="en-US" sz="1400" dirty="0">
-                <a:solidFill>
-                  <a:srgbClr val="111827"/>
-                </a:solidFill>
-                <a:latin typeface="Noto Sans CJK SC" pitchFamily="34" charset="0"/>
-                <a:ea typeface="Noto Sans CJK SC" pitchFamily="34" charset="-122"/>
-                <a:cs typeface="Noto Sans CJK SC" pitchFamily="34" charset="-120"/>
-              </a:rPr>
-              <a:t>Replay-Attack 上 Accuracy/AUC/EER 同时改善。
-</a:t>
-            </a:r>
-            <a:endParaRPr lang="en-US" sz="1400" dirty="0"/>
-          </a:p>
-          <a:p>
-            <a:r>
-              <a:rPr lang="en-US" sz="1400" dirty="0">
-                <a:solidFill>
-                  <a:srgbClr val="111827"/>
-                </a:solidFill>
-                <a:latin typeface="Noto Sans CJK SC" pitchFamily="34" charset="0"/>
-                <a:ea typeface="Noto Sans CJK SC" pitchFamily="34" charset="-122"/>
-                <a:cs typeface="Noto Sans CJK SC" pitchFamily="34" charset="-120"/>
-              </a:rPr>
-              <a:t>CASIA 有改善但不如 Strong。
-</a:t>
-            </a:r>
-            <a:endParaRPr lang="en-US" sz="1400" dirty="0"/>
-          </a:p>
-          <a:p>
-            <a:r>
-              <a:rPr lang="en-US" sz="1400" dirty="0">
-                <a:solidFill>
-                  <a:srgbClr val="111827"/>
-                </a:solidFill>
-                <a:latin typeface="Noto Sans CJK SC" pitchFamily="34" charset="0"/>
-                <a:ea typeface="Noto Sans CJK SC" pitchFamily="34" charset="-122"/>
-                <a:cs typeface="Noto Sans CJK SC" pitchFamily="34" charset="-120"/>
-              </a:rPr>
-              <a:t>MSU-MFSD 三项指标退化。
-</a:t>
-            </a:r>
-            <a:endParaRPr lang="en-US" sz="1400" dirty="0"/>
-          </a:p>
-          <a:p>
-            <a:r>
-              <a:rPr lang="en-US" sz="1400" dirty="0">
-                <a:solidFill>
-                  <a:srgbClr val="111827"/>
-                </a:solidFill>
-                <a:latin typeface="Noto Sans CJK SC" pitchFamily="34" charset="0"/>
-                <a:ea typeface="Noto Sans CJK SC" pitchFamily="34" charset="-122"/>
-                <a:cs typeface="Noto Sans CJK SC" pitchFamily="34" charset="-120"/>
-              </a:rPr>
-              <a:t>结论：外观随机化覆盖部分域偏移，但不能稳定覆盖全部目标域。</a:t>
-            </a:r>
-            <a:endParaRPr lang="en-US" sz="1400" dirty="0"/>
-          </a:p>
-        </p:txBody>
-      </p:sp>
-      <p:sp>
-        <p:nvSpPr>
-          <p:cNvPr id="6" name="Text 4"/>
-          <p:cNvSpPr/>
-          <p:nvPr/>
-        </p:nvSpPr>
-        <p:spPr>
-          <a:xfrm>
-            <a:off x="6720840" y="3886200"/>
-            <a:ext cx="2468880" cy="201168"/>
+            <a:pPr algn="ctr" indent="0" marL="0">
+              <a:buNone/>
+            </a:pPr>
+            <a:r>
+              <a:rPr lang="en-US" sz="1500" b="1" dirty="0">
+                <a:solidFill>
+                  <a:srgbClr val="111827"/>
+                </a:solidFill>
+                <a:latin typeface="Noto Sans CJK JP" pitchFamily="34" charset="0"/>
+                <a:ea typeface="Noto Sans CJK JP" pitchFamily="34" charset="-122"/>
+                <a:cs typeface="Noto Sans CJK JP" pitchFamily="34" charset="-120"/>
+              </a:rPr>
+              <a:t>结果：Strong 主要改善 CASIA；Appearance 主要改善 Replay-Attack。二者均未实现三个目标域稳定提升。</a:t>
+            </a:r>
+            <a:endParaRPr lang="en-US" sz="1500" dirty="0"/>
+          </a:p>
+        </p:txBody>
+      </p:sp>
+      <p:sp>
+        <p:nvSpPr>
+          <p:cNvPr id="7" name="Text 5"/>
+          <p:cNvSpPr/>
+          <p:nvPr/>
+        </p:nvSpPr>
+        <p:spPr>
+          <a:xfrm>
+            <a:off x="10424160" y="6565392"/>
+            <a:ext cx="1325880" cy="155448"/>
           </a:xfrm>
           <a:prstGeom prst="rect">
             <a:avLst/>
@@ -8643,183 +9062,19 @@
           </a:bodyPr>
           <a:lstStyle/>
           <a:p>
-            <a:pPr algn="ctr" indent="0" marL="0">
-              <a:buNone/>
-            </a:pPr>
-            <a:r>
-              <a:rPr lang="en-US" sz="880" dirty="0">
+            <a:pPr algn="r" indent="0" marL="0">
+              <a:buNone/>
+            </a:pPr>
+            <a:r>
+              <a:rPr lang="en-US" sz="750" dirty="0">
                 <a:solidFill>
                   <a:srgbClr val="4B5563"/>
                 </a:solidFill>
-                <a:latin typeface="Noto Sans CJK SC" pitchFamily="34" charset="0"/>
-                <a:ea typeface="Noto Sans CJK SC" pitchFamily="34" charset="-122"/>
-                <a:cs typeface="Noto Sans CJK SC" pitchFamily="34" charset="-120"/>
-              </a:rPr>
-              <a:t>Replay AUC</a:t>
-            </a:r>
-            <a:endParaRPr lang="en-US" sz="880" dirty="0"/>
-          </a:p>
-        </p:txBody>
-      </p:sp>
-      <p:sp>
-        <p:nvSpPr>
-          <p:cNvPr id="7" name="Text 5"/>
-          <p:cNvSpPr/>
-          <p:nvPr/>
-        </p:nvSpPr>
-        <p:spPr>
-          <a:xfrm>
-            <a:off x="6720840" y="4105656"/>
-            <a:ext cx="2468880" cy="384048"/>
-          </a:xfrm>
-          <a:prstGeom prst="rect">
-            <a:avLst/>
-          </a:prstGeom>
-          <a:noFill/>
-          <a:ln/>
-        </p:spPr>
-        <p:txBody>
-          <a:bodyPr wrap="square" lIns="635" tIns="635" rIns="635" bIns="635" rtlCol="0" anchor="ctr">
-            <a:normAutofit/>
-          </a:bodyPr>
-          <a:lstStyle/>
-          <a:p>
-            <a:pPr algn="ctr" indent="0" marL="0">
-              <a:buNone/>
-            </a:pPr>
-            <a:r>
-              <a:rPr lang="en-US" sz="1900" b="1" dirty="0">
-                <a:solidFill>
-                  <a:srgbClr val="078080"/>
-                </a:solidFill>
-                <a:latin typeface="Noto Sans CJK SC" pitchFamily="34" charset="0"/>
-                <a:ea typeface="Noto Sans CJK SC" pitchFamily="34" charset="-122"/>
-                <a:cs typeface="Noto Sans CJK SC" pitchFamily="34" charset="-120"/>
-              </a:rPr>
-              <a:t>39.19 → 46.50</a:t>
-            </a:r>
-            <a:endParaRPr lang="en-US" sz="1900" dirty="0"/>
-          </a:p>
-        </p:txBody>
-      </p:sp>
-      <p:sp>
-        <p:nvSpPr>
-          <p:cNvPr id="8" name="Text 6"/>
-          <p:cNvSpPr/>
-          <p:nvPr/>
-        </p:nvSpPr>
-        <p:spPr>
-          <a:xfrm>
-            <a:off x="9372600" y="3886200"/>
-            <a:ext cx="1463040" cy="201168"/>
-          </a:xfrm>
-          <a:prstGeom prst="rect">
-            <a:avLst/>
-          </a:prstGeom>
-          <a:noFill/>
-          <a:ln/>
-        </p:spPr>
-        <p:txBody>
-          <a:bodyPr wrap="square" lIns="635" tIns="635" rIns="635" bIns="635" rtlCol="0" anchor="ctr">
-            <a:normAutofit/>
-          </a:bodyPr>
-          <a:lstStyle/>
-          <a:p>
-            <a:pPr algn="ctr" indent="0" marL="0">
-              <a:buNone/>
-            </a:pPr>
-            <a:r>
-              <a:rPr lang="en-US" sz="880" dirty="0">
-                <a:solidFill>
-                  <a:srgbClr val="4B5563"/>
-                </a:solidFill>
-                <a:latin typeface="Noto Sans CJK SC" pitchFamily="34" charset="0"/>
-                <a:ea typeface="Noto Sans CJK SC" pitchFamily="34" charset="-122"/>
-                <a:cs typeface="Noto Sans CJK SC" pitchFamily="34" charset="-120"/>
-              </a:rPr>
-              <a:t>完整改善</a:t>
-            </a:r>
-            <a:endParaRPr lang="en-US" sz="880" dirty="0"/>
-          </a:p>
-        </p:txBody>
-      </p:sp>
-      <p:sp>
-        <p:nvSpPr>
-          <p:cNvPr id="9" name="Text 7"/>
-          <p:cNvSpPr/>
-          <p:nvPr/>
-        </p:nvSpPr>
-        <p:spPr>
-          <a:xfrm>
-            <a:off x="9372600" y="4105656"/>
-            <a:ext cx="1463040" cy="384048"/>
-          </a:xfrm>
-          <a:prstGeom prst="rect">
-            <a:avLst/>
-          </a:prstGeom>
-          <a:noFill/>
-          <a:ln/>
-        </p:spPr>
-        <p:txBody>
-          <a:bodyPr wrap="square" lIns="635" tIns="635" rIns="635" bIns="635" rtlCol="0" anchor="ctr">
-            <a:normAutofit/>
-          </a:bodyPr>
-          <a:lstStyle/>
-          <a:p>
-            <a:pPr algn="ctr" indent="0" marL="0">
-              <a:buNone/>
-            </a:pPr>
-            <a:r>
-              <a:rPr lang="en-US" sz="1900" b="1" dirty="0">
-                <a:solidFill>
-                  <a:srgbClr val="B86B00"/>
-                </a:solidFill>
-                <a:latin typeface="Noto Sans CJK SC" pitchFamily="34" charset="0"/>
-                <a:ea typeface="Noto Sans CJK SC" pitchFamily="34" charset="-122"/>
-                <a:cs typeface="Noto Sans CJK SC" pitchFamily="34" charset="-120"/>
-              </a:rPr>
-              <a:t>2/3</a:t>
-            </a:r>
-            <a:endParaRPr lang="en-US" sz="1900" dirty="0"/>
-          </a:p>
-        </p:txBody>
-      </p:sp>
-      <p:sp>
-        <p:nvSpPr>
-          <p:cNvPr id="10" name="Text 8"/>
-          <p:cNvSpPr/>
-          <p:nvPr/>
-        </p:nvSpPr>
-        <p:spPr>
-          <a:xfrm>
-            <a:off x="10424160" y="6565392"/>
-            <a:ext cx="1280160" cy="137160"/>
-          </a:xfrm>
-          <a:prstGeom prst="rect">
-            <a:avLst/>
-          </a:prstGeom>
-          <a:noFill/>
-          <a:ln/>
-        </p:spPr>
-        <p:txBody>
-          <a:bodyPr wrap="square" lIns="635" tIns="635" rIns="635" bIns="635" rtlCol="0" anchor="ctr">
-            <a:normAutofit/>
-          </a:bodyPr>
-          <a:lstStyle/>
-          <a:p>
-            <a:pPr algn="r" indent="0" marL="0">
-              <a:buNone/>
-            </a:pPr>
-            <a:r>
-              <a:rPr lang="en-US" sz="750" dirty="0">
-                <a:solidFill>
-                  <a:srgbClr val="4B5563"/>
-                </a:solidFill>
-                <a:latin typeface="Noto Sans CJK SC" pitchFamily="34" charset="0"/>
-                <a:ea typeface="Noto Sans CJK SC" pitchFamily="34" charset="-122"/>
-                <a:cs typeface="Noto Sans CJK SC" pitchFamily="34" charset="-120"/>
-              </a:rPr>
-              <a:t>FAS 实验答辩  ·  9</a:t>
+                <a:latin typeface="Noto Sans CJK JP" pitchFamily="34" charset="0"/>
+                <a:ea typeface="Noto Sans CJK JP" pitchFamily="34" charset="-122"/>
+                <a:cs typeface="Noto Sans CJK JP" pitchFamily="34" charset="-120"/>
+              </a:rPr>
+              <a:t>FAS 最终答辩 · 9</a:t>
             </a:r>
             <a:endParaRPr lang="en-US" sz="750" dirty="0"/>
           </a:p>
@@ -8876,7 +9131,7 @@
     </a:clrScheme>
     <a:fontScheme name="Office">
       <a:majorFont>
-        <a:latin typeface="Noto Sans CJK SC"/>
+        <a:latin typeface="Noto Sans CJK JP"/>
         <a:ea typeface=""/>
         <a:cs typeface=""/>
         <a:font script="Jpan" typeface="游ゴシック Light"/>
@@ -8928,7 +9183,7 @@
         <a:font script="Tfng" typeface="Ebrima"/>
       </a:majorFont>
       <a:minorFont>
-        <a:latin typeface="Noto Sans CJK SC"/>
+        <a:latin typeface="Noto Sans CJK JP"/>
         <a:ea typeface=""/>
         <a:cs typeface=""/>
         <a:font script="Jpan" typeface="游ゴシック"/>
